--- a/ppt/KondraguntaLakshmiChaitanya_X25171216_smart-agriculture.pptx
+++ b/ppt/KondraguntaLakshmiChaitanya_X25171216_smart-agriculture.pptx
@@ -1151,16 +1151,16 @@
         <p:spPr>
           <a:xfrm>
             <a:off x="640080" y="914400"/>
-            <a:ext cx="10972800" cy="914400"/>
-          </a:xfrm>
-          <a:prstGeom prst="rect">
-            <a:avLst/>
-          </a:prstGeom>
-          <a:noFill/>
-          <a:ln/>
-        </p:spPr>
-        <p:txBody>
-          <a:bodyPr wrap="square" rtlCol="0" anchor="ctr"/>
+            <a:ext cx="10972800" cy="1280160"/>
+          </a:xfrm>
+          <a:prstGeom prst="rect">
+            <a:avLst/>
+          </a:prstGeom>
+          <a:noFill/>
+          <a:ln/>
+        </p:spPr>
+        <p:txBody>
+          <a:bodyPr wrap="square" rtlCol="0" anchor="t"/>
           <a:lstStyle/>
           <a:p>
             <a:pPr algn="l" indent="0" marL="0">
@@ -1189,7 +1189,7 @@
         </p:nvSpPr>
         <p:spPr>
           <a:xfrm>
-            <a:off x="658368" y="1783080"/>
+            <a:off x="658368" y="2148840"/>
             <a:ext cx="10972800" cy="365760"/>
           </a:xfrm>
           <a:prstGeom prst="rect">
@@ -1202,7 +1202,7 @@
           <a:bodyPr wrap="square" rtlCol="0" anchor="ctr"/>
           <a:lstStyle/>
           <a:p>
-            <a:pPr algn="l" indent="0" marL="0">
+            <a:pPr indent="0" marL="0">
               <a:buNone/>
             </a:pPr>
             <a:r>
@@ -1228,8 +1228,8 @@
         </p:nvSpPr>
         <p:spPr>
           <a:xfrm>
-            <a:off x="658368" y="2468880"/>
-            <a:ext cx="10058400" cy="1005840"/>
+            <a:off x="658368" y="2697480"/>
+            <a:ext cx="10424160" cy="1371600"/>
           </a:xfrm>
           <a:prstGeom prst="rect">
             <a:avLst/>
@@ -1241,14 +1241,14 @@
           <a:bodyPr wrap="square" rtlCol="0" anchor="ctr"/>
           <a:lstStyle/>
           <a:p>
-            <a:pPr algn="l" indent="0" marL="0">
+            <a:pPr indent="0" marL="0">
               <a:lnSpc>
                 <a:spcPct val="110000"/>
               </a:lnSpc>
               <a:buNone/>
             </a:pPr>
             <a:r>
-              <a:rPr lang="en-US" sz="2100" dirty="0">
+              <a:rPr lang="en-US" sz="2000" dirty="0">
                 <a:solidFill>
                   <a:srgbClr val="CFE3CE"/>
                 </a:solidFill>
@@ -1258,7 +1258,7 @@
               </a:rPr>
               <a:t>Fixed-schedule field checks reveal a dry root zone, an overnight frost, or a fungal-risk humidity spell only after the damage is done.</a:t>
             </a:r>
-            <a:endParaRPr lang="en-US" sz="2100" dirty="0"/>
+            <a:endParaRPr lang="en-US" sz="2000" dirty="0"/>
           </a:p>
         </p:txBody>
       </p:sp>
@@ -1270,7 +1270,7 @@
         </p:nvSpPr>
         <p:spPr>
           <a:xfrm>
-            <a:off x="658368" y="3977640"/>
+            <a:off x="658368" y="4206240"/>
             <a:ext cx="2651760" cy="566928"/>
           </a:xfrm>
           <a:prstGeom prst="roundRect">
@@ -1297,7 +1297,7 @@
         </p:nvSpPr>
         <p:spPr>
           <a:xfrm>
-            <a:off x="658368" y="3977640"/>
+            <a:off x="658368" y="4206240"/>
             <a:ext cx="2651760" cy="566928"/>
           </a:xfrm>
           <a:prstGeom prst="rect">
@@ -1336,7 +1336,7 @@
         </p:nvSpPr>
         <p:spPr>
           <a:xfrm>
-            <a:off x="3538728" y="3977640"/>
+            <a:off x="3538728" y="4206240"/>
             <a:ext cx="2651760" cy="566928"/>
           </a:xfrm>
           <a:prstGeom prst="roundRect">
@@ -1363,7 +1363,7 @@
         </p:nvSpPr>
         <p:spPr>
           <a:xfrm>
-            <a:off x="3538728" y="3977640"/>
+            <a:off x="3538728" y="4206240"/>
             <a:ext cx="2651760" cy="566928"/>
           </a:xfrm>
           <a:prstGeom prst="rect">
@@ -1402,7 +1402,7 @@
         </p:nvSpPr>
         <p:spPr>
           <a:xfrm>
-            <a:off x="6419088" y="3977640"/>
+            <a:off x="6419088" y="4206240"/>
             <a:ext cx="2651760" cy="566928"/>
           </a:xfrm>
           <a:prstGeom prst="roundRect">
@@ -1429,7 +1429,7 @@
         </p:nvSpPr>
         <p:spPr>
           <a:xfrm>
-            <a:off x="6419088" y="3977640"/>
+            <a:off x="6419088" y="4206240"/>
             <a:ext cx="2651760" cy="566928"/>
           </a:xfrm>
           <a:prstGeom prst="rect">
@@ -1468,7 +1468,7 @@
         </p:nvSpPr>
         <p:spPr>
           <a:xfrm>
-            <a:off x="658368" y="6035040"/>
+            <a:off x="658368" y="6126480"/>
             <a:ext cx="10972800" cy="365760"/>
           </a:xfrm>
           <a:prstGeom prst="rect">
@@ -1481,7 +1481,7 @@
           <a:bodyPr wrap="square" rtlCol="0" anchor="ctr"/>
           <a:lstStyle/>
           <a:p>
-            <a:pPr algn="l" indent="0" marL="0">
+            <a:pPr indent="0" marL="0">
               <a:buNone/>
             </a:pPr>
             <a:r>
@@ -1740,7 +1740,7 @@
           </a:solidFill>
           <a:ln w="19050">
             <a:solidFill>
-              <a:srgbClr val="2E7D46"/>
+              <a:srgbClr val="6A994E"/>
             </a:solidFill>
             <a:prstDash val="solid"/>
           </a:ln>
@@ -1761,7 +1761,7 @@
             <a:avLst/>
           </a:prstGeom>
           <a:solidFill>
-            <a:srgbClr val="2E7D46"/>
+            <a:srgbClr val="6A994E"/>
           </a:solidFill>
           <a:ln/>
         </p:spPr>
@@ -2136,7 +2136,7 @@
                 <a:ea typeface="Calibri" pitchFamily="34" charset="-122"/>
                 <a:cs typeface="Calibri" pitchFamily="34" charset="-120"/>
               </a:rPr>
-              <a:t>serverless ingest</a:t>
+              <a:t>python3.12 ingest</a:t>
             </a:r>
             <a:endParaRPr lang="en-US" sz="1050" dirty="0"/>
           </a:p>
@@ -2527,7 +2527,7 @@
         <p:spPr>
           <a:xfrm>
             <a:off x="640080" y="5212080"/>
-            <a:ext cx="10972800" cy="548640"/>
+            <a:ext cx="10972800" cy="640080"/>
           </a:xfrm>
           <a:prstGeom prst="rect">
             <a:avLst/>
@@ -2543,7 +2543,7 @@
               <a:buNone/>
             </a:pPr>
             <a:r>
-              <a:rPr lang="en-US" sz="1600" i="1" dirty="0">
+              <a:rPr lang="en-US" sz="1500" i="1" dirty="0">
                 <a:solidFill>
                   <a:srgbClr val="1F5130"/>
                 </a:solidFill>
@@ -2553,7 +2553,7 @@
               </a:rPr>
               <a:t>Raw readings never leave the edge — only compact 10-second window summaries cross into the cloud.</a:t>
             </a:r>
-            <a:endParaRPr lang="en-US" sz="1600" dirty="0"/>
+            <a:endParaRPr lang="en-US" sz="1500" dirty="0"/>
           </a:p>
         </p:txBody>
       </p:sp>
@@ -3196,12 +3196,12 @@
         </p:nvSpPr>
         <p:spPr>
           <a:xfrm>
-            <a:off x="731520" y="1965960"/>
-            <a:ext cx="10698480" cy="1600200"/>
+            <a:off x="731520" y="1920240"/>
+            <a:ext cx="10698480" cy="1965960"/>
           </a:xfrm>
           <a:prstGeom prst="roundRect">
             <a:avLst>
-              <a:gd name="adj" fmla="val 5714"/>
+              <a:gd name="adj" fmla="val 4651"/>
             </a:avLst>
           </a:prstGeom>
           <a:solidFill>
@@ -3223,8 +3223,8 @@
         </p:nvSpPr>
         <p:spPr>
           <a:xfrm>
-            <a:off x="1005840" y="2167128"/>
-            <a:ext cx="2743200" cy="457200"/>
+            <a:off x="1005840" y="2103120"/>
+            <a:ext cx="3657600" cy="457200"/>
           </a:xfrm>
           <a:prstGeom prst="rect">
             <a:avLst/>
@@ -3240,7 +3240,7 @@
               <a:buNone/>
             </a:pPr>
             <a:r>
-              <a:rPr lang="en-US" sz="2000" b="1" dirty="0">
+              <a:rPr lang="en-US" sz="1900" b="1" dirty="0">
                 <a:solidFill>
                   <a:srgbClr val="E0A83E"/>
                 </a:solidFill>
@@ -3250,7 +3250,7 @@
               </a:rPr>
               <a:t>Problem</a:t>
             </a:r>
-            <a:endParaRPr lang="en-US" sz="2000" dirty="0"/>
+            <a:endParaRPr lang="en-US" sz="1900" dirty="0"/>
           </a:p>
         </p:txBody>
       </p:sp>
@@ -3262,8 +3262,8 @@
         </p:nvSpPr>
         <p:spPr>
           <a:xfrm>
-            <a:off x="1005840" y="2624328"/>
-            <a:ext cx="9966960" cy="822960"/>
+            <a:off x="1005840" y="2578608"/>
+            <a:ext cx="9966960" cy="1188720"/>
           </a:xfrm>
           <a:prstGeom prst="rect">
             <a:avLst/>
@@ -3282,7 +3282,7 @@
               <a:buNone/>
             </a:pPr>
             <a:r>
-              <a:rPr lang="en-US" sz="1450" dirty="0">
+              <a:rPr lang="en-US" sz="1300" dirty="0">
                 <a:solidFill>
                   <a:srgbClr val="CFE3CE"/>
                 </a:solidFill>
@@ -3292,7 +3292,7 @@
               </a:rPr>
               <a:t>The dashboard totalled its stored records with a single DynamoDB scan, which silently caps at ~1 MB. All 39 tests and the full emulator run passed, so the undercount only surfaced on the real AWS account — no error, just a smaller number.</a:t>
             </a:r>
-            <a:endParaRPr lang="en-US" sz="1450" dirty="0"/>
+            <a:endParaRPr lang="en-US" sz="1300" dirty="0"/>
           </a:p>
         </p:txBody>
       </p:sp>
@@ -3304,12 +3304,12 @@
         </p:nvSpPr>
         <p:spPr>
           <a:xfrm>
-            <a:off x="731520" y="3886200"/>
-            <a:ext cx="10698480" cy="1600200"/>
+            <a:off x="731520" y="4041648"/>
+            <a:ext cx="10698480" cy="1965960"/>
           </a:xfrm>
           <a:prstGeom prst="roundRect">
             <a:avLst>
-              <a:gd name="adj" fmla="val 5714"/>
+              <a:gd name="adj" fmla="val 4651"/>
             </a:avLst>
           </a:prstGeom>
           <a:solidFill>
@@ -3331,8 +3331,8 @@
         </p:nvSpPr>
         <p:spPr>
           <a:xfrm>
-            <a:off x="1005840" y="4087368"/>
-            <a:ext cx="2743200" cy="457200"/>
+            <a:off x="1005840" y="4224528"/>
+            <a:ext cx="3657600" cy="457200"/>
           </a:xfrm>
           <a:prstGeom prst="rect">
             <a:avLst/>
@@ -3348,7 +3348,7 @@
               <a:buNone/>
             </a:pPr>
             <a:r>
-              <a:rPr lang="en-US" sz="2000" b="1" dirty="0">
+              <a:rPr lang="en-US" sz="1900" b="1" dirty="0">
                 <a:solidFill>
                   <a:srgbClr val="6A994E"/>
                 </a:solidFill>
@@ -3358,7 +3358,7 @@
               </a:rPr>
               <a:t>Solution</a:t>
             </a:r>
-            <a:endParaRPr lang="en-US" sz="2000" dirty="0"/>
+            <a:endParaRPr lang="en-US" sz="1900" dirty="0"/>
           </a:p>
         </p:txBody>
       </p:sp>
@@ -3370,8 +3370,8 @@
         </p:nvSpPr>
         <p:spPr>
           <a:xfrm>
-            <a:off x="1005840" y="4544568"/>
-            <a:ext cx="9966960" cy="822960"/>
+            <a:off x="1005840" y="4700016"/>
+            <a:ext cx="9966960" cy="1188720"/>
           </a:xfrm>
           <a:prstGeom prst="rect">
             <a:avLst/>
@@ -3390,7 +3390,7 @@
               <a:buNone/>
             </a:pPr>
             <a:r>
-              <a:rPr lang="en-US" sz="1450" dirty="0">
+              <a:rPr lang="en-US" sz="1300" dirty="0">
                 <a:solidFill>
                   <a:srgbClr val="CFE3CE"/>
                 </a:solidFill>
@@ -3400,7 +3400,7 @@
               </a:rPr>
               <a:t>The count now follows DynamoDB's pagination cursor and sums every page. Locked in by a three-page test (500 + 500 + 214 = 1,214) and re-verified against the live deployed table.</a:t>
             </a:r>
-            <a:endParaRPr lang="en-US" sz="1450" dirty="0"/>
+            <a:endParaRPr lang="en-US" sz="1300" dirty="0"/>
           </a:p>
         </p:txBody>
       </p:sp>

--- a/ppt/KondraguntaLakshmiChaitanya_X25171216_smart-agriculture.pptx
+++ b/ppt/KondraguntaLakshmiChaitanya_X25171216_smart-agriculture.pptx
@@ -1144,14 +1144,34 @@
       </p:grpSpPr>
       <p:sp>
         <p:nvSpPr>
-          <p:cNvPr id="2" name="Text 0"/>
-          <p:cNvSpPr/>
-          <p:nvPr/>
-        </p:nvSpPr>
-        <p:spPr>
-          <a:xfrm>
-            <a:off x="640080" y="914400"/>
-            <a:ext cx="10972800" cy="1280160"/>
+          <p:cNvPr id="2" name="Shape 0"/>
+          <p:cNvSpPr/>
+          <p:nvPr/>
+        </p:nvSpPr>
+        <p:spPr>
+          <a:xfrm>
+            <a:off x="0" y="0"/>
+            <a:ext cx="4663440" cy="6858000"/>
+          </a:xfrm>
+          <a:prstGeom prst="rect">
+            <a:avLst/>
+          </a:prstGeom>
+          <a:solidFill>
+            <a:srgbClr val="1F5130"/>
+          </a:solidFill>
+          <a:ln/>
+        </p:spPr>
+      </p:sp>
+      <p:sp>
+        <p:nvSpPr>
+          <p:cNvPr id="3" name="Text 1"/>
+          <p:cNvSpPr/>
+          <p:nvPr/>
+        </p:nvSpPr>
+        <p:spPr>
+          <a:xfrm>
+            <a:off x="502920" y="1280160"/>
+            <a:ext cx="3749040" cy="2377440"/>
           </a:xfrm>
           <a:prstGeom prst="rect">
             <a:avLst/>
@@ -1163,11 +1183,11 @@
           <a:bodyPr wrap="square" rtlCol="0" anchor="t"/>
           <a:lstStyle/>
           <a:p>
-            <a:pPr algn="l" indent="0" marL="0">
+            <a:pPr indent="0" marL="0">
               <a:buNone/>
             </a:pPr>
             <a:r>
-              <a:rPr lang="en-US" sz="4000" b="1" dirty="0">
+              <a:rPr lang="en-US" sz="3400" b="1" dirty="0">
                 <a:solidFill>
                   <a:srgbClr val="FFFFFF"/>
                 </a:solidFill>
@@ -1177,20 +1197,20 @@
               </a:rPr>
               <a:t>Smart Agriculture Field Monitoring</a:t>
             </a:r>
-            <a:endParaRPr lang="en-US" sz="4000" dirty="0"/>
-          </a:p>
-        </p:txBody>
-      </p:sp>
-      <p:sp>
-        <p:nvSpPr>
-          <p:cNvPr id="3" name="Text 1"/>
-          <p:cNvSpPr/>
-          <p:nvPr/>
-        </p:nvSpPr>
-        <p:spPr>
-          <a:xfrm>
-            <a:off x="658368" y="2148840"/>
-            <a:ext cx="10972800" cy="365760"/>
+            <a:endParaRPr lang="en-US" sz="3400" dirty="0"/>
+          </a:p>
+        </p:txBody>
+      </p:sp>
+      <p:sp>
+        <p:nvSpPr>
+          <p:cNvPr id="4" name="Text 2"/>
+          <p:cNvSpPr/>
+          <p:nvPr/>
+        </p:nvSpPr>
+        <p:spPr>
+          <a:xfrm>
+            <a:off x="521208" y="5394960"/>
+            <a:ext cx="3840480" cy="731520"/>
           </a:xfrm>
           <a:prstGeom prst="rect">
             <a:avLst/>
@@ -1206,9 +1226,9 @@
               <a:buNone/>
             </a:pPr>
             <a:r>
-              <a:rPr lang="en-US" sz="1600" dirty="0">
+              <a:rPr lang="en-US" sz="1500" dirty="0">
                 <a:solidFill>
-                  <a:srgbClr val="6A994E"/>
+                  <a:srgbClr val="CFE3CE"/>
                 </a:solidFill>
                 <a:latin typeface="Calibri" pitchFamily="34" charset="0"/>
                 <a:ea typeface="Calibri" pitchFamily="34" charset="-122"/>
@@ -1216,20 +1236,20 @@
               </a:rPr>
               <a:t>Kondragunta Lakshmi Chaitanya   ·   X25171216</a:t>
             </a:r>
-            <a:endParaRPr lang="en-US" sz="1600" dirty="0"/>
-          </a:p>
-        </p:txBody>
-      </p:sp>
-      <p:sp>
-        <p:nvSpPr>
-          <p:cNvPr id="4" name="Text 2"/>
-          <p:cNvSpPr/>
-          <p:nvPr/>
-        </p:nvSpPr>
-        <p:spPr>
-          <a:xfrm>
-            <a:off x="658368" y="2697480"/>
-            <a:ext cx="10424160" cy="1371600"/>
+            <a:endParaRPr lang="en-US" sz="1500" dirty="0"/>
+          </a:p>
+        </p:txBody>
+      </p:sp>
+      <p:sp>
+        <p:nvSpPr>
+          <p:cNvPr id="5" name="Text 3"/>
+          <p:cNvSpPr/>
+          <p:nvPr/>
+        </p:nvSpPr>
+        <p:spPr>
+          <a:xfrm>
+            <a:off x="5120640" y="1371600"/>
+            <a:ext cx="6492240" cy="2011680"/>
           </a:xfrm>
           <a:prstGeom prst="rect">
             <a:avLst/>
@@ -1243,7 +1263,7 @@
           <a:p>
             <a:pPr indent="0" marL="0">
               <a:lnSpc>
-                <a:spcPct val="110000"/>
+                <a:spcPct val="112000"/>
               </a:lnSpc>
               <a:buNone/>
             </a:pPr>
@@ -1264,14 +1284,14 @@
       </p:sp>
       <p:sp>
         <p:nvSpPr>
-          <p:cNvPr id="5" name="Shape 3"/>
-          <p:cNvSpPr/>
-          <p:nvPr/>
-        </p:nvSpPr>
-        <p:spPr>
-          <a:xfrm>
-            <a:off x="658368" y="4206240"/>
-            <a:ext cx="2651760" cy="566928"/>
+          <p:cNvPr id="6" name="Shape 4"/>
+          <p:cNvSpPr/>
+          <p:nvPr/>
+        </p:nvSpPr>
+        <p:spPr>
+          <a:xfrm>
+            <a:off x="5120640" y="4023360"/>
+            <a:ext cx="2926080" cy="566928"/>
           </a:xfrm>
           <a:prstGeom prst="roundRect">
             <a:avLst>
@@ -1291,14 +1311,14 @@
       </p:sp>
       <p:sp>
         <p:nvSpPr>
-          <p:cNvPr id="6" name="Text 4"/>
-          <p:cNvSpPr/>
-          <p:nvPr/>
-        </p:nvSpPr>
-        <p:spPr>
-          <a:xfrm>
-            <a:off x="658368" y="4206240"/>
-            <a:ext cx="2651760" cy="566928"/>
+          <p:cNvPr id="7" name="Text 5"/>
+          <p:cNvSpPr/>
+          <p:nvPr/>
+        </p:nvSpPr>
+        <p:spPr>
+          <a:xfrm>
+            <a:off x="5120640" y="4023360"/>
+            <a:ext cx="2926080" cy="566928"/>
           </a:xfrm>
           <a:prstGeom prst="rect">
             <a:avLst/>
@@ -1314,7 +1334,7 @@
               <a:buNone/>
             </a:pPr>
             <a:r>
-              <a:rPr lang="en-US" sz="1400" b="1" dirty="0">
+              <a:rPr lang="en-US" sz="1350" b="1" dirty="0">
                 <a:solidFill>
                   <a:srgbClr val="E0A83E"/>
                 </a:solidFill>
@@ -1324,20 +1344,20 @@
               </a:rPr>
               <a:t>Soil moisture &lt; 20%</a:t>
             </a:r>
-            <a:endParaRPr lang="en-US" sz="1400" dirty="0"/>
-          </a:p>
-        </p:txBody>
-      </p:sp>
-      <p:sp>
-        <p:nvSpPr>
-          <p:cNvPr id="7" name="Shape 5"/>
-          <p:cNvSpPr/>
-          <p:nvPr/>
-        </p:nvSpPr>
-        <p:spPr>
-          <a:xfrm>
-            <a:off x="3538728" y="4206240"/>
-            <a:ext cx="2651760" cy="566928"/>
+            <a:endParaRPr lang="en-US" sz="1350" dirty="0"/>
+          </a:p>
+        </p:txBody>
+      </p:sp>
+      <p:sp>
+        <p:nvSpPr>
+          <p:cNvPr id="8" name="Shape 6"/>
+          <p:cNvSpPr/>
+          <p:nvPr/>
+        </p:nvSpPr>
+        <p:spPr>
+          <a:xfrm>
+            <a:off x="5120640" y="4709160"/>
+            <a:ext cx="2926080" cy="566928"/>
           </a:xfrm>
           <a:prstGeom prst="roundRect">
             <a:avLst>
@@ -1357,14 +1377,14 @@
       </p:sp>
       <p:sp>
         <p:nvSpPr>
-          <p:cNvPr id="8" name="Text 6"/>
-          <p:cNvSpPr/>
-          <p:nvPr/>
-        </p:nvSpPr>
-        <p:spPr>
-          <a:xfrm>
-            <a:off x="3538728" y="4206240"/>
-            <a:ext cx="2651760" cy="566928"/>
+          <p:cNvPr id="9" name="Text 7"/>
+          <p:cNvSpPr/>
+          <p:nvPr/>
+        </p:nvSpPr>
+        <p:spPr>
+          <a:xfrm>
+            <a:off x="5120640" y="4709160"/>
+            <a:ext cx="2926080" cy="566928"/>
           </a:xfrm>
           <a:prstGeom prst="rect">
             <a:avLst/>
@@ -1380,7 +1400,7 @@
               <a:buNone/>
             </a:pPr>
             <a:r>
-              <a:rPr lang="en-US" sz="1400" b="1" dirty="0">
+              <a:rPr lang="en-US" sz="1350" b="1" dirty="0">
                 <a:solidFill>
                   <a:srgbClr val="E0A83E"/>
                 </a:solidFill>
@@ -1390,20 +1410,20 @@
               </a:rPr>
               <a:t>Temperature &lt; 3 °C</a:t>
             </a:r>
-            <a:endParaRPr lang="en-US" sz="1400" dirty="0"/>
-          </a:p>
-        </p:txBody>
-      </p:sp>
-      <p:sp>
-        <p:nvSpPr>
-          <p:cNvPr id="9" name="Shape 7"/>
-          <p:cNvSpPr/>
-          <p:nvPr/>
-        </p:nvSpPr>
-        <p:spPr>
-          <a:xfrm>
-            <a:off x="6419088" y="4206240"/>
-            <a:ext cx="2651760" cy="566928"/>
+            <a:endParaRPr lang="en-US" sz="1350" dirty="0"/>
+          </a:p>
+        </p:txBody>
+      </p:sp>
+      <p:sp>
+        <p:nvSpPr>
+          <p:cNvPr id="10" name="Shape 8"/>
+          <p:cNvSpPr/>
+          <p:nvPr/>
+        </p:nvSpPr>
+        <p:spPr>
+          <a:xfrm>
+            <a:off x="5120640" y="5394960"/>
+            <a:ext cx="2926080" cy="566928"/>
           </a:xfrm>
           <a:prstGeom prst="roundRect">
             <a:avLst>
@@ -1423,14 +1443,14 @@
       </p:sp>
       <p:sp>
         <p:nvSpPr>
-          <p:cNvPr id="10" name="Text 8"/>
-          <p:cNvSpPr/>
-          <p:nvPr/>
-        </p:nvSpPr>
-        <p:spPr>
-          <a:xfrm>
-            <a:off x="6419088" y="4206240"/>
-            <a:ext cx="2651760" cy="566928"/>
+          <p:cNvPr id="11" name="Text 9"/>
+          <p:cNvSpPr/>
+          <p:nvPr/>
+        </p:nvSpPr>
+        <p:spPr>
+          <a:xfrm>
+            <a:off x="5120640" y="5394960"/>
+            <a:ext cx="2926080" cy="566928"/>
           </a:xfrm>
           <a:prstGeom prst="rect">
             <a:avLst/>
@@ -1446,7 +1466,7 @@
               <a:buNone/>
             </a:pPr>
             <a:r>
-              <a:rPr lang="en-US" sz="1400" b="1" dirty="0">
+              <a:rPr lang="en-US" sz="1350" b="1" dirty="0">
                 <a:solidFill>
                   <a:srgbClr val="E0A83E"/>
                 </a:solidFill>
@@ -1456,20 +1476,20 @@
               </a:rPr>
               <a:t>Humidity &gt; 90%</a:t>
             </a:r>
-            <a:endParaRPr lang="en-US" sz="1400" dirty="0"/>
-          </a:p>
-        </p:txBody>
-      </p:sp>
-      <p:sp>
-        <p:nvSpPr>
-          <p:cNvPr id="11" name="Text 9"/>
-          <p:cNvSpPr/>
-          <p:nvPr/>
-        </p:nvSpPr>
-        <p:spPr>
-          <a:xfrm>
-            <a:off x="658368" y="6126480"/>
-            <a:ext cx="10972800" cy="365760"/>
+            <a:endParaRPr lang="en-US" sz="1350" dirty="0"/>
+          </a:p>
+        </p:txBody>
+      </p:sp>
+      <p:sp>
+        <p:nvSpPr>
+          <p:cNvPr id="12" name="Text 10"/>
+          <p:cNvSpPr/>
+          <p:nvPr/>
+        </p:nvSpPr>
+        <p:spPr>
+          <a:xfrm>
+            <a:off x="5120640" y="6172200"/>
+            <a:ext cx="6400800" cy="365760"/>
           </a:xfrm>
           <a:prstGeom prst="rect">
             <a:avLst/>
@@ -1485,7 +1505,7 @@
               <a:buNone/>
             </a:pPr>
             <a:r>
-              <a:rPr lang="en-US" sz="1300" dirty="0">
+              <a:rPr lang="en-US" sz="1250" dirty="0">
                 <a:solidFill>
                   <a:srgbClr val="5C6B60"/>
                 </a:solidFill>
@@ -1495,7 +1515,7 @@
               </a:rPr>
               <a:t>Fog &amp; Edge Computing (H9FECC)   ·   deployed live on AWS</a:t>
             </a:r>
-            <a:endParaRPr lang="en-US" sz="1300" dirty="0"/>
+            <a:endParaRPr lang="en-US" sz="1250" dirty="0"/>
           </a:p>
         </p:txBody>
       </p:sp>
@@ -1578,12 +1598,12 @@
         </p:nvSpPr>
         <p:spPr>
           <a:xfrm>
-            <a:off x="640080" y="2468880"/>
-            <a:ext cx="1572768" cy="1371600"/>
+            <a:off x="640080" y="1874520"/>
+            <a:ext cx="2286000" cy="1280160"/>
           </a:xfrm>
           <a:prstGeom prst="roundRect">
             <a:avLst>
-              <a:gd name="adj" fmla="val 6667"/>
+              <a:gd name="adj" fmla="val 7143"/>
             </a:avLst>
           </a:prstGeom>
           <a:solidFill>
@@ -1605,8 +1625,8 @@
         </p:nvSpPr>
         <p:spPr>
           <a:xfrm>
-            <a:off x="1325880" y="2670048"/>
-            <a:ext cx="201168" cy="201168"/>
+            <a:off x="1691640" y="2039112"/>
+            <a:ext cx="182880" cy="182880"/>
           </a:xfrm>
           <a:prstGeom prst="ellipse">
             <a:avLst/>
@@ -1625,8 +1645,8 @@
         </p:nvSpPr>
         <p:spPr>
           <a:xfrm>
-            <a:off x="594360" y="2926080"/>
-            <a:ext cx="1664208" cy="411480"/>
+            <a:off x="612648" y="2258568"/>
+            <a:ext cx="2340864" cy="365760"/>
           </a:xfrm>
           <a:prstGeom prst="rect">
             <a:avLst/>
@@ -1664,8 +1684,8 @@
         </p:nvSpPr>
         <p:spPr>
           <a:xfrm>
-            <a:off x="621792" y="3310128"/>
-            <a:ext cx="1609344" cy="457200"/>
+            <a:off x="640080" y="2606040"/>
+            <a:ext cx="2286000" cy="411480"/>
           </a:xfrm>
           <a:prstGeom prst="rect">
             <a:avLst/>
@@ -1703,8 +1723,8 @@
         </p:nvSpPr>
         <p:spPr>
           <a:xfrm>
-            <a:off x="2231136" y="3154680"/>
-            <a:ext cx="258409" cy="0"/>
+            <a:off x="2944368" y="2514600"/>
+            <a:ext cx="1975104" cy="0"/>
           </a:xfrm>
           <a:prstGeom prst="line">
             <a:avLst/>
@@ -1715,6 +1735,7 @@
               <a:srgbClr val="6A994E"/>
             </a:solidFill>
             <a:prstDash val="solid"/>
+            <a:headEnd type="none"/>
             <a:tailEnd type="triangle"/>
           </a:ln>
         </p:spPr>
@@ -1727,12 +1748,12 @@
         </p:nvSpPr>
         <p:spPr>
           <a:xfrm>
-            <a:off x="2507833" y="2468880"/>
-            <a:ext cx="1572768" cy="1371600"/>
+            <a:off x="4937760" y="1874520"/>
+            <a:ext cx="2286000" cy="1280160"/>
           </a:xfrm>
           <a:prstGeom prst="roundRect">
             <a:avLst>
-              <a:gd name="adj" fmla="val 6667"/>
+              <a:gd name="adj" fmla="val 7143"/>
             </a:avLst>
           </a:prstGeom>
           <a:solidFill>
@@ -1754,8 +1775,8 @@
         </p:nvSpPr>
         <p:spPr>
           <a:xfrm>
-            <a:off x="3193633" y="2670048"/>
-            <a:ext cx="201168" cy="201168"/>
+            <a:off x="5989320" y="2039112"/>
+            <a:ext cx="182880" cy="182880"/>
           </a:xfrm>
           <a:prstGeom prst="ellipse">
             <a:avLst/>
@@ -1774,8 +1795,8 @@
         </p:nvSpPr>
         <p:spPr>
           <a:xfrm>
-            <a:off x="2462113" y="2926080"/>
-            <a:ext cx="1664208" cy="411480"/>
+            <a:off x="4910328" y="2258568"/>
+            <a:ext cx="2340864" cy="365760"/>
           </a:xfrm>
           <a:prstGeom prst="rect">
             <a:avLst/>
@@ -1813,8 +1834,8 @@
         </p:nvSpPr>
         <p:spPr>
           <a:xfrm>
-            <a:off x="2489545" y="3310128"/>
-            <a:ext cx="1609344" cy="457200"/>
+            <a:off x="4937760" y="2606040"/>
+            <a:ext cx="2286000" cy="411480"/>
           </a:xfrm>
           <a:prstGeom prst="rect">
             <a:avLst/>
@@ -1852,8 +1873,8 @@
         </p:nvSpPr>
         <p:spPr>
           <a:xfrm>
-            <a:off x="4098889" y="3154680"/>
-            <a:ext cx="258409" cy="0"/>
+            <a:off x="7242048" y="2514600"/>
+            <a:ext cx="1975104" cy="0"/>
           </a:xfrm>
           <a:prstGeom prst="line">
             <a:avLst/>
@@ -1864,6 +1885,7 @@
               <a:srgbClr val="6A994E"/>
             </a:solidFill>
             <a:prstDash val="solid"/>
+            <a:headEnd type="none"/>
             <a:tailEnd type="triangle"/>
           </a:ln>
         </p:spPr>
@@ -1876,12 +1898,12 @@
         </p:nvSpPr>
         <p:spPr>
           <a:xfrm>
-            <a:off x="4375587" y="2468880"/>
-            <a:ext cx="1572768" cy="1371600"/>
+            <a:off x="9235440" y="1874520"/>
+            <a:ext cx="2286000" cy="1280160"/>
           </a:xfrm>
           <a:prstGeom prst="roundRect">
             <a:avLst>
-              <a:gd name="adj" fmla="val 6667"/>
+              <a:gd name="adj" fmla="val 7143"/>
             </a:avLst>
           </a:prstGeom>
           <a:solidFill>
@@ -1903,8 +1925,8 @@
         </p:nvSpPr>
         <p:spPr>
           <a:xfrm>
-            <a:off x="5061387" y="2670048"/>
-            <a:ext cx="201168" cy="201168"/>
+            <a:off x="10287000" y="2039112"/>
+            <a:ext cx="182880" cy="182880"/>
           </a:xfrm>
           <a:prstGeom prst="ellipse">
             <a:avLst/>
@@ -1923,8 +1945,8 @@
         </p:nvSpPr>
         <p:spPr>
           <a:xfrm>
-            <a:off x="4329867" y="2926080"/>
-            <a:ext cx="1664208" cy="411480"/>
+            <a:off x="9208008" y="2258568"/>
+            <a:ext cx="2340864" cy="365760"/>
           </a:xfrm>
           <a:prstGeom prst="rect">
             <a:avLst/>
@@ -1962,8 +1984,8 @@
         </p:nvSpPr>
         <p:spPr>
           <a:xfrm>
-            <a:off x="4357299" y="3310128"/>
-            <a:ext cx="1609344" cy="457200"/>
+            <a:off x="9235440" y="2606040"/>
+            <a:ext cx="2286000" cy="411480"/>
           </a:xfrm>
           <a:prstGeom prst="rect">
             <a:avLst/>
@@ -2001,36 +2023,12 @@
         </p:nvSpPr>
         <p:spPr>
           <a:xfrm>
-            <a:off x="5966643" y="3154680"/>
-            <a:ext cx="258409" cy="0"/>
-          </a:xfrm>
-          <a:prstGeom prst="line">
-            <a:avLst/>
-          </a:prstGeom>
-          <a:noFill/>
-          <a:ln w="25400">
-            <a:solidFill>
-              <a:srgbClr val="6A994E"/>
-            </a:solidFill>
-            <a:prstDash val="solid"/>
-            <a:tailEnd type="triangle"/>
-          </a:ln>
-        </p:spPr>
-      </p:sp>
-      <p:sp>
-        <p:nvSpPr>
-          <p:cNvPr id="18" name="Shape 16"/>
-          <p:cNvSpPr/>
-          <p:nvPr/>
-        </p:nvSpPr>
-        <p:spPr>
-          <a:xfrm>
-            <a:off x="6243340" y="2468880"/>
-            <a:ext cx="1572768" cy="1371600"/>
+            <a:off x="9235440" y="3520440"/>
+            <a:ext cx="2286000" cy="1280160"/>
           </a:xfrm>
           <a:prstGeom prst="roundRect">
             <a:avLst>
-              <a:gd name="adj" fmla="val 6667"/>
+              <a:gd name="adj" fmla="val 7143"/>
             </a:avLst>
           </a:prstGeom>
           <a:solidFill>
@@ -2046,14 +2044,14 @@
       </p:sp>
       <p:sp>
         <p:nvSpPr>
-          <p:cNvPr id="19" name="Shape 17"/>
-          <p:cNvSpPr/>
-          <p:nvPr/>
-        </p:nvSpPr>
-        <p:spPr>
-          <a:xfrm>
-            <a:off x="6929140" y="2670048"/>
-            <a:ext cx="201168" cy="201168"/>
+          <p:cNvPr id="18" name="Shape 16"/>
+          <p:cNvSpPr/>
+          <p:nvPr/>
+        </p:nvSpPr>
+        <p:spPr>
+          <a:xfrm>
+            <a:off x="10287000" y="3685032"/>
+            <a:ext cx="182880" cy="182880"/>
           </a:xfrm>
           <a:prstGeom prst="ellipse">
             <a:avLst/>
@@ -2066,14 +2064,14 @@
       </p:sp>
       <p:sp>
         <p:nvSpPr>
-          <p:cNvPr id="20" name="Text 18"/>
-          <p:cNvSpPr/>
-          <p:nvPr/>
-        </p:nvSpPr>
-        <p:spPr>
-          <a:xfrm>
-            <a:off x="6197620" y="2926080"/>
-            <a:ext cx="1664208" cy="411480"/>
+          <p:cNvPr id="19" name="Text 17"/>
+          <p:cNvSpPr/>
+          <p:nvPr/>
+        </p:nvSpPr>
+        <p:spPr>
+          <a:xfrm>
+            <a:off x="9208008" y="3904488"/>
+            <a:ext cx="2340864" cy="365760"/>
           </a:xfrm>
           <a:prstGeom prst="rect">
             <a:avLst/>
@@ -2105,14 +2103,14 @@
       </p:sp>
       <p:sp>
         <p:nvSpPr>
-          <p:cNvPr id="21" name="Text 19"/>
-          <p:cNvSpPr/>
-          <p:nvPr/>
-        </p:nvSpPr>
-        <p:spPr>
-          <a:xfrm>
-            <a:off x="6225052" y="3310128"/>
-            <a:ext cx="1609344" cy="457200"/>
+          <p:cNvPr id="20" name="Text 18"/>
+          <p:cNvSpPr/>
+          <p:nvPr/>
+        </p:nvSpPr>
+        <p:spPr>
+          <a:xfrm>
+            <a:off x="9235440" y="4251960"/>
+            <a:ext cx="2286000" cy="411480"/>
           </a:xfrm>
           <a:prstGeom prst="rect">
             <a:avLst/>
@@ -2144,14 +2142,14 @@
       </p:sp>
       <p:sp>
         <p:nvSpPr>
-          <p:cNvPr id="22" name="Shape 20"/>
-          <p:cNvSpPr/>
-          <p:nvPr/>
-        </p:nvSpPr>
-        <p:spPr>
-          <a:xfrm>
-            <a:off x="7834396" y="3154680"/>
-            <a:ext cx="258409" cy="0"/>
+          <p:cNvPr id="21" name="Shape 19"/>
+          <p:cNvSpPr/>
+          <p:nvPr/>
+        </p:nvSpPr>
+        <p:spPr>
+          <a:xfrm>
+            <a:off x="7242048" y="4160520"/>
+            <a:ext cx="1975104" cy="0"/>
           </a:xfrm>
           <a:prstGeom prst="line">
             <a:avLst/>
@@ -2162,24 +2160,25 @@
               <a:srgbClr val="6A994E"/>
             </a:solidFill>
             <a:prstDash val="solid"/>
-            <a:tailEnd type="triangle"/>
+            <a:headEnd type="triangle"/>
+            <a:tailEnd type="oval"/>
           </a:ln>
         </p:spPr>
       </p:sp>
       <p:sp>
         <p:nvSpPr>
-          <p:cNvPr id="23" name="Shape 21"/>
-          <p:cNvSpPr/>
-          <p:nvPr/>
-        </p:nvSpPr>
-        <p:spPr>
-          <a:xfrm>
-            <a:off x="8111094" y="2468880"/>
-            <a:ext cx="1572768" cy="1371600"/>
+          <p:cNvPr id="22" name="Shape 20"/>
+          <p:cNvSpPr/>
+          <p:nvPr/>
+        </p:nvSpPr>
+        <p:spPr>
+          <a:xfrm>
+            <a:off x="4937760" y="3520440"/>
+            <a:ext cx="2286000" cy="1280160"/>
           </a:xfrm>
           <a:prstGeom prst="roundRect">
             <a:avLst>
-              <a:gd name="adj" fmla="val 6667"/>
+              <a:gd name="adj" fmla="val 7143"/>
             </a:avLst>
           </a:prstGeom>
           <a:solidFill>
@@ -2195,14 +2194,14 @@
       </p:sp>
       <p:sp>
         <p:nvSpPr>
-          <p:cNvPr id="24" name="Shape 22"/>
-          <p:cNvSpPr/>
-          <p:nvPr/>
-        </p:nvSpPr>
-        <p:spPr>
-          <a:xfrm>
-            <a:off x="8796894" y="2670048"/>
-            <a:ext cx="201168" cy="201168"/>
+          <p:cNvPr id="23" name="Shape 21"/>
+          <p:cNvSpPr/>
+          <p:nvPr/>
+        </p:nvSpPr>
+        <p:spPr>
+          <a:xfrm>
+            <a:off x="5989320" y="3685032"/>
+            <a:ext cx="182880" cy="182880"/>
           </a:xfrm>
           <a:prstGeom prst="ellipse">
             <a:avLst/>
@@ -2215,14 +2214,14 @@
       </p:sp>
       <p:sp>
         <p:nvSpPr>
-          <p:cNvPr id="25" name="Text 23"/>
-          <p:cNvSpPr/>
-          <p:nvPr/>
-        </p:nvSpPr>
-        <p:spPr>
-          <a:xfrm>
-            <a:off x="8065374" y="2926080"/>
-            <a:ext cx="1664208" cy="411480"/>
+          <p:cNvPr id="24" name="Text 22"/>
+          <p:cNvSpPr/>
+          <p:nvPr/>
+        </p:nvSpPr>
+        <p:spPr>
+          <a:xfrm>
+            <a:off x="4910328" y="3904488"/>
+            <a:ext cx="2340864" cy="365760"/>
           </a:xfrm>
           <a:prstGeom prst="rect">
             <a:avLst/>
@@ -2254,14 +2253,14 @@
       </p:sp>
       <p:sp>
         <p:nvSpPr>
-          <p:cNvPr id="26" name="Text 24"/>
-          <p:cNvSpPr/>
-          <p:nvPr/>
-        </p:nvSpPr>
-        <p:spPr>
-          <a:xfrm>
-            <a:off x="8092806" y="3310128"/>
-            <a:ext cx="1609344" cy="457200"/>
+          <p:cNvPr id="25" name="Text 23"/>
+          <p:cNvSpPr/>
+          <p:nvPr/>
+        </p:nvSpPr>
+        <p:spPr>
+          <a:xfrm>
+            <a:off x="4937760" y="4251960"/>
+            <a:ext cx="2286000" cy="411480"/>
           </a:xfrm>
           <a:prstGeom prst="rect">
             <a:avLst/>
@@ -2293,14 +2292,14 @@
       </p:sp>
       <p:sp>
         <p:nvSpPr>
-          <p:cNvPr id="27" name="Shape 25"/>
-          <p:cNvSpPr/>
-          <p:nvPr/>
-        </p:nvSpPr>
-        <p:spPr>
-          <a:xfrm>
-            <a:off x="9702150" y="3154680"/>
-            <a:ext cx="258409" cy="0"/>
+          <p:cNvPr id="26" name="Shape 24"/>
+          <p:cNvSpPr/>
+          <p:nvPr/>
+        </p:nvSpPr>
+        <p:spPr>
+          <a:xfrm>
+            <a:off x="2944368" y="4160520"/>
+            <a:ext cx="1975104" cy="0"/>
           </a:xfrm>
           <a:prstGeom prst="line">
             <a:avLst/>
@@ -2311,24 +2310,25 @@
               <a:srgbClr val="6A994E"/>
             </a:solidFill>
             <a:prstDash val="solid"/>
-            <a:tailEnd type="triangle"/>
+            <a:headEnd type="triangle"/>
+            <a:tailEnd type="oval"/>
           </a:ln>
         </p:spPr>
       </p:sp>
       <p:sp>
         <p:nvSpPr>
-          <p:cNvPr id="28" name="Shape 26"/>
-          <p:cNvSpPr/>
-          <p:nvPr/>
-        </p:nvSpPr>
-        <p:spPr>
-          <a:xfrm>
-            <a:off x="9978847" y="2468880"/>
-            <a:ext cx="1572768" cy="1371600"/>
+          <p:cNvPr id="27" name="Shape 25"/>
+          <p:cNvSpPr/>
+          <p:nvPr/>
+        </p:nvSpPr>
+        <p:spPr>
+          <a:xfrm>
+            <a:off x="640080" y="3520440"/>
+            <a:ext cx="2286000" cy="1280160"/>
           </a:xfrm>
           <a:prstGeom prst="roundRect">
             <a:avLst>
-              <a:gd name="adj" fmla="val 6667"/>
+              <a:gd name="adj" fmla="val 7143"/>
             </a:avLst>
           </a:prstGeom>
           <a:solidFill>
@@ -2344,14 +2344,14 @@
       </p:sp>
       <p:sp>
         <p:nvSpPr>
-          <p:cNvPr id="29" name="Shape 27"/>
-          <p:cNvSpPr/>
-          <p:nvPr/>
-        </p:nvSpPr>
-        <p:spPr>
-          <a:xfrm>
-            <a:off x="10664647" y="2670048"/>
-            <a:ext cx="201168" cy="201168"/>
+          <p:cNvPr id="28" name="Shape 26"/>
+          <p:cNvSpPr/>
+          <p:nvPr/>
+        </p:nvSpPr>
+        <p:spPr>
+          <a:xfrm>
+            <a:off x="1691640" y="3685032"/>
+            <a:ext cx="182880" cy="182880"/>
           </a:xfrm>
           <a:prstGeom prst="ellipse">
             <a:avLst/>
@@ -2364,14 +2364,14 @@
       </p:sp>
       <p:sp>
         <p:nvSpPr>
-          <p:cNvPr id="30" name="Text 28"/>
-          <p:cNvSpPr/>
-          <p:nvPr/>
-        </p:nvSpPr>
-        <p:spPr>
-          <a:xfrm>
-            <a:off x="9933127" y="2926080"/>
-            <a:ext cx="1664208" cy="411480"/>
+          <p:cNvPr id="29" name="Text 27"/>
+          <p:cNvSpPr/>
+          <p:nvPr/>
+        </p:nvSpPr>
+        <p:spPr>
+          <a:xfrm>
+            <a:off x="612648" y="3904488"/>
+            <a:ext cx="2340864" cy="365760"/>
           </a:xfrm>
           <a:prstGeom prst="rect">
             <a:avLst/>
@@ -2403,14 +2403,14 @@
       </p:sp>
       <p:sp>
         <p:nvSpPr>
-          <p:cNvPr id="31" name="Text 29"/>
-          <p:cNvSpPr/>
-          <p:nvPr/>
-        </p:nvSpPr>
-        <p:spPr>
-          <a:xfrm>
-            <a:off x="9960559" y="3310128"/>
-            <a:ext cx="1609344" cy="457200"/>
+          <p:cNvPr id="30" name="Text 28"/>
+          <p:cNvSpPr/>
+          <p:nvPr/>
+        </p:nvSpPr>
+        <p:spPr>
+          <a:xfrm>
+            <a:off x="640080" y="4251960"/>
+            <a:ext cx="2286000" cy="411480"/>
           </a:xfrm>
           <a:prstGeom prst="rect">
             <a:avLst/>
@@ -2442,92 +2442,38 @@
       </p:sp>
       <p:sp>
         <p:nvSpPr>
+          <p:cNvPr id="31" name="Shape 29"/>
+          <p:cNvSpPr/>
+          <p:nvPr/>
+        </p:nvSpPr>
+        <p:spPr>
+          <a:xfrm>
+            <a:off x="10378440" y="3154680"/>
+            <a:ext cx="0" cy="365760"/>
+          </a:xfrm>
+          <a:prstGeom prst="line">
+            <a:avLst/>
+          </a:prstGeom>
+          <a:noFill/>
+          <a:ln w="25400">
+            <a:solidFill>
+              <a:srgbClr val="6A994E"/>
+            </a:solidFill>
+            <a:prstDash val="solid"/>
+            <a:tailEnd type="triangle"/>
+          </a:ln>
+        </p:spPr>
+      </p:sp>
+      <p:sp>
+        <p:nvSpPr>
           <p:cNvPr id="32" name="Text 30"/>
           <p:cNvSpPr/>
           <p:nvPr/>
         </p:nvSpPr>
         <p:spPr>
           <a:xfrm>
-            <a:off x="640080" y="3977640"/>
-            <a:ext cx="3440521" cy="274320"/>
-          </a:xfrm>
-          <a:prstGeom prst="rect">
-            <a:avLst/>
-          </a:prstGeom>
-          <a:noFill/>
-          <a:ln/>
-        </p:spPr>
-        <p:txBody>
-          <a:bodyPr wrap="square" rtlCol="0" anchor="ctr"/>
-          <a:lstStyle/>
-          <a:p>
-            <a:pPr algn="ctr" indent="0" marL="0">
-              <a:buNone/>
-            </a:pPr>
-            <a:r>
-              <a:rPr lang="en-US" sz="1100" b="1" spc="200" kern="0" dirty="0">
-                <a:solidFill>
-                  <a:srgbClr val="6A994E"/>
-                </a:solidFill>
-                <a:latin typeface="Calibri" pitchFamily="34" charset="0"/>
-                <a:ea typeface="Calibri" pitchFamily="34" charset="-122"/>
-                <a:cs typeface="Calibri" pitchFamily="34" charset="-120"/>
-              </a:rPr>
-              <a:t>EDGE</a:t>
-            </a:r>
-            <a:endParaRPr lang="en-US" sz="1100" dirty="0"/>
-          </a:p>
-        </p:txBody>
-      </p:sp>
-      <p:sp>
-        <p:nvSpPr>
-          <p:cNvPr id="33" name="Text 31"/>
-          <p:cNvSpPr/>
-          <p:nvPr/>
-        </p:nvSpPr>
-        <p:spPr>
-          <a:xfrm>
-            <a:off x="4375587" y="3977640"/>
-            <a:ext cx="7176028" cy="274320"/>
-          </a:xfrm>
-          <a:prstGeom prst="rect">
-            <a:avLst/>
-          </a:prstGeom>
-          <a:noFill/>
-          <a:ln/>
-        </p:spPr>
-        <p:txBody>
-          <a:bodyPr wrap="square" rtlCol="0" anchor="ctr"/>
-          <a:lstStyle/>
-          <a:p>
-            <a:pPr algn="ctr" indent="0" marL="0">
-              <a:buNone/>
-            </a:pPr>
-            <a:r>
-              <a:rPr lang="en-US" sz="1100" b="1" spc="200" kern="0" dirty="0">
-                <a:solidFill>
-                  <a:srgbClr val="1F5130"/>
-                </a:solidFill>
-                <a:latin typeface="Calibri" pitchFamily="34" charset="0"/>
-                <a:ea typeface="Calibri" pitchFamily="34" charset="-122"/>
-                <a:cs typeface="Calibri" pitchFamily="34" charset="-120"/>
-              </a:rPr>
-              <a:t>CLOUD</a:t>
-            </a:r>
-            <a:endParaRPr lang="en-US" sz="1100" dirty="0"/>
-          </a:p>
-        </p:txBody>
-      </p:sp>
-      <p:sp>
-        <p:nvSpPr>
-          <p:cNvPr id="34" name="Text 32"/>
-          <p:cNvSpPr/>
-          <p:nvPr/>
-        </p:nvSpPr>
-        <p:spPr>
-          <a:xfrm>
-            <a:off x="640080" y="5212080"/>
-            <a:ext cx="10972800" cy="640080"/>
+            <a:off x="640080" y="5257800"/>
+            <a:ext cx="10972800" cy="731520"/>
           </a:xfrm>
           <a:prstGeom prst="rect">
             <a:avLst/>
@@ -2675,8 +2621,35 @@
         </p:nvSpPr>
         <p:spPr>
           <a:xfrm>
-            <a:off x="731520" y="1965960"/>
-            <a:ext cx="685800" cy="685800"/>
+            <a:off x="640080" y="1874520"/>
+            <a:ext cx="3502152" cy="3657600"/>
+          </a:xfrm>
+          <a:prstGeom prst="roundRect">
+            <a:avLst>
+              <a:gd name="adj" fmla="val 2611"/>
+            </a:avLst>
+          </a:prstGeom>
+          <a:solidFill>
+            <a:srgbClr val="EFF4EC"/>
+          </a:solidFill>
+          <a:ln w="15240">
+            <a:solidFill>
+              <a:srgbClr val="2E7D46"/>
+            </a:solidFill>
+            <a:prstDash val="solid"/>
+          </a:ln>
+        </p:spPr>
+      </p:sp>
+      <p:sp>
+        <p:nvSpPr>
+          <p:cNvPr id="5" name="Shape 3"/>
+          <p:cNvSpPr/>
+          <p:nvPr/>
+        </p:nvSpPr>
+        <p:spPr>
+          <a:xfrm>
+            <a:off x="914400" y="2194560"/>
+            <a:ext cx="640080" cy="640080"/>
           </a:xfrm>
           <a:prstGeom prst="ellipse">
             <a:avLst/>
@@ -2689,14 +2662,14 @@
       </p:sp>
       <p:sp>
         <p:nvSpPr>
-          <p:cNvPr id="5" name="Text 3"/>
-          <p:cNvSpPr/>
-          <p:nvPr/>
-        </p:nvSpPr>
-        <p:spPr>
-          <a:xfrm>
-            <a:off x="731520" y="1965960"/>
-            <a:ext cx="685800" cy="685800"/>
+          <p:cNvPr id="6" name="Text 4"/>
+          <p:cNvSpPr/>
+          <p:nvPr/>
+        </p:nvSpPr>
+        <p:spPr>
+          <a:xfrm>
+            <a:off x="914400" y="2194560"/>
+            <a:ext cx="640080" cy="640080"/>
           </a:xfrm>
           <a:prstGeom prst="rect">
             <a:avLst/>
@@ -2712,7 +2685,7 @@
               <a:buNone/>
             </a:pPr>
             <a:r>
-              <a:rPr lang="en-US" sz="2600" b="1" dirty="0">
+              <a:rPr lang="en-US" sz="2400" b="1" dirty="0">
                 <a:solidFill>
                   <a:srgbClr val="FFFFFF"/>
                 </a:solidFill>
@@ -2722,20 +2695,20 @@
               </a:rPr>
               <a:t>1</a:t>
             </a:r>
-            <a:endParaRPr lang="en-US" sz="2600" dirty="0"/>
-          </a:p>
-        </p:txBody>
-      </p:sp>
-      <p:sp>
-        <p:nvSpPr>
-          <p:cNvPr id="6" name="Text 4"/>
-          <p:cNvSpPr/>
-          <p:nvPr/>
-        </p:nvSpPr>
-        <p:spPr>
-          <a:xfrm>
-            <a:off x="1691640" y="1920240"/>
-            <a:ext cx="9875520" cy="411480"/>
+            <a:endParaRPr lang="en-US" sz="2400" dirty="0"/>
+          </a:p>
+        </p:txBody>
+      </p:sp>
+      <p:sp>
+        <p:nvSpPr>
+          <p:cNvPr id="7" name="Text 5"/>
+          <p:cNvSpPr/>
+          <p:nvPr/>
+        </p:nvSpPr>
+        <p:spPr>
+          <a:xfrm>
+            <a:off x="914400" y="3017520"/>
+            <a:ext cx="2953512" cy="822960"/>
           </a:xfrm>
           <a:prstGeom prst="rect">
             <a:avLst/>
@@ -2751,7 +2724,7 @@
               <a:buNone/>
             </a:pPr>
             <a:r>
-              <a:rPr lang="en-US" sz="1800" b="1" dirty="0">
+              <a:rPr lang="en-US" sz="1700" b="1" dirty="0">
                 <a:solidFill>
                   <a:srgbClr val="17231C"/>
                 </a:solidFill>
@@ -2759,22 +2732,22 @@
                 <a:ea typeface="Calibri" pitchFamily="34" charset="-122"/>
                 <a:cs typeface="Calibri" pitchFamily="34" charset="-120"/>
               </a:rPr>
-              <a:t>Pipeline health, all green</a:t>
-            </a:r>
-            <a:endParaRPr lang="en-US" sz="1800" dirty="0"/>
-          </a:p>
-        </p:txBody>
-      </p:sp>
-      <p:sp>
-        <p:nvSpPr>
-          <p:cNvPr id="7" name="Text 5"/>
-          <p:cNvSpPr/>
-          <p:nvPr/>
-        </p:nvSpPr>
-        <p:spPr>
-          <a:xfrm>
-            <a:off x="1691640" y="2340864"/>
-            <a:ext cx="9875520" cy="640080"/>
+              <a:t>Two fields streaming five signals</a:t>
+            </a:r>
+            <a:endParaRPr lang="en-US" sz="1700" dirty="0"/>
+          </a:p>
+        </p:txBody>
+      </p:sp>
+      <p:sp>
+        <p:nvSpPr>
+          <p:cNvPr id="8" name="Text 6"/>
+          <p:cNvSpPr/>
+          <p:nvPr/>
+        </p:nvSpPr>
+        <p:spPr>
+          <a:xfrm>
+            <a:off x="914400" y="3794760"/>
+            <a:ext cx="2953512" cy="1554480"/>
           </a:xfrm>
           <a:prstGeom prst="rect">
             <a:avLst/>
@@ -2787,10 +2760,13 @@
           <a:lstStyle/>
           <a:p>
             <a:pPr indent="0" marL="0">
+              <a:lnSpc>
+                <a:spcPct val="105000"/>
+              </a:lnSpc>
               <a:buNone/>
             </a:pPr>
             <a:r>
-              <a:rPr lang="en-US" sz="1350" dirty="0">
+              <a:rPr lang="en-US" sz="1300" dirty="0">
                 <a:solidFill>
                   <a:srgbClr val="5C6B60"/>
                 </a:solidFill>
@@ -2798,22 +2774,49 @@
                 <a:ea typeface="Calibri" pitchFamily="34" charset="-122"/>
                 <a:cs typeface="Calibri" pitchFamily="34" charset="-120"/>
               </a:rPr>
-              <a:t>Fog node, queue, Lambda and end-to-end freshness all report healthy — freshest reading ~2 s old.</a:t>
-            </a:r>
-            <a:endParaRPr lang="en-US" sz="1350" dirty="0"/>
-          </a:p>
-        </p:txBody>
-      </p:sp>
-      <p:sp>
-        <p:nvSpPr>
-          <p:cNvPr id="8" name="Shape 6"/>
-          <p:cNvSpPr/>
-          <p:nvPr/>
-        </p:nvSpPr>
-        <p:spPr>
-          <a:xfrm>
-            <a:off x="731520" y="3383280"/>
-            <a:ext cx="685800" cy="685800"/>
+              <a:t>Soil moisture, temperature, humidity, light and rainfall live on Field-1 and Field-2, freshest reading about two seconds old.</a:t>
+            </a:r>
+            <a:endParaRPr lang="en-US" sz="1300" dirty="0"/>
+          </a:p>
+        </p:txBody>
+      </p:sp>
+      <p:sp>
+        <p:nvSpPr>
+          <p:cNvPr id="9" name="Shape 7"/>
+          <p:cNvSpPr/>
+          <p:nvPr/>
+        </p:nvSpPr>
+        <p:spPr>
+          <a:xfrm>
+            <a:off x="4416552" y="1874520"/>
+            <a:ext cx="3502152" cy="3657600"/>
+          </a:xfrm>
+          <a:prstGeom prst="roundRect">
+            <a:avLst>
+              <a:gd name="adj" fmla="val 2611"/>
+            </a:avLst>
+          </a:prstGeom>
+          <a:solidFill>
+            <a:srgbClr val="EFF4EC"/>
+          </a:solidFill>
+          <a:ln w="15240">
+            <a:solidFill>
+              <a:srgbClr val="2E7D46"/>
+            </a:solidFill>
+            <a:prstDash val="solid"/>
+          </a:ln>
+        </p:spPr>
+      </p:sp>
+      <p:sp>
+        <p:nvSpPr>
+          <p:cNvPr id="10" name="Shape 8"/>
+          <p:cNvSpPr/>
+          <p:nvPr/>
+        </p:nvSpPr>
+        <p:spPr>
+          <a:xfrm>
+            <a:off x="4690872" y="2194560"/>
+            <a:ext cx="640080" cy="640080"/>
           </a:xfrm>
           <a:prstGeom prst="ellipse">
             <a:avLst/>
@@ -2826,14 +2829,14 @@
       </p:sp>
       <p:sp>
         <p:nvSpPr>
-          <p:cNvPr id="9" name="Text 7"/>
-          <p:cNvSpPr/>
-          <p:nvPr/>
-        </p:nvSpPr>
-        <p:spPr>
-          <a:xfrm>
-            <a:off x="731520" y="3383280"/>
-            <a:ext cx="685800" cy="685800"/>
+          <p:cNvPr id="11" name="Text 9"/>
+          <p:cNvSpPr/>
+          <p:nvPr/>
+        </p:nvSpPr>
+        <p:spPr>
+          <a:xfrm>
+            <a:off x="4690872" y="2194560"/>
+            <a:ext cx="640080" cy="640080"/>
           </a:xfrm>
           <a:prstGeom prst="rect">
             <a:avLst/>
@@ -2849,7 +2852,7 @@
               <a:buNone/>
             </a:pPr>
             <a:r>
-              <a:rPr lang="en-US" sz="2600" b="1" dirty="0">
+              <a:rPr lang="en-US" sz="2400" b="1" dirty="0">
                 <a:solidFill>
                   <a:srgbClr val="FFFFFF"/>
                 </a:solidFill>
@@ -2859,20 +2862,20 @@
               </a:rPr>
               <a:t>2</a:t>
             </a:r>
-            <a:endParaRPr lang="en-US" sz="2600" dirty="0"/>
-          </a:p>
-        </p:txBody>
-      </p:sp>
-      <p:sp>
-        <p:nvSpPr>
-          <p:cNvPr id="10" name="Text 8"/>
-          <p:cNvSpPr/>
-          <p:nvPr/>
-        </p:nvSpPr>
-        <p:spPr>
-          <a:xfrm>
-            <a:off x="1691640" y="3337560"/>
-            <a:ext cx="9875520" cy="411480"/>
+            <a:endParaRPr lang="en-US" sz="2400" dirty="0"/>
+          </a:p>
+        </p:txBody>
+      </p:sp>
+      <p:sp>
+        <p:nvSpPr>
+          <p:cNvPr id="12" name="Text 10"/>
+          <p:cNvSpPr/>
+          <p:nvPr/>
+        </p:nvSpPr>
+        <p:spPr>
+          <a:xfrm>
+            <a:off x="4690872" y="3017520"/>
+            <a:ext cx="2953512" cy="822960"/>
           </a:xfrm>
           <a:prstGeom prst="rect">
             <a:avLst/>
@@ -2888,7 +2891,7 @@
               <a:buNone/>
             </a:pPr>
             <a:r>
-              <a:rPr lang="en-US" sz="1800" b="1" dirty="0">
+              <a:rPr lang="en-US" sz="1700" b="1" dirty="0">
                 <a:solidFill>
                   <a:srgbClr val="17231C"/>
                 </a:solidFill>
@@ -2896,22 +2899,22 @@
                 <a:ea typeface="Calibri" pitchFamily="34" charset="-122"/>
                 <a:cs typeface="Calibri" pitchFamily="34" charset="-120"/>
               </a:rPr>
-              <a:t>Live field readings</a:t>
-            </a:r>
-            <a:endParaRPr lang="en-US" sz="1800" dirty="0"/>
-          </a:p>
-        </p:txBody>
-      </p:sp>
-      <p:sp>
-        <p:nvSpPr>
-          <p:cNvPr id="11" name="Text 9"/>
-          <p:cNvSpPr/>
-          <p:nvPr/>
-        </p:nvSpPr>
-        <p:spPr>
-          <a:xfrm>
-            <a:off x="1691640" y="3758184"/>
-            <a:ext cx="9875520" cy="640080"/>
+              <a:t>Trend charts with the alert band drawn in</a:t>
+            </a:r>
+            <a:endParaRPr lang="en-US" sz="1700" dirty="0"/>
+          </a:p>
+        </p:txBody>
+      </p:sp>
+      <p:sp>
+        <p:nvSpPr>
+          <p:cNvPr id="13" name="Text 11"/>
+          <p:cNvSpPr/>
+          <p:nvPr/>
+        </p:nvSpPr>
+        <p:spPr>
+          <a:xfrm>
+            <a:off x="4690872" y="3794760"/>
+            <a:ext cx="2953512" cy="1554480"/>
           </a:xfrm>
           <a:prstGeom prst="rect">
             <a:avLst/>
@@ -2924,10 +2927,13 @@
           <a:lstStyle/>
           <a:p>
             <a:pPr indent="0" marL="0">
+              <a:lnSpc>
+                <a:spcPct val="105000"/>
+              </a:lnSpc>
               <a:buNone/>
             </a:pPr>
             <a:r>
-              <a:rPr lang="en-US" sz="1350" dirty="0">
+              <a:rPr lang="en-US" sz="1300" dirty="0">
                 <a:solidFill>
                   <a:srgbClr val="5C6B60"/>
                 </a:solidFill>
@@ -2935,22 +2941,49 @@
                 <a:ea typeface="Calibri" pitchFamily="34" charset="-122"/>
                 <a:cs typeface="Calibri" pitchFamily="34" charset="-120"/>
               </a:rPr>
-              <a:t>Per-sensor panels and trend charts with threshold bands on two fields, plus the active-alert banner.</a:t>
-            </a:r>
-            <a:endParaRPr lang="en-US" sz="1350" dirty="0"/>
-          </a:p>
-        </p:txBody>
-      </p:sp>
-      <p:sp>
-        <p:nvSpPr>
-          <p:cNvPr id="12" name="Shape 10"/>
-          <p:cNvSpPr/>
-          <p:nvPr/>
-        </p:nvSpPr>
-        <p:spPr>
-          <a:xfrm>
-            <a:off x="731520" y="4800600"/>
-            <a:ext cx="685800" cy="685800"/>
+              <a:t>Soil-moisture, temperature and humidity charts show each field's live series against its threshold band, so you can see how close it is to an alert.</a:t>
+            </a:r>
+            <a:endParaRPr lang="en-US" sz="1300" dirty="0"/>
+          </a:p>
+        </p:txBody>
+      </p:sp>
+      <p:sp>
+        <p:nvSpPr>
+          <p:cNvPr id="14" name="Shape 12"/>
+          <p:cNvSpPr/>
+          <p:nvPr/>
+        </p:nvSpPr>
+        <p:spPr>
+          <a:xfrm>
+            <a:off x="8193024" y="1874520"/>
+            <a:ext cx="3502152" cy="3657600"/>
+          </a:xfrm>
+          <a:prstGeom prst="roundRect">
+            <a:avLst>
+              <a:gd name="adj" fmla="val 2611"/>
+            </a:avLst>
+          </a:prstGeom>
+          <a:solidFill>
+            <a:srgbClr val="EFF4EC"/>
+          </a:solidFill>
+          <a:ln w="15240">
+            <a:solidFill>
+              <a:srgbClr val="2E7D46"/>
+            </a:solidFill>
+            <a:prstDash val="solid"/>
+          </a:ln>
+        </p:spPr>
+      </p:sp>
+      <p:sp>
+        <p:nvSpPr>
+          <p:cNvPr id="15" name="Shape 13"/>
+          <p:cNvSpPr/>
+          <p:nvPr/>
+        </p:nvSpPr>
+        <p:spPr>
+          <a:xfrm>
+            <a:off x="8467344" y="2194560"/>
+            <a:ext cx="640080" cy="640080"/>
           </a:xfrm>
           <a:prstGeom prst="ellipse">
             <a:avLst/>
@@ -2963,14 +2996,14 @@
       </p:sp>
       <p:sp>
         <p:nvSpPr>
-          <p:cNvPr id="13" name="Text 11"/>
-          <p:cNvSpPr/>
-          <p:nvPr/>
-        </p:nvSpPr>
-        <p:spPr>
-          <a:xfrm>
-            <a:off x="731520" y="4800600"/>
-            <a:ext cx="685800" cy="685800"/>
+          <p:cNvPr id="16" name="Text 14"/>
+          <p:cNvSpPr/>
+          <p:nvPr/>
+        </p:nvSpPr>
+        <p:spPr>
+          <a:xfrm>
+            <a:off x="8467344" y="2194560"/>
+            <a:ext cx="640080" cy="640080"/>
           </a:xfrm>
           <a:prstGeom prst="rect">
             <a:avLst/>
@@ -2986,7 +3019,7 @@
               <a:buNone/>
             </a:pPr>
             <a:r>
-              <a:rPr lang="en-US" sz="2600" b="1" dirty="0">
+              <a:rPr lang="en-US" sz="2400" b="1" dirty="0">
                 <a:solidFill>
                   <a:srgbClr val="FFFFFF"/>
                 </a:solidFill>
@@ -2996,20 +3029,20 @@
               </a:rPr>
               <a:t>3</a:t>
             </a:r>
-            <a:endParaRPr lang="en-US" sz="2600" dirty="0"/>
-          </a:p>
-        </p:txBody>
-      </p:sp>
-      <p:sp>
-        <p:nvSpPr>
-          <p:cNvPr id="14" name="Text 12"/>
-          <p:cNvSpPr/>
-          <p:nvPr/>
-        </p:nvSpPr>
-        <p:spPr>
-          <a:xfrm>
-            <a:off x="1691640" y="4754880"/>
-            <a:ext cx="9875520" cy="411480"/>
+            <a:endParaRPr lang="en-US" sz="2400" dirty="0"/>
+          </a:p>
+        </p:txBody>
+      </p:sp>
+      <p:sp>
+        <p:nvSpPr>
+          <p:cNvPr id="17" name="Text 15"/>
+          <p:cNvSpPr/>
+          <p:nvPr/>
+        </p:nvSpPr>
+        <p:spPr>
+          <a:xfrm>
+            <a:off x="8467344" y="3017520"/>
+            <a:ext cx="2953512" cy="822960"/>
           </a:xfrm>
           <a:prstGeom prst="rect">
             <a:avLst/>
@@ -3025,7 +3058,7 @@
               <a:buNone/>
             </a:pPr>
             <a:r>
-              <a:rPr lang="en-US" sz="1800" b="1" dirty="0">
+              <a:rPr lang="en-US" sz="1700" b="1" dirty="0">
                 <a:solidFill>
                   <a:srgbClr val="17231C"/>
                 </a:solidFill>
@@ -3033,22 +3066,22 @@
                 <a:ea typeface="Calibri" pitchFamily="34" charset="-122"/>
                 <a:cs typeface="Calibri" pitchFamily="34" charset="-120"/>
               </a:rPr>
-              <a:t>Scales under load</a:t>
-            </a:r>
-            <a:endParaRPr lang="en-US" sz="1800" dirty="0"/>
-          </a:p>
-        </p:txBody>
-      </p:sp>
-      <p:sp>
-        <p:nvSpPr>
-          <p:cNvPr id="15" name="Text 13"/>
-          <p:cNvSpPr/>
-          <p:nvPr/>
-        </p:nvSpPr>
-        <p:spPr>
-          <a:xfrm>
-            <a:off x="1691640" y="5175504"/>
-            <a:ext cx="9875520" cy="640080"/>
+              <a:t>An alert fires the moment a rule trips</a:t>
+            </a:r>
+            <a:endParaRPr lang="en-US" sz="1700" dirty="0"/>
+          </a:p>
+        </p:txBody>
+      </p:sp>
+      <p:sp>
+        <p:nvSpPr>
+          <p:cNvPr id="18" name="Text 16"/>
+          <p:cNvSpPr/>
+          <p:nvPr/>
+        </p:nvSpPr>
+        <p:spPr>
+          <a:xfrm>
+            <a:off x="8467344" y="3794760"/>
+            <a:ext cx="2953512" cy="1554480"/>
           </a:xfrm>
           <a:prstGeom prst="rect">
             <a:avLst/>
@@ -3061,10 +3094,13 @@
           <a:lstStyle/>
           <a:p>
             <a:pPr indent="0" marL="0">
+              <a:lnSpc>
+                <a:spcPct val="105000"/>
+              </a:lnSpc>
               <a:buNone/>
             </a:pPr>
             <a:r>
-              <a:rPr lang="en-US" sz="1350" dirty="0">
+              <a:rPr lang="en-US" sz="1300" dirty="0">
                 <a:solidFill>
                   <a:srgbClr val="5C6B60"/>
                 </a:solidFill>
@@ -3072,15 +3108,15 @@
                 <a:ea typeface="Calibri" pitchFamily="34" charset="-122"/>
                 <a:cs typeface="Calibri" pitchFamily="34" charset="-120"/>
               </a:rPr>
-              <a:t>A 300-message burst was absorbed in 4.5 s, every message stored; 39 automated tests pass.</a:t>
-            </a:r>
-            <a:endParaRPr lang="en-US" sz="1350" dirty="0"/>
-          </a:p>
-        </p:txBody>
-      </p:sp>
-      <p:sp>
-        <p:nvSpPr>
-          <p:cNvPr id="16" name="Text 14"/>
+              <a:t>Push a field's soil moisture below 20% and the irrigation-needed banner appears within one ten-second window.</a:t>
+            </a:r>
+            <a:endParaRPr lang="en-US" sz="1300" dirty="0"/>
+          </a:p>
+        </p:txBody>
+      </p:sp>
+      <p:sp>
+        <p:nvSpPr>
+          <p:cNvPr id="19" name="Text 17"/>
           <p:cNvSpPr/>
           <p:nvPr/>
         </p:nvSpPr>
@@ -3157,24 +3193,24 @@
         </p:nvSpPr>
         <p:spPr>
           <a:xfrm>
-            <a:off x="640080" y="640080"/>
-            <a:ext cx="10972800" cy="640080"/>
-          </a:xfrm>
-          <a:prstGeom prst="rect">
-            <a:avLst/>
-          </a:prstGeom>
-          <a:noFill/>
-          <a:ln/>
-        </p:spPr>
-        <p:txBody>
-          <a:bodyPr wrap="square" rtlCol="0" anchor="ctr"/>
+            <a:off x="640080" y="594360"/>
+            <a:ext cx="10972800" cy="822960"/>
+          </a:xfrm>
+          <a:prstGeom prst="rect">
+            <a:avLst/>
+          </a:prstGeom>
+          <a:noFill/>
+          <a:ln/>
+        </p:spPr>
+        <p:txBody>
+          <a:bodyPr wrap="square" rtlCol="0" anchor="t"/>
           <a:lstStyle/>
           <a:p>
             <a:pPr indent="0" marL="0">
               <a:buNone/>
             </a:pPr>
             <a:r>
-              <a:rPr lang="en-US" sz="3000" b="1" dirty="0">
+              <a:rPr lang="en-US" sz="2800" b="1" dirty="0">
                 <a:solidFill>
                   <a:srgbClr val="FFFFFF"/>
                 </a:solidFill>
@@ -3184,47 +3220,20 @@
               </a:rPr>
               <a:t>Hardest Part — a defect the emulator hid</a:t>
             </a:r>
-            <a:endParaRPr lang="en-US" sz="3000" dirty="0"/>
-          </a:p>
-        </p:txBody>
-      </p:sp>
-      <p:sp>
-        <p:nvSpPr>
-          <p:cNvPr id="3" name="Shape 1"/>
-          <p:cNvSpPr/>
-          <p:nvPr/>
-        </p:nvSpPr>
-        <p:spPr>
-          <a:xfrm>
-            <a:off x="731520" y="1920240"/>
-            <a:ext cx="10698480" cy="1965960"/>
-          </a:xfrm>
-          <a:prstGeom prst="roundRect">
-            <a:avLst>
-              <a:gd name="adj" fmla="val 4651"/>
-            </a:avLst>
-          </a:prstGeom>
-          <a:solidFill>
-            <a:srgbClr val="1D3323"/>
-          </a:solidFill>
-          <a:ln w="15875">
-            <a:solidFill>
-              <a:srgbClr val="E0A83E"/>
-            </a:solidFill>
-            <a:prstDash val="solid"/>
-          </a:ln>
-        </p:spPr>
-      </p:sp>
-      <p:sp>
-        <p:nvSpPr>
-          <p:cNvPr id="4" name="Text 2"/>
-          <p:cNvSpPr/>
-          <p:nvPr/>
-        </p:nvSpPr>
-        <p:spPr>
-          <a:xfrm>
-            <a:off x="1005840" y="2103120"/>
-            <a:ext cx="3657600" cy="457200"/>
+            <a:endParaRPr lang="en-US" sz="2800" dirty="0"/>
+          </a:p>
+        </p:txBody>
+      </p:sp>
+      <p:sp>
+        <p:nvSpPr>
+          <p:cNvPr id="3" name="Text 1"/>
+          <p:cNvSpPr/>
+          <p:nvPr/>
+        </p:nvSpPr>
+        <p:spPr>
+          <a:xfrm>
+            <a:off x="731520" y="1965960"/>
+            <a:ext cx="2377440" cy="548640"/>
           </a:xfrm>
           <a:prstGeom prst="rect">
             <a:avLst/>
@@ -3240,7 +3249,7 @@
               <a:buNone/>
             </a:pPr>
             <a:r>
-              <a:rPr lang="en-US" sz="1900" b="1" dirty="0">
+              <a:rPr lang="en-US" sz="2200" b="1" dirty="0">
                 <a:solidFill>
                   <a:srgbClr val="E0A83E"/>
                 </a:solidFill>
@@ -3250,9 +3259,32 @@
               </a:rPr>
               <a:t>Problem</a:t>
             </a:r>
-            <a:endParaRPr lang="en-US" sz="1900" dirty="0"/>
-          </a:p>
-        </p:txBody>
+            <a:endParaRPr lang="en-US" sz="2200" dirty="0"/>
+          </a:p>
+        </p:txBody>
+      </p:sp>
+      <p:sp>
+        <p:nvSpPr>
+          <p:cNvPr id="4" name="Shape 2"/>
+          <p:cNvSpPr/>
+          <p:nvPr/>
+        </p:nvSpPr>
+        <p:spPr>
+          <a:xfrm>
+            <a:off x="3200400" y="1920240"/>
+            <a:ext cx="0" cy="1737360"/>
+          </a:xfrm>
+          <a:prstGeom prst="line">
+            <a:avLst/>
+          </a:prstGeom>
+          <a:noFill/>
+          <a:ln w="25400">
+            <a:solidFill>
+              <a:srgbClr val="E0A83E"/>
+            </a:solidFill>
+            <a:prstDash val="solid"/>
+          </a:ln>
+        </p:spPr>
       </p:sp>
       <p:sp>
         <p:nvSpPr>
@@ -3262,8 +3294,8 @@
         </p:nvSpPr>
         <p:spPr>
           <a:xfrm>
-            <a:off x="1005840" y="2578608"/>
-            <a:ext cx="9966960" cy="1188720"/>
+            <a:off x="3474720" y="1920240"/>
+            <a:ext cx="7955280" cy="1874520"/>
           </a:xfrm>
           <a:prstGeom prst="rect">
             <a:avLst/>
@@ -3277,12 +3309,12 @@
           <a:p>
             <a:pPr indent="0" marL="0">
               <a:lnSpc>
-                <a:spcPct val="105000"/>
+                <a:spcPct val="110000"/>
               </a:lnSpc>
               <a:buNone/>
             </a:pPr>
             <a:r>
-              <a:rPr lang="en-US" sz="1300" dirty="0">
+              <a:rPr lang="en-US" sz="1450" dirty="0">
                 <a:solidFill>
                   <a:srgbClr val="CFE3CE"/>
                 </a:solidFill>
@@ -3292,47 +3324,20 @@
               </a:rPr>
               <a:t>The dashboard totalled its stored records with a single DynamoDB scan, which silently caps at ~1 MB. All 39 tests and the full emulator run passed, so the undercount only surfaced on the real AWS account — no error, just a smaller number.</a:t>
             </a:r>
-            <a:endParaRPr lang="en-US" sz="1300" dirty="0"/>
-          </a:p>
-        </p:txBody>
-      </p:sp>
-      <p:sp>
-        <p:nvSpPr>
-          <p:cNvPr id="6" name="Shape 4"/>
-          <p:cNvSpPr/>
-          <p:nvPr/>
-        </p:nvSpPr>
-        <p:spPr>
-          <a:xfrm>
-            <a:off x="731520" y="4041648"/>
-            <a:ext cx="10698480" cy="1965960"/>
-          </a:xfrm>
-          <a:prstGeom prst="roundRect">
-            <a:avLst>
-              <a:gd name="adj" fmla="val 4651"/>
-            </a:avLst>
-          </a:prstGeom>
-          <a:solidFill>
-            <a:srgbClr val="1D3323"/>
-          </a:solidFill>
-          <a:ln w="15875">
-            <a:solidFill>
-              <a:srgbClr val="6A994E"/>
-            </a:solidFill>
-            <a:prstDash val="solid"/>
-          </a:ln>
-        </p:spPr>
-      </p:sp>
-      <p:sp>
-        <p:nvSpPr>
-          <p:cNvPr id="7" name="Text 5"/>
-          <p:cNvSpPr/>
-          <p:nvPr/>
-        </p:nvSpPr>
-        <p:spPr>
-          <a:xfrm>
-            <a:off x="1005840" y="4224528"/>
-            <a:ext cx="3657600" cy="457200"/>
+            <a:endParaRPr lang="en-US" sz="1450" dirty="0"/>
+          </a:p>
+        </p:txBody>
+      </p:sp>
+      <p:sp>
+        <p:nvSpPr>
+          <p:cNvPr id="6" name="Text 4"/>
+          <p:cNvSpPr/>
+          <p:nvPr/>
+        </p:nvSpPr>
+        <p:spPr>
+          <a:xfrm>
+            <a:off x="731520" y="4114800"/>
+            <a:ext cx="2377440" cy="548640"/>
           </a:xfrm>
           <a:prstGeom prst="rect">
             <a:avLst/>
@@ -3348,7 +3353,7 @@
               <a:buNone/>
             </a:pPr>
             <a:r>
-              <a:rPr lang="en-US" sz="1900" b="1" dirty="0">
+              <a:rPr lang="en-US" sz="2200" b="1" dirty="0">
                 <a:solidFill>
                   <a:srgbClr val="6A994E"/>
                 </a:solidFill>
@@ -3358,9 +3363,32 @@
               </a:rPr>
               <a:t>Solution</a:t>
             </a:r>
-            <a:endParaRPr lang="en-US" sz="1900" dirty="0"/>
-          </a:p>
-        </p:txBody>
+            <a:endParaRPr lang="en-US" sz="2200" dirty="0"/>
+          </a:p>
+        </p:txBody>
+      </p:sp>
+      <p:sp>
+        <p:nvSpPr>
+          <p:cNvPr id="7" name="Shape 5"/>
+          <p:cNvSpPr/>
+          <p:nvPr/>
+        </p:nvSpPr>
+        <p:spPr>
+          <a:xfrm>
+            <a:off x="3200400" y="4069080"/>
+            <a:ext cx="0" cy="1737360"/>
+          </a:xfrm>
+          <a:prstGeom prst="line">
+            <a:avLst/>
+          </a:prstGeom>
+          <a:noFill/>
+          <a:ln w="25400">
+            <a:solidFill>
+              <a:srgbClr val="6A994E"/>
+            </a:solidFill>
+            <a:prstDash val="solid"/>
+          </a:ln>
+        </p:spPr>
       </p:sp>
       <p:sp>
         <p:nvSpPr>
@@ -3370,8 +3398,8 @@
         </p:nvSpPr>
         <p:spPr>
           <a:xfrm>
-            <a:off x="1005840" y="4700016"/>
-            <a:ext cx="9966960" cy="1188720"/>
+            <a:off x="3474720" y="4069080"/>
+            <a:ext cx="7955280" cy="1874520"/>
           </a:xfrm>
           <a:prstGeom prst="rect">
             <a:avLst/>
@@ -3385,12 +3413,12 @@
           <a:p>
             <a:pPr indent="0" marL="0">
               <a:lnSpc>
-                <a:spcPct val="105000"/>
+                <a:spcPct val="110000"/>
               </a:lnSpc>
               <a:buNone/>
             </a:pPr>
             <a:r>
-              <a:rPr lang="en-US" sz="1300" dirty="0">
+              <a:rPr lang="en-US" sz="1450" dirty="0">
                 <a:solidFill>
                   <a:srgbClr val="CFE3CE"/>
                 </a:solidFill>
@@ -3400,7 +3428,7 @@
               </a:rPr>
               <a:t>The count now follows DynamoDB's pagination cursor and sums every page. Locked in by a three-page test (500 + 500 + 214 = 1,214) and re-verified against the live deployed table.</a:t>
             </a:r>
-            <a:endParaRPr lang="en-US" sz="1300" dirty="0"/>
+            <a:endParaRPr lang="en-US" sz="1450" dirty="0"/>
           </a:p>
         </p:txBody>
       </p:sp>

--- a/ppt/KondraguntaLakshmiChaitanya_X25171216_smart-agriculture.pptx
+++ b/ppt/KondraguntaLakshmiChaitanya_X25171216_smart-agriculture.pptx
@@ -3167,7 +3167,7 @@
     <p:bg>
       <p:bgPr>
         <a:solidFill>
-          <a:srgbClr val="16281C"/>
+          <a:srgbClr val="FFFFFF"/>
         </a:solidFill>
       </p:bgPr>
     </p:bg>
@@ -3193,7 +3193,7 @@
         </p:nvSpPr>
         <p:spPr>
           <a:xfrm>
-            <a:off x="640080" y="594360"/>
+            <a:off x="640080" y="502920"/>
             <a:ext cx="10972800" cy="822960"/>
           </a:xfrm>
           <a:prstGeom prst="rect">
@@ -3212,7 +3212,7 @@
             <a:r>
               <a:rPr lang="en-US" sz="2800" b="1" dirty="0">
                 <a:solidFill>
-                  <a:srgbClr val="FFFFFF"/>
+                  <a:srgbClr val="17231C"/>
                 </a:solidFill>
                 <a:latin typeface="Cambria" pitchFamily="34" charset="0"/>
                 <a:ea typeface="Cambria" pitchFamily="34" charset="-122"/>
@@ -3249,7 +3249,7 @@
               <a:buNone/>
             </a:pPr>
             <a:r>
-              <a:rPr lang="en-US" sz="2200" b="1" dirty="0">
+              <a:rPr lang="en-US" sz="2300" b="1" dirty="0">
                 <a:solidFill>
                   <a:srgbClr val="E0A83E"/>
                 </a:solidFill>
@@ -3259,7 +3259,7 @@
               </a:rPr>
               <a:t>Problem</a:t>
             </a:r>
-            <a:endParaRPr lang="en-US" sz="2200" dirty="0"/>
+            <a:endParaRPr lang="en-US" sz="2300" dirty="0"/>
           </a:p>
         </p:txBody>
       </p:sp>
@@ -3272,13 +3272,13 @@
         <p:spPr>
           <a:xfrm>
             <a:off x="3200400" y="1920240"/>
-            <a:ext cx="0" cy="1737360"/>
+            <a:ext cx="0" cy="1783080"/>
           </a:xfrm>
           <a:prstGeom prst="line">
             <a:avLst/>
           </a:prstGeom>
           <a:noFill/>
-          <a:ln w="25400">
+          <a:ln w="31750">
             <a:solidFill>
               <a:srgbClr val="E0A83E"/>
             </a:solidFill>
@@ -3295,7 +3295,7 @@
         <p:spPr>
           <a:xfrm>
             <a:off x="3474720" y="1920240"/>
-            <a:ext cx="7955280" cy="1874520"/>
+            <a:ext cx="7955280" cy="1920240"/>
           </a:xfrm>
           <a:prstGeom prst="rect">
             <a:avLst/>
@@ -3309,14 +3309,14 @@
           <a:p>
             <a:pPr indent="0" marL="0">
               <a:lnSpc>
-                <a:spcPct val="110000"/>
+                <a:spcPct val="112000"/>
               </a:lnSpc>
               <a:buNone/>
             </a:pPr>
             <a:r>
               <a:rPr lang="en-US" sz="1450" dirty="0">
                 <a:solidFill>
-                  <a:srgbClr val="CFE3CE"/>
+                  <a:srgbClr val="17231C"/>
                 </a:solidFill>
                 <a:latin typeface="Calibri" pitchFamily="34" charset="0"/>
                 <a:ea typeface="Calibri" pitchFamily="34" charset="-122"/>
@@ -3353,9 +3353,9 @@
               <a:buNone/>
             </a:pPr>
             <a:r>
-              <a:rPr lang="en-US" sz="2200" b="1" dirty="0">
+              <a:rPr lang="en-US" sz="2300" b="1" dirty="0">
                 <a:solidFill>
-                  <a:srgbClr val="6A994E"/>
+                  <a:srgbClr val="2E7D46"/>
                 </a:solidFill>
                 <a:latin typeface="Cambria" pitchFamily="34" charset="0"/>
                 <a:ea typeface="Cambria" pitchFamily="34" charset="-122"/>
@@ -3363,7 +3363,7 @@
               </a:rPr>
               <a:t>Solution</a:t>
             </a:r>
-            <a:endParaRPr lang="en-US" sz="2200" dirty="0"/>
+            <a:endParaRPr lang="en-US" sz="2300" dirty="0"/>
           </a:p>
         </p:txBody>
       </p:sp>
@@ -3376,15 +3376,15 @@
         <p:spPr>
           <a:xfrm>
             <a:off x="3200400" y="4069080"/>
-            <a:ext cx="0" cy="1737360"/>
+            <a:ext cx="0" cy="1783080"/>
           </a:xfrm>
           <a:prstGeom prst="line">
             <a:avLst/>
           </a:prstGeom>
           <a:noFill/>
-          <a:ln w="25400">
+          <a:ln w="31750">
             <a:solidFill>
-              <a:srgbClr val="6A994E"/>
+              <a:srgbClr val="2E7D46"/>
             </a:solidFill>
             <a:prstDash val="solid"/>
           </a:ln>
@@ -3399,7 +3399,7 @@
         <p:spPr>
           <a:xfrm>
             <a:off x="3474720" y="4069080"/>
-            <a:ext cx="7955280" cy="1874520"/>
+            <a:ext cx="7955280" cy="1920240"/>
           </a:xfrm>
           <a:prstGeom prst="rect">
             <a:avLst/>
@@ -3413,14 +3413,14 @@
           <a:p>
             <a:pPr indent="0" marL="0">
               <a:lnSpc>
-                <a:spcPct val="110000"/>
+                <a:spcPct val="112000"/>
               </a:lnSpc>
               <a:buNone/>
             </a:pPr>
             <a:r>
               <a:rPr lang="en-US" sz="1450" dirty="0">
                 <a:solidFill>
-                  <a:srgbClr val="CFE3CE"/>
+                  <a:srgbClr val="17231C"/>
                 </a:solidFill>
                 <a:latin typeface="Calibri" pitchFamily="34" charset="0"/>
                 <a:ea typeface="Calibri" pitchFamily="34" charset="-122"/>

--- a/ppt/KondraguntaLakshmiChaitanya_X25171216_smart-agriculture.pptx
+++ b/ppt/KondraguntaLakshmiChaitanya_X25171216_smart-agriculture.pptx
@@ -1598,18 +1598,18 @@
         </p:nvSpPr>
         <p:spPr>
           <a:xfrm>
-            <a:off x="640080" y="1874520"/>
-            <a:ext cx="2286000" cy="1280160"/>
+            <a:off x="3992728" y="1234440"/>
+            <a:ext cx="4206240" cy="658368"/>
           </a:xfrm>
           <a:prstGeom prst="roundRect">
             <a:avLst>
-              <a:gd name="adj" fmla="val 7143"/>
+              <a:gd name="adj" fmla="val 11111"/>
             </a:avLst>
           </a:prstGeom>
           <a:solidFill>
             <a:srgbClr val="EFF4EC"/>
           </a:solidFill>
-          <a:ln w="19050">
+          <a:ln w="17780">
             <a:solidFill>
               <a:srgbClr val="6A994E"/>
             </a:solidFill>
@@ -1625,8 +1625,8 @@
         </p:nvSpPr>
         <p:spPr>
           <a:xfrm>
-            <a:off x="1691640" y="2039112"/>
-            <a:ext cx="182880" cy="182880"/>
+            <a:off x="4193896" y="1481328"/>
+            <a:ext cx="164592" cy="164592"/>
           </a:xfrm>
           <a:prstGeom prst="ellipse">
             <a:avLst/>
@@ -1645,8 +1645,8 @@
         </p:nvSpPr>
         <p:spPr>
           <a:xfrm>
-            <a:off x="612648" y="2258568"/>
-            <a:ext cx="2340864" cy="365760"/>
+            <a:off x="4495648" y="1234440"/>
+            <a:ext cx="2194560" cy="658368"/>
           </a:xfrm>
           <a:prstGeom prst="rect">
             <a:avLst/>
@@ -1658,11 +1658,11 @@
           <a:bodyPr wrap="square" lIns="0" tIns="0" rIns="0" bIns="0" rtlCol="0" anchor="ctr"/>
           <a:lstStyle/>
           <a:p>
-            <a:pPr algn="ctr" indent="0" marL="0">
-              <a:buNone/>
-            </a:pPr>
-            <a:r>
-              <a:rPr lang="en-US" sz="1450" b="1" dirty="0">
+            <a:pPr indent="0" marL="0">
+              <a:buNone/>
+            </a:pPr>
+            <a:r>
+              <a:rPr lang="en-US" sz="1350" b="1" dirty="0">
                 <a:solidFill>
                   <a:srgbClr val="17231C"/>
                 </a:solidFill>
@@ -1672,7 +1672,7 @@
               </a:rPr>
               <a:t>Field sensors</a:t>
             </a:r>
-            <a:endParaRPr lang="en-US" sz="1450" dirty="0"/>
+            <a:endParaRPr lang="en-US" sz="1350" dirty="0"/>
           </a:p>
         </p:txBody>
       </p:sp>
@@ -1684,24 +1684,24 @@
         </p:nvSpPr>
         <p:spPr>
           <a:xfrm>
-            <a:off x="640080" y="2606040"/>
-            <a:ext cx="2286000" cy="411480"/>
-          </a:xfrm>
-          <a:prstGeom prst="rect">
-            <a:avLst/>
-          </a:prstGeom>
-          <a:noFill/>
-          <a:ln/>
-        </p:spPr>
-        <p:txBody>
-          <a:bodyPr wrap="square" lIns="0" tIns="0" rIns="0" bIns="0" rtlCol="0" anchor="t"/>
-          <a:lstStyle/>
-          <a:p>
-            <a:pPr algn="ctr" indent="0" marL="0">
-              <a:buNone/>
-            </a:pPr>
-            <a:r>
-              <a:rPr lang="en-US" sz="1050" dirty="0">
+            <a:off x="6644488" y="1234440"/>
+            <a:ext cx="1463040" cy="658368"/>
+          </a:xfrm>
+          <a:prstGeom prst="rect">
+            <a:avLst/>
+          </a:prstGeom>
+          <a:noFill/>
+          <a:ln/>
+        </p:spPr>
+        <p:txBody>
+          <a:bodyPr wrap="square" lIns="0" tIns="0" rIns="0" bIns="0" rtlCol="0" anchor="ctr"/>
+          <a:lstStyle/>
+          <a:p>
+            <a:pPr algn="r" indent="0" marL="0">
+              <a:buNone/>
+            </a:pPr>
+            <a:r>
+              <a:rPr lang="en-US" sz="950" dirty="0">
                 <a:solidFill>
                   <a:srgbClr val="5C6B60"/>
                 </a:solidFill>
@@ -1711,7 +1711,7 @@
               </a:rPr>
               <a:t>5 types · 2–4 s</a:t>
             </a:r>
-            <a:endParaRPr lang="en-US" sz="1050" dirty="0"/>
+            <a:endParaRPr lang="en-US" sz="950" dirty="0"/>
           </a:p>
         </p:txBody>
       </p:sp>
@@ -1723,733 +1723,8 @@
         </p:nvSpPr>
         <p:spPr>
           <a:xfrm>
-            <a:off x="2944368" y="2514600"/>
-            <a:ext cx="1975104" cy="0"/>
-          </a:xfrm>
-          <a:prstGeom prst="line">
-            <a:avLst/>
-          </a:prstGeom>
-          <a:noFill/>
-          <a:ln w="25400">
-            <a:solidFill>
-              <a:srgbClr val="6A994E"/>
-            </a:solidFill>
-            <a:prstDash val="solid"/>
-            <a:headEnd type="none"/>
-            <a:tailEnd type="triangle"/>
-          </a:ln>
-        </p:spPr>
-      </p:sp>
-      <p:sp>
-        <p:nvSpPr>
-          <p:cNvPr id="8" name="Shape 6"/>
-          <p:cNvSpPr/>
-          <p:nvPr/>
-        </p:nvSpPr>
-        <p:spPr>
-          <a:xfrm>
-            <a:off x="4937760" y="1874520"/>
-            <a:ext cx="2286000" cy="1280160"/>
-          </a:xfrm>
-          <a:prstGeom prst="roundRect">
-            <a:avLst>
-              <a:gd name="adj" fmla="val 7143"/>
-            </a:avLst>
-          </a:prstGeom>
-          <a:solidFill>
-            <a:srgbClr val="EFF4EC"/>
-          </a:solidFill>
-          <a:ln w="19050">
-            <a:solidFill>
-              <a:srgbClr val="6A994E"/>
-            </a:solidFill>
-            <a:prstDash val="solid"/>
-          </a:ln>
-        </p:spPr>
-      </p:sp>
-      <p:sp>
-        <p:nvSpPr>
-          <p:cNvPr id="9" name="Shape 7"/>
-          <p:cNvSpPr/>
-          <p:nvPr/>
-        </p:nvSpPr>
-        <p:spPr>
-          <a:xfrm>
-            <a:off x="5989320" y="2039112"/>
-            <a:ext cx="182880" cy="182880"/>
-          </a:xfrm>
-          <a:prstGeom prst="ellipse">
-            <a:avLst/>
-          </a:prstGeom>
-          <a:solidFill>
-            <a:srgbClr val="6A994E"/>
-          </a:solidFill>
-          <a:ln/>
-        </p:spPr>
-      </p:sp>
-      <p:sp>
-        <p:nvSpPr>
-          <p:cNvPr id="10" name="Text 8"/>
-          <p:cNvSpPr/>
-          <p:nvPr/>
-        </p:nvSpPr>
-        <p:spPr>
-          <a:xfrm>
-            <a:off x="4910328" y="2258568"/>
-            <a:ext cx="2340864" cy="365760"/>
-          </a:xfrm>
-          <a:prstGeom prst="rect">
-            <a:avLst/>
-          </a:prstGeom>
-          <a:noFill/>
-          <a:ln/>
-        </p:spPr>
-        <p:txBody>
-          <a:bodyPr wrap="square" lIns="0" tIns="0" rIns="0" bIns="0" rtlCol="0" anchor="ctr"/>
-          <a:lstStyle/>
-          <a:p>
-            <a:pPr algn="ctr" indent="0" marL="0">
-              <a:buNone/>
-            </a:pPr>
-            <a:r>
-              <a:rPr lang="en-US" sz="1450" b="1" dirty="0">
-                <a:solidFill>
-                  <a:srgbClr val="17231C"/>
-                </a:solidFill>
-                <a:latin typeface="Calibri" pitchFamily="34" charset="0"/>
-                <a:ea typeface="Calibri" pitchFamily="34" charset="-122"/>
-                <a:cs typeface="Calibri" pitchFamily="34" charset="-120"/>
-              </a:rPr>
-              <a:t>Fog node</a:t>
-            </a:r>
-            <a:endParaRPr lang="en-US" sz="1450" dirty="0"/>
-          </a:p>
-        </p:txBody>
-      </p:sp>
-      <p:sp>
-        <p:nvSpPr>
-          <p:cNvPr id="11" name="Text 9"/>
-          <p:cNvSpPr/>
-          <p:nvPr/>
-        </p:nvSpPr>
-        <p:spPr>
-          <a:xfrm>
-            <a:off x="4937760" y="2606040"/>
-            <a:ext cx="2286000" cy="411480"/>
-          </a:xfrm>
-          <a:prstGeom prst="rect">
-            <a:avLst/>
-          </a:prstGeom>
-          <a:noFill/>
-          <a:ln/>
-        </p:spPr>
-        <p:txBody>
-          <a:bodyPr wrap="square" lIns="0" tIns="0" rIns="0" bIns="0" rtlCol="0" anchor="t"/>
-          <a:lstStyle/>
-          <a:p>
-            <a:pPr algn="ctr" indent="0" marL="0">
-              <a:buNone/>
-            </a:pPr>
-            <a:r>
-              <a:rPr lang="en-US" sz="1050" dirty="0">
-                <a:solidFill>
-                  <a:srgbClr val="5C6B60"/>
-                </a:solidFill>
-                <a:latin typeface="Calibri" pitchFamily="34" charset="0"/>
-                <a:ea typeface="Calibri" pitchFamily="34" charset="-122"/>
-                <a:cs typeface="Calibri" pitchFamily="34" charset="-120"/>
-              </a:rPr>
-              <a:t>10 s windows · edge alerts</a:t>
-            </a:r>
-            <a:endParaRPr lang="en-US" sz="1050" dirty="0"/>
-          </a:p>
-        </p:txBody>
-      </p:sp>
-      <p:sp>
-        <p:nvSpPr>
-          <p:cNvPr id="12" name="Shape 10"/>
-          <p:cNvSpPr/>
-          <p:nvPr/>
-        </p:nvSpPr>
-        <p:spPr>
-          <a:xfrm>
-            <a:off x="7242048" y="2514600"/>
-            <a:ext cx="1975104" cy="0"/>
-          </a:xfrm>
-          <a:prstGeom prst="line">
-            <a:avLst/>
-          </a:prstGeom>
-          <a:noFill/>
-          <a:ln w="25400">
-            <a:solidFill>
-              <a:srgbClr val="6A994E"/>
-            </a:solidFill>
-            <a:prstDash val="solid"/>
-            <a:headEnd type="none"/>
-            <a:tailEnd type="triangle"/>
-          </a:ln>
-        </p:spPr>
-      </p:sp>
-      <p:sp>
-        <p:nvSpPr>
-          <p:cNvPr id="13" name="Shape 11"/>
-          <p:cNvSpPr/>
-          <p:nvPr/>
-        </p:nvSpPr>
-        <p:spPr>
-          <a:xfrm>
-            <a:off x="9235440" y="1874520"/>
-            <a:ext cx="2286000" cy="1280160"/>
-          </a:xfrm>
-          <a:prstGeom prst="roundRect">
-            <a:avLst>
-              <a:gd name="adj" fmla="val 7143"/>
-            </a:avLst>
-          </a:prstGeom>
-          <a:solidFill>
-            <a:srgbClr val="EFF4EC"/>
-          </a:solidFill>
-          <a:ln w="19050">
-            <a:solidFill>
-              <a:srgbClr val="1F5130"/>
-            </a:solidFill>
-            <a:prstDash val="solid"/>
-          </a:ln>
-        </p:spPr>
-      </p:sp>
-      <p:sp>
-        <p:nvSpPr>
-          <p:cNvPr id="14" name="Shape 12"/>
-          <p:cNvSpPr/>
-          <p:nvPr/>
-        </p:nvSpPr>
-        <p:spPr>
-          <a:xfrm>
-            <a:off x="10287000" y="2039112"/>
-            <a:ext cx="182880" cy="182880"/>
-          </a:xfrm>
-          <a:prstGeom prst="ellipse">
-            <a:avLst/>
-          </a:prstGeom>
-          <a:solidFill>
-            <a:srgbClr val="1F5130"/>
-          </a:solidFill>
-          <a:ln/>
-        </p:spPr>
-      </p:sp>
-      <p:sp>
-        <p:nvSpPr>
-          <p:cNvPr id="15" name="Text 13"/>
-          <p:cNvSpPr/>
-          <p:nvPr/>
-        </p:nvSpPr>
-        <p:spPr>
-          <a:xfrm>
-            <a:off x="9208008" y="2258568"/>
-            <a:ext cx="2340864" cy="365760"/>
-          </a:xfrm>
-          <a:prstGeom prst="rect">
-            <a:avLst/>
-          </a:prstGeom>
-          <a:noFill/>
-          <a:ln/>
-        </p:spPr>
-        <p:txBody>
-          <a:bodyPr wrap="square" lIns="0" tIns="0" rIns="0" bIns="0" rtlCol="0" anchor="ctr"/>
-          <a:lstStyle/>
-          <a:p>
-            <a:pPr algn="ctr" indent="0" marL="0">
-              <a:buNone/>
-            </a:pPr>
-            <a:r>
-              <a:rPr lang="en-US" sz="1450" b="1" dirty="0">
-                <a:solidFill>
-                  <a:srgbClr val="17231C"/>
-                </a:solidFill>
-                <a:latin typeface="Calibri" pitchFamily="34" charset="0"/>
-                <a:ea typeface="Calibri" pitchFamily="34" charset="-122"/>
-                <a:cs typeface="Calibri" pitchFamily="34" charset="-120"/>
-              </a:rPr>
-              <a:t>Amazon SQS</a:t>
-            </a:r>
-            <a:endParaRPr lang="en-US" sz="1450" dirty="0"/>
-          </a:p>
-        </p:txBody>
-      </p:sp>
-      <p:sp>
-        <p:nvSpPr>
-          <p:cNvPr id="16" name="Text 14"/>
-          <p:cNvSpPr/>
-          <p:nvPr/>
-        </p:nvSpPr>
-        <p:spPr>
-          <a:xfrm>
-            <a:off x="9235440" y="2606040"/>
-            <a:ext cx="2286000" cy="411480"/>
-          </a:xfrm>
-          <a:prstGeom prst="rect">
-            <a:avLst/>
-          </a:prstGeom>
-          <a:noFill/>
-          <a:ln/>
-        </p:spPr>
-        <p:txBody>
-          <a:bodyPr wrap="square" lIns="0" tIns="0" rIns="0" bIns="0" rtlCol="0" anchor="t"/>
-          <a:lstStyle/>
-          <a:p>
-            <a:pPr algn="ctr" indent="0" marL="0">
-              <a:buNone/>
-            </a:pPr>
-            <a:r>
-              <a:rPr lang="en-US" sz="1050" dirty="0">
-                <a:solidFill>
-                  <a:srgbClr val="5C6B60"/>
-                </a:solidFill>
-                <a:latin typeface="Calibri" pitchFamily="34" charset="0"/>
-                <a:ea typeface="Calibri" pitchFamily="34" charset="-122"/>
-                <a:cs typeface="Calibri" pitchFamily="34" charset="-120"/>
-              </a:rPr>
-              <a:t>managed queue</a:t>
-            </a:r>
-            <a:endParaRPr lang="en-US" sz="1050" dirty="0"/>
-          </a:p>
-        </p:txBody>
-      </p:sp>
-      <p:sp>
-        <p:nvSpPr>
-          <p:cNvPr id="17" name="Shape 15"/>
-          <p:cNvSpPr/>
-          <p:nvPr/>
-        </p:nvSpPr>
-        <p:spPr>
-          <a:xfrm>
-            <a:off x="9235440" y="3520440"/>
-            <a:ext cx="2286000" cy="1280160"/>
-          </a:xfrm>
-          <a:prstGeom prst="roundRect">
-            <a:avLst>
-              <a:gd name="adj" fmla="val 7143"/>
-            </a:avLst>
-          </a:prstGeom>
-          <a:solidFill>
-            <a:srgbClr val="EFF4EC"/>
-          </a:solidFill>
-          <a:ln w="19050">
-            <a:solidFill>
-              <a:srgbClr val="1F5130"/>
-            </a:solidFill>
-            <a:prstDash val="solid"/>
-          </a:ln>
-        </p:spPr>
-      </p:sp>
-      <p:sp>
-        <p:nvSpPr>
-          <p:cNvPr id="18" name="Shape 16"/>
-          <p:cNvSpPr/>
-          <p:nvPr/>
-        </p:nvSpPr>
-        <p:spPr>
-          <a:xfrm>
-            <a:off x="10287000" y="3685032"/>
-            <a:ext cx="182880" cy="182880"/>
-          </a:xfrm>
-          <a:prstGeom prst="ellipse">
-            <a:avLst/>
-          </a:prstGeom>
-          <a:solidFill>
-            <a:srgbClr val="1F5130"/>
-          </a:solidFill>
-          <a:ln/>
-        </p:spPr>
-      </p:sp>
-      <p:sp>
-        <p:nvSpPr>
-          <p:cNvPr id="19" name="Text 17"/>
-          <p:cNvSpPr/>
-          <p:nvPr/>
-        </p:nvSpPr>
-        <p:spPr>
-          <a:xfrm>
-            <a:off x="9208008" y="3904488"/>
-            <a:ext cx="2340864" cy="365760"/>
-          </a:xfrm>
-          <a:prstGeom prst="rect">
-            <a:avLst/>
-          </a:prstGeom>
-          <a:noFill/>
-          <a:ln/>
-        </p:spPr>
-        <p:txBody>
-          <a:bodyPr wrap="square" lIns="0" tIns="0" rIns="0" bIns="0" rtlCol="0" anchor="ctr"/>
-          <a:lstStyle/>
-          <a:p>
-            <a:pPr algn="ctr" indent="0" marL="0">
-              <a:buNone/>
-            </a:pPr>
-            <a:r>
-              <a:rPr lang="en-US" sz="1450" b="1" dirty="0">
-                <a:solidFill>
-                  <a:srgbClr val="17231C"/>
-                </a:solidFill>
-                <a:latin typeface="Calibri" pitchFamily="34" charset="0"/>
-                <a:ea typeface="Calibri" pitchFamily="34" charset="-122"/>
-                <a:cs typeface="Calibri" pitchFamily="34" charset="-120"/>
-              </a:rPr>
-              <a:t>AWS Lambda</a:t>
-            </a:r>
-            <a:endParaRPr lang="en-US" sz="1450" dirty="0"/>
-          </a:p>
-        </p:txBody>
-      </p:sp>
-      <p:sp>
-        <p:nvSpPr>
-          <p:cNvPr id="20" name="Text 18"/>
-          <p:cNvSpPr/>
-          <p:nvPr/>
-        </p:nvSpPr>
-        <p:spPr>
-          <a:xfrm>
-            <a:off x="9235440" y="4251960"/>
-            <a:ext cx="2286000" cy="411480"/>
-          </a:xfrm>
-          <a:prstGeom prst="rect">
-            <a:avLst/>
-          </a:prstGeom>
-          <a:noFill/>
-          <a:ln/>
-        </p:spPr>
-        <p:txBody>
-          <a:bodyPr wrap="square" lIns="0" tIns="0" rIns="0" bIns="0" rtlCol="0" anchor="t"/>
-          <a:lstStyle/>
-          <a:p>
-            <a:pPr algn="ctr" indent="0" marL="0">
-              <a:buNone/>
-            </a:pPr>
-            <a:r>
-              <a:rPr lang="en-US" sz="1050" dirty="0">
-                <a:solidFill>
-                  <a:srgbClr val="5C6B60"/>
-                </a:solidFill>
-                <a:latin typeface="Calibri" pitchFamily="34" charset="0"/>
-                <a:ea typeface="Calibri" pitchFamily="34" charset="-122"/>
-                <a:cs typeface="Calibri" pitchFamily="34" charset="-120"/>
-              </a:rPr>
-              <a:t>python3.12 ingest</a:t>
-            </a:r>
-            <a:endParaRPr lang="en-US" sz="1050" dirty="0"/>
-          </a:p>
-        </p:txBody>
-      </p:sp>
-      <p:sp>
-        <p:nvSpPr>
-          <p:cNvPr id="21" name="Shape 19"/>
-          <p:cNvSpPr/>
-          <p:nvPr/>
-        </p:nvSpPr>
-        <p:spPr>
-          <a:xfrm>
-            <a:off x="7242048" y="4160520"/>
-            <a:ext cx="1975104" cy="0"/>
-          </a:xfrm>
-          <a:prstGeom prst="line">
-            <a:avLst/>
-          </a:prstGeom>
-          <a:noFill/>
-          <a:ln w="25400">
-            <a:solidFill>
-              <a:srgbClr val="6A994E"/>
-            </a:solidFill>
-            <a:prstDash val="solid"/>
-            <a:headEnd type="triangle"/>
-            <a:tailEnd type="oval"/>
-          </a:ln>
-        </p:spPr>
-      </p:sp>
-      <p:sp>
-        <p:nvSpPr>
-          <p:cNvPr id="22" name="Shape 20"/>
-          <p:cNvSpPr/>
-          <p:nvPr/>
-        </p:nvSpPr>
-        <p:spPr>
-          <a:xfrm>
-            <a:off x="4937760" y="3520440"/>
-            <a:ext cx="2286000" cy="1280160"/>
-          </a:xfrm>
-          <a:prstGeom prst="roundRect">
-            <a:avLst>
-              <a:gd name="adj" fmla="val 7143"/>
-            </a:avLst>
-          </a:prstGeom>
-          <a:solidFill>
-            <a:srgbClr val="EFF4EC"/>
-          </a:solidFill>
-          <a:ln w="19050">
-            <a:solidFill>
-              <a:srgbClr val="1F5130"/>
-            </a:solidFill>
-            <a:prstDash val="solid"/>
-          </a:ln>
-        </p:spPr>
-      </p:sp>
-      <p:sp>
-        <p:nvSpPr>
-          <p:cNvPr id="23" name="Shape 21"/>
-          <p:cNvSpPr/>
-          <p:nvPr/>
-        </p:nvSpPr>
-        <p:spPr>
-          <a:xfrm>
-            <a:off x="5989320" y="3685032"/>
-            <a:ext cx="182880" cy="182880"/>
-          </a:xfrm>
-          <a:prstGeom prst="ellipse">
-            <a:avLst/>
-          </a:prstGeom>
-          <a:solidFill>
-            <a:srgbClr val="1F5130"/>
-          </a:solidFill>
-          <a:ln/>
-        </p:spPr>
-      </p:sp>
-      <p:sp>
-        <p:nvSpPr>
-          <p:cNvPr id="24" name="Text 22"/>
-          <p:cNvSpPr/>
-          <p:nvPr/>
-        </p:nvSpPr>
-        <p:spPr>
-          <a:xfrm>
-            <a:off x="4910328" y="3904488"/>
-            <a:ext cx="2340864" cy="365760"/>
-          </a:xfrm>
-          <a:prstGeom prst="rect">
-            <a:avLst/>
-          </a:prstGeom>
-          <a:noFill/>
-          <a:ln/>
-        </p:spPr>
-        <p:txBody>
-          <a:bodyPr wrap="square" lIns="0" tIns="0" rIns="0" bIns="0" rtlCol="0" anchor="ctr"/>
-          <a:lstStyle/>
-          <a:p>
-            <a:pPr algn="ctr" indent="0" marL="0">
-              <a:buNone/>
-            </a:pPr>
-            <a:r>
-              <a:rPr lang="en-US" sz="1450" b="1" dirty="0">
-                <a:solidFill>
-                  <a:srgbClr val="17231C"/>
-                </a:solidFill>
-                <a:latin typeface="Calibri" pitchFamily="34" charset="0"/>
-                <a:ea typeface="Calibri" pitchFamily="34" charset="-122"/>
-                <a:cs typeface="Calibri" pitchFamily="34" charset="-120"/>
-              </a:rPr>
-              <a:t>DynamoDB</a:t>
-            </a:r>
-            <a:endParaRPr lang="en-US" sz="1450" dirty="0"/>
-          </a:p>
-        </p:txBody>
-      </p:sp>
-      <p:sp>
-        <p:nvSpPr>
-          <p:cNvPr id="25" name="Text 23"/>
-          <p:cNvSpPr/>
-          <p:nvPr/>
-        </p:nvSpPr>
-        <p:spPr>
-          <a:xfrm>
-            <a:off x="4937760" y="4251960"/>
-            <a:ext cx="2286000" cy="411480"/>
-          </a:xfrm>
-          <a:prstGeom prst="rect">
-            <a:avLst/>
-          </a:prstGeom>
-          <a:noFill/>
-          <a:ln/>
-        </p:spPr>
-        <p:txBody>
-          <a:bodyPr wrap="square" lIns="0" tIns="0" rIns="0" bIns="0" rtlCol="0" anchor="t"/>
-          <a:lstStyle/>
-          <a:p>
-            <a:pPr algn="ctr" indent="0" marL="0">
-              <a:buNone/>
-            </a:pPr>
-            <a:r>
-              <a:rPr lang="en-US" sz="1050" dirty="0">
-                <a:solidFill>
-                  <a:srgbClr val="5C6B60"/>
-                </a:solidFill>
-                <a:latin typeface="Calibri" pitchFamily="34" charset="0"/>
-                <a:ea typeface="Calibri" pitchFamily="34" charset="-122"/>
-                <a:cs typeface="Calibri" pitchFamily="34" charset="-120"/>
-              </a:rPr>
-              <a:t>one record / window</a:t>
-            </a:r>
-            <a:endParaRPr lang="en-US" sz="1050" dirty="0"/>
-          </a:p>
-        </p:txBody>
-      </p:sp>
-      <p:sp>
-        <p:nvSpPr>
-          <p:cNvPr id="26" name="Shape 24"/>
-          <p:cNvSpPr/>
-          <p:nvPr/>
-        </p:nvSpPr>
-        <p:spPr>
-          <a:xfrm>
-            <a:off x="2944368" y="4160520"/>
-            <a:ext cx="1975104" cy="0"/>
-          </a:xfrm>
-          <a:prstGeom prst="line">
-            <a:avLst/>
-          </a:prstGeom>
-          <a:noFill/>
-          <a:ln w="25400">
-            <a:solidFill>
-              <a:srgbClr val="6A994E"/>
-            </a:solidFill>
-            <a:prstDash val="solid"/>
-            <a:headEnd type="triangle"/>
-            <a:tailEnd type="oval"/>
-          </a:ln>
-        </p:spPr>
-      </p:sp>
-      <p:sp>
-        <p:nvSpPr>
-          <p:cNvPr id="27" name="Shape 25"/>
-          <p:cNvSpPr/>
-          <p:nvPr/>
-        </p:nvSpPr>
-        <p:spPr>
-          <a:xfrm>
-            <a:off x="640080" y="3520440"/>
-            <a:ext cx="2286000" cy="1280160"/>
-          </a:xfrm>
-          <a:prstGeom prst="roundRect">
-            <a:avLst>
-              <a:gd name="adj" fmla="val 7143"/>
-            </a:avLst>
-          </a:prstGeom>
-          <a:solidFill>
-            <a:srgbClr val="EFF4EC"/>
-          </a:solidFill>
-          <a:ln w="19050">
-            <a:solidFill>
-              <a:srgbClr val="2E7D46"/>
-            </a:solidFill>
-            <a:prstDash val="solid"/>
-          </a:ln>
-        </p:spPr>
-      </p:sp>
-      <p:sp>
-        <p:nvSpPr>
-          <p:cNvPr id="28" name="Shape 26"/>
-          <p:cNvSpPr/>
-          <p:nvPr/>
-        </p:nvSpPr>
-        <p:spPr>
-          <a:xfrm>
-            <a:off x="1691640" y="3685032"/>
-            <a:ext cx="182880" cy="182880"/>
-          </a:xfrm>
-          <a:prstGeom prst="ellipse">
-            <a:avLst/>
-          </a:prstGeom>
-          <a:solidFill>
-            <a:srgbClr val="2E7D46"/>
-          </a:solidFill>
-          <a:ln/>
-        </p:spPr>
-      </p:sp>
-      <p:sp>
-        <p:nvSpPr>
-          <p:cNvPr id="29" name="Text 27"/>
-          <p:cNvSpPr/>
-          <p:nvPr/>
-        </p:nvSpPr>
-        <p:spPr>
-          <a:xfrm>
-            <a:off x="612648" y="3904488"/>
-            <a:ext cx="2340864" cy="365760"/>
-          </a:xfrm>
-          <a:prstGeom prst="rect">
-            <a:avLst/>
-          </a:prstGeom>
-          <a:noFill/>
-          <a:ln/>
-        </p:spPr>
-        <p:txBody>
-          <a:bodyPr wrap="square" lIns="0" tIns="0" rIns="0" bIns="0" rtlCol="0" anchor="ctr"/>
-          <a:lstStyle/>
-          <a:p>
-            <a:pPr algn="ctr" indent="0" marL="0">
-              <a:buNone/>
-            </a:pPr>
-            <a:r>
-              <a:rPr lang="en-US" sz="1450" b="1" dirty="0">
-                <a:solidFill>
-                  <a:srgbClr val="17231C"/>
-                </a:solidFill>
-                <a:latin typeface="Calibri" pitchFamily="34" charset="0"/>
-                <a:ea typeface="Calibri" pitchFamily="34" charset="-122"/>
-                <a:cs typeface="Calibri" pitchFamily="34" charset="-120"/>
-              </a:rPr>
-              <a:t>API GW + S3</a:t>
-            </a:r>
-            <a:endParaRPr lang="en-US" sz="1450" dirty="0"/>
-          </a:p>
-        </p:txBody>
-      </p:sp>
-      <p:sp>
-        <p:nvSpPr>
-          <p:cNvPr id="30" name="Text 28"/>
-          <p:cNvSpPr/>
-          <p:nvPr/>
-        </p:nvSpPr>
-        <p:spPr>
-          <a:xfrm>
-            <a:off x="640080" y="4251960"/>
-            <a:ext cx="2286000" cy="411480"/>
-          </a:xfrm>
-          <a:prstGeom prst="rect">
-            <a:avLst/>
-          </a:prstGeom>
-          <a:noFill/>
-          <a:ln/>
-        </p:spPr>
-        <p:txBody>
-          <a:bodyPr wrap="square" lIns="0" tIns="0" rIns="0" bIns="0" rtlCol="0" anchor="t"/>
-          <a:lstStyle/>
-          <a:p>
-            <a:pPr algn="ctr" indent="0" marL="0">
-              <a:buNone/>
-            </a:pPr>
-            <a:r>
-              <a:rPr lang="en-US" sz="1050" dirty="0">
-                <a:solidFill>
-                  <a:srgbClr val="5C6B60"/>
-                </a:solidFill>
-                <a:latin typeface="Calibri" pitchFamily="34" charset="0"/>
-                <a:ea typeface="Calibri" pitchFamily="34" charset="-122"/>
-                <a:cs typeface="Calibri" pitchFamily="34" charset="-120"/>
-              </a:rPr>
-              <a:t>live dashboard</a:t>
-            </a:r>
-            <a:endParaRPr lang="en-US" sz="1050" dirty="0"/>
-          </a:p>
-        </p:txBody>
-      </p:sp>
-      <p:sp>
-        <p:nvSpPr>
-          <p:cNvPr id="31" name="Shape 29"/>
-          <p:cNvSpPr/>
-          <p:nvPr/>
-        </p:nvSpPr>
-        <p:spPr>
-          <a:xfrm>
-            <a:off x="10378440" y="3154680"/>
-            <a:ext cx="0" cy="365760"/>
+            <a:off x="6095848" y="1892808"/>
+            <a:ext cx="0" cy="219456"/>
           </a:xfrm>
           <a:prstGeom prst="line">
             <a:avLst/>
@@ -2466,14 +1741,735 @@
       </p:sp>
       <p:sp>
         <p:nvSpPr>
+          <p:cNvPr id="8" name="Shape 6"/>
+          <p:cNvSpPr/>
+          <p:nvPr/>
+        </p:nvSpPr>
+        <p:spPr>
+          <a:xfrm>
+            <a:off x="3992728" y="2112264"/>
+            <a:ext cx="4206240" cy="658368"/>
+          </a:xfrm>
+          <a:prstGeom prst="roundRect">
+            <a:avLst>
+              <a:gd name="adj" fmla="val 11111"/>
+            </a:avLst>
+          </a:prstGeom>
+          <a:solidFill>
+            <a:srgbClr val="EFF4EC"/>
+          </a:solidFill>
+          <a:ln w="17780">
+            <a:solidFill>
+              <a:srgbClr val="6A994E"/>
+            </a:solidFill>
+            <a:prstDash val="solid"/>
+          </a:ln>
+        </p:spPr>
+      </p:sp>
+      <p:sp>
+        <p:nvSpPr>
+          <p:cNvPr id="9" name="Shape 7"/>
+          <p:cNvSpPr/>
+          <p:nvPr/>
+        </p:nvSpPr>
+        <p:spPr>
+          <a:xfrm>
+            <a:off x="4193896" y="2359152"/>
+            <a:ext cx="164592" cy="164592"/>
+          </a:xfrm>
+          <a:prstGeom prst="ellipse">
+            <a:avLst/>
+          </a:prstGeom>
+          <a:solidFill>
+            <a:srgbClr val="6A994E"/>
+          </a:solidFill>
+          <a:ln/>
+        </p:spPr>
+      </p:sp>
+      <p:sp>
+        <p:nvSpPr>
+          <p:cNvPr id="10" name="Text 8"/>
+          <p:cNvSpPr/>
+          <p:nvPr/>
+        </p:nvSpPr>
+        <p:spPr>
+          <a:xfrm>
+            <a:off x="4495648" y="2112264"/>
+            <a:ext cx="2194560" cy="658368"/>
+          </a:xfrm>
+          <a:prstGeom prst="rect">
+            <a:avLst/>
+          </a:prstGeom>
+          <a:noFill/>
+          <a:ln/>
+        </p:spPr>
+        <p:txBody>
+          <a:bodyPr wrap="square" lIns="0" tIns="0" rIns="0" bIns="0" rtlCol="0" anchor="ctr"/>
+          <a:lstStyle/>
+          <a:p>
+            <a:pPr indent="0" marL="0">
+              <a:buNone/>
+            </a:pPr>
+            <a:r>
+              <a:rPr lang="en-US" sz="1350" b="1" dirty="0">
+                <a:solidFill>
+                  <a:srgbClr val="17231C"/>
+                </a:solidFill>
+                <a:latin typeface="Calibri" pitchFamily="34" charset="0"/>
+                <a:ea typeface="Calibri" pitchFamily="34" charset="-122"/>
+                <a:cs typeface="Calibri" pitchFamily="34" charset="-120"/>
+              </a:rPr>
+              <a:t>Fog node</a:t>
+            </a:r>
+            <a:endParaRPr lang="en-US" sz="1350" dirty="0"/>
+          </a:p>
+        </p:txBody>
+      </p:sp>
+      <p:sp>
+        <p:nvSpPr>
+          <p:cNvPr id="11" name="Text 9"/>
+          <p:cNvSpPr/>
+          <p:nvPr/>
+        </p:nvSpPr>
+        <p:spPr>
+          <a:xfrm>
+            <a:off x="6644488" y="2112264"/>
+            <a:ext cx="1463040" cy="658368"/>
+          </a:xfrm>
+          <a:prstGeom prst="rect">
+            <a:avLst/>
+          </a:prstGeom>
+          <a:noFill/>
+          <a:ln/>
+        </p:spPr>
+        <p:txBody>
+          <a:bodyPr wrap="square" lIns="0" tIns="0" rIns="0" bIns="0" rtlCol="0" anchor="ctr"/>
+          <a:lstStyle/>
+          <a:p>
+            <a:pPr algn="r" indent="0" marL="0">
+              <a:buNone/>
+            </a:pPr>
+            <a:r>
+              <a:rPr lang="en-US" sz="950" dirty="0">
+                <a:solidFill>
+                  <a:srgbClr val="5C6B60"/>
+                </a:solidFill>
+                <a:latin typeface="Calibri" pitchFamily="34" charset="0"/>
+                <a:ea typeface="Calibri" pitchFamily="34" charset="-122"/>
+                <a:cs typeface="Calibri" pitchFamily="34" charset="-120"/>
+              </a:rPr>
+              <a:t>10 s windows · edge alerts</a:t>
+            </a:r>
+            <a:endParaRPr lang="en-US" sz="950" dirty="0"/>
+          </a:p>
+        </p:txBody>
+      </p:sp>
+      <p:sp>
+        <p:nvSpPr>
+          <p:cNvPr id="12" name="Shape 10"/>
+          <p:cNvSpPr/>
+          <p:nvPr/>
+        </p:nvSpPr>
+        <p:spPr>
+          <a:xfrm>
+            <a:off x="6095848" y="2770632"/>
+            <a:ext cx="0" cy="219456"/>
+          </a:xfrm>
+          <a:prstGeom prst="line">
+            <a:avLst/>
+          </a:prstGeom>
+          <a:noFill/>
+          <a:ln w="25400">
+            <a:solidFill>
+              <a:srgbClr val="6A994E"/>
+            </a:solidFill>
+            <a:prstDash val="solid"/>
+            <a:tailEnd type="triangle"/>
+          </a:ln>
+        </p:spPr>
+      </p:sp>
+      <p:sp>
+        <p:nvSpPr>
+          <p:cNvPr id="13" name="Shape 11"/>
+          <p:cNvSpPr/>
+          <p:nvPr/>
+        </p:nvSpPr>
+        <p:spPr>
+          <a:xfrm>
+            <a:off x="3992728" y="2990088"/>
+            <a:ext cx="4206240" cy="658368"/>
+          </a:xfrm>
+          <a:prstGeom prst="roundRect">
+            <a:avLst>
+              <a:gd name="adj" fmla="val 11111"/>
+            </a:avLst>
+          </a:prstGeom>
+          <a:solidFill>
+            <a:srgbClr val="EFF4EC"/>
+          </a:solidFill>
+          <a:ln w="17780">
+            <a:solidFill>
+              <a:srgbClr val="1F5130"/>
+            </a:solidFill>
+            <a:prstDash val="solid"/>
+          </a:ln>
+        </p:spPr>
+      </p:sp>
+      <p:sp>
+        <p:nvSpPr>
+          <p:cNvPr id="14" name="Shape 12"/>
+          <p:cNvSpPr/>
+          <p:nvPr/>
+        </p:nvSpPr>
+        <p:spPr>
+          <a:xfrm>
+            <a:off x="4193896" y="3236976"/>
+            <a:ext cx="164592" cy="164592"/>
+          </a:xfrm>
+          <a:prstGeom prst="ellipse">
+            <a:avLst/>
+          </a:prstGeom>
+          <a:solidFill>
+            <a:srgbClr val="1F5130"/>
+          </a:solidFill>
+          <a:ln/>
+        </p:spPr>
+      </p:sp>
+      <p:sp>
+        <p:nvSpPr>
+          <p:cNvPr id="15" name="Text 13"/>
+          <p:cNvSpPr/>
+          <p:nvPr/>
+        </p:nvSpPr>
+        <p:spPr>
+          <a:xfrm>
+            <a:off x="4495648" y="2990088"/>
+            <a:ext cx="2194560" cy="658368"/>
+          </a:xfrm>
+          <a:prstGeom prst="rect">
+            <a:avLst/>
+          </a:prstGeom>
+          <a:noFill/>
+          <a:ln/>
+        </p:spPr>
+        <p:txBody>
+          <a:bodyPr wrap="square" lIns="0" tIns="0" rIns="0" bIns="0" rtlCol="0" anchor="ctr"/>
+          <a:lstStyle/>
+          <a:p>
+            <a:pPr indent="0" marL="0">
+              <a:buNone/>
+            </a:pPr>
+            <a:r>
+              <a:rPr lang="en-US" sz="1350" b="1" dirty="0">
+                <a:solidFill>
+                  <a:srgbClr val="17231C"/>
+                </a:solidFill>
+                <a:latin typeface="Calibri" pitchFamily="34" charset="0"/>
+                <a:ea typeface="Calibri" pitchFamily="34" charset="-122"/>
+                <a:cs typeface="Calibri" pitchFamily="34" charset="-120"/>
+              </a:rPr>
+              <a:t>Amazon SQS</a:t>
+            </a:r>
+            <a:endParaRPr lang="en-US" sz="1350" dirty="0"/>
+          </a:p>
+        </p:txBody>
+      </p:sp>
+      <p:sp>
+        <p:nvSpPr>
+          <p:cNvPr id="16" name="Text 14"/>
+          <p:cNvSpPr/>
+          <p:nvPr/>
+        </p:nvSpPr>
+        <p:spPr>
+          <a:xfrm>
+            <a:off x="6644488" y="2990088"/>
+            <a:ext cx="1463040" cy="658368"/>
+          </a:xfrm>
+          <a:prstGeom prst="rect">
+            <a:avLst/>
+          </a:prstGeom>
+          <a:noFill/>
+          <a:ln/>
+        </p:spPr>
+        <p:txBody>
+          <a:bodyPr wrap="square" lIns="0" tIns="0" rIns="0" bIns="0" rtlCol="0" anchor="ctr"/>
+          <a:lstStyle/>
+          <a:p>
+            <a:pPr algn="r" indent="0" marL="0">
+              <a:buNone/>
+            </a:pPr>
+            <a:r>
+              <a:rPr lang="en-US" sz="950" dirty="0">
+                <a:solidFill>
+                  <a:srgbClr val="5C6B60"/>
+                </a:solidFill>
+                <a:latin typeface="Calibri" pitchFamily="34" charset="0"/>
+                <a:ea typeface="Calibri" pitchFamily="34" charset="-122"/>
+                <a:cs typeface="Calibri" pitchFamily="34" charset="-120"/>
+              </a:rPr>
+              <a:t>managed queue</a:t>
+            </a:r>
+            <a:endParaRPr lang="en-US" sz="950" dirty="0"/>
+          </a:p>
+        </p:txBody>
+      </p:sp>
+      <p:sp>
+        <p:nvSpPr>
+          <p:cNvPr id="17" name="Shape 15"/>
+          <p:cNvSpPr/>
+          <p:nvPr/>
+        </p:nvSpPr>
+        <p:spPr>
+          <a:xfrm>
+            <a:off x="6095848" y="3648456"/>
+            <a:ext cx="0" cy="219456"/>
+          </a:xfrm>
+          <a:prstGeom prst="line">
+            <a:avLst/>
+          </a:prstGeom>
+          <a:noFill/>
+          <a:ln w="25400">
+            <a:solidFill>
+              <a:srgbClr val="6A994E"/>
+            </a:solidFill>
+            <a:prstDash val="solid"/>
+            <a:tailEnd type="triangle"/>
+          </a:ln>
+        </p:spPr>
+      </p:sp>
+      <p:sp>
+        <p:nvSpPr>
+          <p:cNvPr id="18" name="Shape 16"/>
+          <p:cNvSpPr/>
+          <p:nvPr/>
+        </p:nvSpPr>
+        <p:spPr>
+          <a:xfrm>
+            <a:off x="3992728" y="3867912"/>
+            <a:ext cx="4206240" cy="658368"/>
+          </a:xfrm>
+          <a:prstGeom prst="roundRect">
+            <a:avLst>
+              <a:gd name="adj" fmla="val 11111"/>
+            </a:avLst>
+          </a:prstGeom>
+          <a:solidFill>
+            <a:srgbClr val="EFF4EC"/>
+          </a:solidFill>
+          <a:ln w="17780">
+            <a:solidFill>
+              <a:srgbClr val="1F5130"/>
+            </a:solidFill>
+            <a:prstDash val="solid"/>
+          </a:ln>
+        </p:spPr>
+      </p:sp>
+      <p:sp>
+        <p:nvSpPr>
+          <p:cNvPr id="19" name="Shape 17"/>
+          <p:cNvSpPr/>
+          <p:nvPr/>
+        </p:nvSpPr>
+        <p:spPr>
+          <a:xfrm>
+            <a:off x="4193896" y="4114800"/>
+            <a:ext cx="164592" cy="164592"/>
+          </a:xfrm>
+          <a:prstGeom prst="ellipse">
+            <a:avLst/>
+          </a:prstGeom>
+          <a:solidFill>
+            <a:srgbClr val="1F5130"/>
+          </a:solidFill>
+          <a:ln/>
+        </p:spPr>
+      </p:sp>
+      <p:sp>
+        <p:nvSpPr>
+          <p:cNvPr id="20" name="Text 18"/>
+          <p:cNvSpPr/>
+          <p:nvPr/>
+        </p:nvSpPr>
+        <p:spPr>
+          <a:xfrm>
+            <a:off x="4495648" y="3867912"/>
+            <a:ext cx="2194560" cy="658368"/>
+          </a:xfrm>
+          <a:prstGeom prst="rect">
+            <a:avLst/>
+          </a:prstGeom>
+          <a:noFill/>
+          <a:ln/>
+        </p:spPr>
+        <p:txBody>
+          <a:bodyPr wrap="square" lIns="0" tIns="0" rIns="0" bIns="0" rtlCol="0" anchor="ctr"/>
+          <a:lstStyle/>
+          <a:p>
+            <a:pPr indent="0" marL="0">
+              <a:buNone/>
+            </a:pPr>
+            <a:r>
+              <a:rPr lang="en-US" sz="1350" b="1" dirty="0">
+                <a:solidFill>
+                  <a:srgbClr val="17231C"/>
+                </a:solidFill>
+                <a:latin typeface="Calibri" pitchFamily="34" charset="0"/>
+                <a:ea typeface="Calibri" pitchFamily="34" charset="-122"/>
+                <a:cs typeface="Calibri" pitchFamily="34" charset="-120"/>
+              </a:rPr>
+              <a:t>AWS Lambda</a:t>
+            </a:r>
+            <a:endParaRPr lang="en-US" sz="1350" dirty="0"/>
+          </a:p>
+        </p:txBody>
+      </p:sp>
+      <p:sp>
+        <p:nvSpPr>
+          <p:cNvPr id="21" name="Text 19"/>
+          <p:cNvSpPr/>
+          <p:nvPr/>
+        </p:nvSpPr>
+        <p:spPr>
+          <a:xfrm>
+            <a:off x="6644488" y="3867912"/>
+            <a:ext cx="1463040" cy="658368"/>
+          </a:xfrm>
+          <a:prstGeom prst="rect">
+            <a:avLst/>
+          </a:prstGeom>
+          <a:noFill/>
+          <a:ln/>
+        </p:spPr>
+        <p:txBody>
+          <a:bodyPr wrap="square" lIns="0" tIns="0" rIns="0" bIns="0" rtlCol="0" anchor="ctr"/>
+          <a:lstStyle/>
+          <a:p>
+            <a:pPr algn="r" indent="0" marL="0">
+              <a:buNone/>
+            </a:pPr>
+            <a:r>
+              <a:rPr lang="en-US" sz="950" dirty="0">
+                <a:solidFill>
+                  <a:srgbClr val="5C6B60"/>
+                </a:solidFill>
+                <a:latin typeface="Calibri" pitchFamily="34" charset="0"/>
+                <a:ea typeface="Calibri" pitchFamily="34" charset="-122"/>
+                <a:cs typeface="Calibri" pitchFamily="34" charset="-120"/>
+              </a:rPr>
+              <a:t>python3.12 ingest</a:t>
+            </a:r>
+            <a:endParaRPr lang="en-US" sz="950" dirty="0"/>
+          </a:p>
+        </p:txBody>
+      </p:sp>
+      <p:sp>
+        <p:nvSpPr>
+          <p:cNvPr id="22" name="Shape 20"/>
+          <p:cNvSpPr/>
+          <p:nvPr/>
+        </p:nvSpPr>
+        <p:spPr>
+          <a:xfrm>
+            <a:off x="6095848" y="4526280"/>
+            <a:ext cx="0" cy="219456"/>
+          </a:xfrm>
+          <a:prstGeom prst="line">
+            <a:avLst/>
+          </a:prstGeom>
+          <a:noFill/>
+          <a:ln w="25400">
+            <a:solidFill>
+              <a:srgbClr val="6A994E"/>
+            </a:solidFill>
+            <a:prstDash val="solid"/>
+            <a:tailEnd type="triangle"/>
+          </a:ln>
+        </p:spPr>
+      </p:sp>
+      <p:sp>
+        <p:nvSpPr>
+          <p:cNvPr id="23" name="Shape 21"/>
+          <p:cNvSpPr/>
+          <p:nvPr/>
+        </p:nvSpPr>
+        <p:spPr>
+          <a:xfrm>
+            <a:off x="3992728" y="4745736"/>
+            <a:ext cx="4206240" cy="658368"/>
+          </a:xfrm>
+          <a:prstGeom prst="roundRect">
+            <a:avLst>
+              <a:gd name="adj" fmla="val 11111"/>
+            </a:avLst>
+          </a:prstGeom>
+          <a:solidFill>
+            <a:srgbClr val="EFF4EC"/>
+          </a:solidFill>
+          <a:ln w="17780">
+            <a:solidFill>
+              <a:srgbClr val="1F5130"/>
+            </a:solidFill>
+            <a:prstDash val="solid"/>
+          </a:ln>
+        </p:spPr>
+      </p:sp>
+      <p:sp>
+        <p:nvSpPr>
+          <p:cNvPr id="24" name="Shape 22"/>
+          <p:cNvSpPr/>
+          <p:nvPr/>
+        </p:nvSpPr>
+        <p:spPr>
+          <a:xfrm>
+            <a:off x="4193896" y="4992624"/>
+            <a:ext cx="164592" cy="164592"/>
+          </a:xfrm>
+          <a:prstGeom prst="ellipse">
+            <a:avLst/>
+          </a:prstGeom>
+          <a:solidFill>
+            <a:srgbClr val="1F5130"/>
+          </a:solidFill>
+          <a:ln/>
+        </p:spPr>
+      </p:sp>
+      <p:sp>
+        <p:nvSpPr>
+          <p:cNvPr id="25" name="Text 23"/>
+          <p:cNvSpPr/>
+          <p:nvPr/>
+        </p:nvSpPr>
+        <p:spPr>
+          <a:xfrm>
+            <a:off x="4495648" y="4745736"/>
+            <a:ext cx="2194560" cy="658368"/>
+          </a:xfrm>
+          <a:prstGeom prst="rect">
+            <a:avLst/>
+          </a:prstGeom>
+          <a:noFill/>
+          <a:ln/>
+        </p:spPr>
+        <p:txBody>
+          <a:bodyPr wrap="square" lIns="0" tIns="0" rIns="0" bIns="0" rtlCol="0" anchor="ctr"/>
+          <a:lstStyle/>
+          <a:p>
+            <a:pPr indent="0" marL="0">
+              <a:buNone/>
+            </a:pPr>
+            <a:r>
+              <a:rPr lang="en-US" sz="1350" b="1" dirty="0">
+                <a:solidFill>
+                  <a:srgbClr val="17231C"/>
+                </a:solidFill>
+                <a:latin typeface="Calibri" pitchFamily="34" charset="0"/>
+                <a:ea typeface="Calibri" pitchFamily="34" charset="-122"/>
+                <a:cs typeface="Calibri" pitchFamily="34" charset="-120"/>
+              </a:rPr>
+              <a:t>DynamoDB</a:t>
+            </a:r>
+            <a:endParaRPr lang="en-US" sz="1350" dirty="0"/>
+          </a:p>
+        </p:txBody>
+      </p:sp>
+      <p:sp>
+        <p:nvSpPr>
+          <p:cNvPr id="26" name="Text 24"/>
+          <p:cNvSpPr/>
+          <p:nvPr/>
+        </p:nvSpPr>
+        <p:spPr>
+          <a:xfrm>
+            <a:off x="6644488" y="4745736"/>
+            <a:ext cx="1463040" cy="658368"/>
+          </a:xfrm>
+          <a:prstGeom prst="rect">
+            <a:avLst/>
+          </a:prstGeom>
+          <a:noFill/>
+          <a:ln/>
+        </p:spPr>
+        <p:txBody>
+          <a:bodyPr wrap="square" lIns="0" tIns="0" rIns="0" bIns="0" rtlCol="0" anchor="ctr"/>
+          <a:lstStyle/>
+          <a:p>
+            <a:pPr algn="r" indent="0" marL="0">
+              <a:buNone/>
+            </a:pPr>
+            <a:r>
+              <a:rPr lang="en-US" sz="950" dirty="0">
+                <a:solidFill>
+                  <a:srgbClr val="5C6B60"/>
+                </a:solidFill>
+                <a:latin typeface="Calibri" pitchFamily="34" charset="0"/>
+                <a:ea typeface="Calibri" pitchFamily="34" charset="-122"/>
+                <a:cs typeface="Calibri" pitchFamily="34" charset="-120"/>
+              </a:rPr>
+              <a:t>one record / window</a:t>
+            </a:r>
+            <a:endParaRPr lang="en-US" sz="950" dirty="0"/>
+          </a:p>
+        </p:txBody>
+      </p:sp>
+      <p:sp>
+        <p:nvSpPr>
+          <p:cNvPr id="27" name="Shape 25"/>
+          <p:cNvSpPr/>
+          <p:nvPr/>
+        </p:nvSpPr>
+        <p:spPr>
+          <a:xfrm>
+            <a:off x="6095848" y="5404104"/>
+            <a:ext cx="0" cy="219456"/>
+          </a:xfrm>
+          <a:prstGeom prst="line">
+            <a:avLst/>
+          </a:prstGeom>
+          <a:noFill/>
+          <a:ln w="25400">
+            <a:solidFill>
+              <a:srgbClr val="6A994E"/>
+            </a:solidFill>
+            <a:prstDash val="solid"/>
+            <a:tailEnd type="triangle"/>
+          </a:ln>
+        </p:spPr>
+      </p:sp>
+      <p:sp>
+        <p:nvSpPr>
+          <p:cNvPr id="28" name="Shape 26"/>
+          <p:cNvSpPr/>
+          <p:nvPr/>
+        </p:nvSpPr>
+        <p:spPr>
+          <a:xfrm>
+            <a:off x="3992728" y="5623560"/>
+            <a:ext cx="4206240" cy="658368"/>
+          </a:xfrm>
+          <a:prstGeom prst="roundRect">
+            <a:avLst>
+              <a:gd name="adj" fmla="val 11111"/>
+            </a:avLst>
+          </a:prstGeom>
+          <a:solidFill>
+            <a:srgbClr val="EFF4EC"/>
+          </a:solidFill>
+          <a:ln w="17780">
+            <a:solidFill>
+              <a:srgbClr val="2E7D46"/>
+            </a:solidFill>
+            <a:prstDash val="solid"/>
+          </a:ln>
+        </p:spPr>
+      </p:sp>
+      <p:sp>
+        <p:nvSpPr>
+          <p:cNvPr id="29" name="Shape 27"/>
+          <p:cNvSpPr/>
+          <p:nvPr/>
+        </p:nvSpPr>
+        <p:spPr>
+          <a:xfrm>
+            <a:off x="4193896" y="5870448"/>
+            <a:ext cx="164592" cy="164592"/>
+          </a:xfrm>
+          <a:prstGeom prst="ellipse">
+            <a:avLst/>
+          </a:prstGeom>
+          <a:solidFill>
+            <a:srgbClr val="2E7D46"/>
+          </a:solidFill>
+          <a:ln/>
+        </p:spPr>
+      </p:sp>
+      <p:sp>
+        <p:nvSpPr>
+          <p:cNvPr id="30" name="Text 28"/>
+          <p:cNvSpPr/>
+          <p:nvPr/>
+        </p:nvSpPr>
+        <p:spPr>
+          <a:xfrm>
+            <a:off x="4495648" y="5623560"/>
+            <a:ext cx="2194560" cy="658368"/>
+          </a:xfrm>
+          <a:prstGeom prst="rect">
+            <a:avLst/>
+          </a:prstGeom>
+          <a:noFill/>
+          <a:ln/>
+        </p:spPr>
+        <p:txBody>
+          <a:bodyPr wrap="square" lIns="0" tIns="0" rIns="0" bIns="0" rtlCol="0" anchor="ctr"/>
+          <a:lstStyle/>
+          <a:p>
+            <a:pPr indent="0" marL="0">
+              <a:buNone/>
+            </a:pPr>
+            <a:r>
+              <a:rPr lang="en-US" sz="1350" b="1" dirty="0">
+                <a:solidFill>
+                  <a:srgbClr val="17231C"/>
+                </a:solidFill>
+                <a:latin typeface="Calibri" pitchFamily="34" charset="0"/>
+                <a:ea typeface="Calibri" pitchFamily="34" charset="-122"/>
+                <a:cs typeface="Calibri" pitchFamily="34" charset="-120"/>
+              </a:rPr>
+              <a:t>API GW + S3</a:t>
+            </a:r>
+            <a:endParaRPr lang="en-US" sz="1350" dirty="0"/>
+          </a:p>
+        </p:txBody>
+      </p:sp>
+      <p:sp>
+        <p:nvSpPr>
+          <p:cNvPr id="31" name="Text 29"/>
+          <p:cNvSpPr/>
+          <p:nvPr/>
+        </p:nvSpPr>
+        <p:spPr>
+          <a:xfrm>
+            <a:off x="6644488" y="5623560"/>
+            <a:ext cx="1463040" cy="658368"/>
+          </a:xfrm>
+          <a:prstGeom prst="rect">
+            <a:avLst/>
+          </a:prstGeom>
+          <a:noFill/>
+          <a:ln/>
+        </p:spPr>
+        <p:txBody>
+          <a:bodyPr wrap="square" lIns="0" tIns="0" rIns="0" bIns="0" rtlCol="0" anchor="ctr"/>
+          <a:lstStyle/>
+          <a:p>
+            <a:pPr algn="r" indent="0" marL="0">
+              <a:buNone/>
+            </a:pPr>
+            <a:r>
+              <a:rPr lang="en-US" sz="950" dirty="0">
+                <a:solidFill>
+                  <a:srgbClr val="5C6B60"/>
+                </a:solidFill>
+                <a:latin typeface="Calibri" pitchFamily="34" charset="0"/>
+                <a:ea typeface="Calibri" pitchFamily="34" charset="-122"/>
+                <a:cs typeface="Calibri" pitchFamily="34" charset="-120"/>
+              </a:rPr>
+              <a:t>live dashboard</a:t>
+            </a:r>
+            <a:endParaRPr lang="en-US" sz="950" dirty="0"/>
+          </a:p>
+        </p:txBody>
+      </p:sp>
+      <p:sp>
+        <p:nvSpPr>
           <p:cNvPr id="32" name="Text 30"/>
           <p:cNvSpPr/>
           <p:nvPr/>
         </p:nvSpPr>
         <p:spPr>
           <a:xfrm>
-            <a:off x="640080" y="5257800"/>
-            <a:ext cx="10972800" cy="731520"/>
+            <a:off x="2438248" y="1234440"/>
+            <a:ext cx="1371600" cy="365760"/>
           </a:xfrm>
           <a:prstGeom prst="rect">
             <a:avLst/>
@@ -2485,7 +2481,85 @@
           <a:bodyPr wrap="square" rtlCol="0" anchor="ctr"/>
           <a:lstStyle/>
           <a:p>
-            <a:pPr algn="ctr" indent="0" marL="0">
+            <a:pPr algn="r" indent="0" marL="0">
+              <a:buNone/>
+            </a:pPr>
+            <a:r>
+              <a:rPr lang="en-US" sz="1100" b="1" spc="200" kern="0" dirty="0">
+                <a:solidFill>
+                  <a:srgbClr val="6A994E"/>
+                </a:solidFill>
+                <a:latin typeface="Calibri" pitchFamily="34" charset="0"/>
+                <a:ea typeface="Calibri" pitchFamily="34" charset="-122"/>
+                <a:cs typeface="Calibri" pitchFamily="34" charset="-120"/>
+              </a:rPr>
+              <a:t>EDGE</a:t>
+            </a:r>
+            <a:endParaRPr lang="en-US" sz="1100" dirty="0"/>
+          </a:p>
+        </p:txBody>
+      </p:sp>
+      <p:sp>
+        <p:nvSpPr>
+          <p:cNvPr id="33" name="Text 31"/>
+          <p:cNvSpPr/>
+          <p:nvPr/>
+        </p:nvSpPr>
+        <p:spPr>
+          <a:xfrm>
+            <a:off x="2438248" y="2990088"/>
+            <a:ext cx="1371600" cy="365760"/>
+          </a:xfrm>
+          <a:prstGeom prst="rect">
+            <a:avLst/>
+          </a:prstGeom>
+          <a:noFill/>
+          <a:ln/>
+        </p:spPr>
+        <p:txBody>
+          <a:bodyPr wrap="square" rtlCol="0" anchor="ctr"/>
+          <a:lstStyle/>
+          <a:p>
+            <a:pPr algn="r" indent="0" marL="0">
+              <a:buNone/>
+            </a:pPr>
+            <a:r>
+              <a:rPr lang="en-US" sz="1100" b="1" spc="200" kern="0" dirty="0">
+                <a:solidFill>
+                  <a:srgbClr val="1F5130"/>
+                </a:solidFill>
+                <a:latin typeface="Calibri" pitchFamily="34" charset="0"/>
+                <a:ea typeface="Calibri" pitchFamily="34" charset="-122"/>
+                <a:cs typeface="Calibri" pitchFamily="34" charset="-120"/>
+              </a:rPr>
+              <a:t>CLOUD</a:t>
+            </a:r>
+            <a:endParaRPr lang="en-US" sz="1100" dirty="0"/>
+          </a:p>
+        </p:txBody>
+      </p:sp>
+      <p:sp>
+        <p:nvSpPr>
+          <p:cNvPr id="34" name="Text 32"/>
+          <p:cNvSpPr/>
+          <p:nvPr/>
+        </p:nvSpPr>
+        <p:spPr>
+          <a:xfrm>
+            <a:off x="8656168" y="2743200"/>
+            <a:ext cx="3291840" cy="2194560"/>
+          </a:xfrm>
+          <a:prstGeom prst="rect">
+            <a:avLst/>
+          </a:prstGeom>
+          <a:noFill/>
+          <a:ln/>
+        </p:spPr>
+        <p:txBody>
+          <a:bodyPr wrap="square" rtlCol="0" anchor="ctr"/>
+          <a:lstStyle/>
+          <a:p>
+            <a:pPr indent="0" marL="0">
               <a:buNone/>
             </a:pPr>
             <a:r>
@@ -3226,59 +3300,24 @@
       </p:sp>
       <p:sp>
         <p:nvSpPr>
-          <p:cNvPr id="3" name="Text 1"/>
-          <p:cNvSpPr/>
-          <p:nvPr/>
-        </p:nvSpPr>
-        <p:spPr>
-          <a:xfrm>
-            <a:off x="731520" y="1965960"/>
-            <a:ext cx="2377440" cy="548640"/>
-          </a:xfrm>
-          <a:prstGeom prst="rect">
-            <a:avLst/>
-          </a:prstGeom>
-          <a:noFill/>
-          <a:ln/>
-        </p:spPr>
-        <p:txBody>
-          <a:bodyPr wrap="square" lIns="0" tIns="0" rIns="0" bIns="0" rtlCol="0" anchor="ctr"/>
-          <a:lstStyle/>
-          <a:p>
-            <a:pPr indent="0" marL="0">
-              <a:buNone/>
-            </a:pPr>
-            <a:r>
-              <a:rPr lang="en-US" sz="2300" b="1" dirty="0">
-                <a:solidFill>
-                  <a:srgbClr val="E0A83E"/>
-                </a:solidFill>
-                <a:latin typeface="Cambria" pitchFamily="34" charset="0"/>
-                <a:ea typeface="Cambria" pitchFamily="34" charset="-122"/>
-                <a:cs typeface="Cambria" pitchFamily="34" charset="-120"/>
-              </a:rPr>
-              <a:t>Problem</a:t>
-            </a:r>
-            <a:endParaRPr lang="en-US" sz="2300" dirty="0"/>
-          </a:p>
-        </p:txBody>
-      </p:sp>
-      <p:sp>
-        <p:nvSpPr>
-          <p:cNvPr id="4" name="Shape 2"/>
-          <p:cNvSpPr/>
-          <p:nvPr/>
-        </p:nvSpPr>
-        <p:spPr>
-          <a:xfrm>
-            <a:off x="3200400" y="1920240"/>
-            <a:ext cx="0" cy="1783080"/>
-          </a:xfrm>
-          <a:prstGeom prst="line">
-            <a:avLst/>
-          </a:prstGeom>
-          <a:noFill/>
-          <a:ln w="31750">
+          <p:cNvPr id="3" name="Shape 1"/>
+          <p:cNvSpPr/>
+          <p:nvPr/>
+        </p:nvSpPr>
+        <p:spPr>
+          <a:xfrm>
+            <a:off x="731520" y="1920240"/>
+            <a:ext cx="10698480" cy="1965960"/>
+          </a:xfrm>
+          <a:prstGeom prst="roundRect">
+            <a:avLst>
+              <a:gd name="adj" fmla="val 4651"/>
+            </a:avLst>
+          </a:prstGeom>
+          <a:solidFill>
+            <a:srgbClr val="EFF4EC"/>
+          </a:solidFill>
+          <a:ln w="19050">
             <a:solidFill>
               <a:srgbClr val="E0A83E"/>
             </a:solidFill>
@@ -3288,14 +3327,53 @@
       </p:sp>
       <p:sp>
         <p:nvSpPr>
+          <p:cNvPr id="4" name="Text 2"/>
+          <p:cNvSpPr/>
+          <p:nvPr/>
+        </p:nvSpPr>
+        <p:spPr>
+          <a:xfrm>
+            <a:off x="1005840" y="2103120"/>
+            <a:ext cx="3657600" cy="457200"/>
+          </a:xfrm>
+          <a:prstGeom prst="rect">
+            <a:avLst/>
+          </a:prstGeom>
+          <a:noFill/>
+          <a:ln/>
+        </p:spPr>
+        <p:txBody>
+          <a:bodyPr wrap="square" lIns="0" tIns="0" rIns="0" bIns="0" rtlCol="0" anchor="ctr"/>
+          <a:lstStyle/>
+          <a:p>
+            <a:pPr indent="0" marL="0">
+              <a:buNone/>
+            </a:pPr>
+            <a:r>
+              <a:rPr lang="en-US" sz="1900" b="1" dirty="0">
+                <a:solidFill>
+                  <a:srgbClr val="E0A83E"/>
+                </a:solidFill>
+                <a:latin typeface="Cambria" pitchFamily="34" charset="0"/>
+                <a:ea typeface="Cambria" pitchFamily="34" charset="-122"/>
+                <a:cs typeface="Cambria" pitchFamily="34" charset="-120"/>
+              </a:rPr>
+              <a:t>Problem</a:t>
+            </a:r>
+            <a:endParaRPr lang="en-US" sz="1900" dirty="0"/>
+          </a:p>
+        </p:txBody>
+      </p:sp>
+      <p:sp>
+        <p:nvSpPr>
           <p:cNvPr id="5" name="Text 3"/>
           <p:cNvSpPr/>
           <p:nvPr/>
         </p:nvSpPr>
         <p:spPr>
           <a:xfrm>
-            <a:off x="3474720" y="1920240"/>
-            <a:ext cx="7955280" cy="1920240"/>
+            <a:off x="1005840" y="2578608"/>
+            <a:ext cx="9966960" cy="1188720"/>
           </a:xfrm>
           <a:prstGeom prst="rect">
             <a:avLst/>
@@ -3309,12 +3387,12 @@
           <a:p>
             <a:pPr indent="0" marL="0">
               <a:lnSpc>
-                <a:spcPct val="112000"/>
+                <a:spcPct val="105000"/>
               </a:lnSpc>
               <a:buNone/>
             </a:pPr>
             <a:r>
-              <a:rPr lang="en-US" sz="1450" dirty="0">
+              <a:rPr lang="en-US" sz="1300" dirty="0">
                 <a:solidFill>
                   <a:srgbClr val="17231C"/>
                 </a:solidFill>
@@ -3324,65 +3402,30 @@
               </a:rPr>
               <a:t>The dashboard totalled its stored records with a single DynamoDB scan, which silently caps at ~1 MB. All 39 tests and the full emulator run passed, so the undercount only surfaced on the real AWS account — no error, just a smaller number.</a:t>
             </a:r>
-            <a:endParaRPr lang="en-US" sz="1450" dirty="0"/>
-          </a:p>
-        </p:txBody>
-      </p:sp>
-      <p:sp>
-        <p:nvSpPr>
-          <p:cNvPr id="6" name="Text 4"/>
-          <p:cNvSpPr/>
-          <p:nvPr/>
-        </p:nvSpPr>
-        <p:spPr>
-          <a:xfrm>
-            <a:off x="731520" y="4114800"/>
-            <a:ext cx="2377440" cy="548640"/>
-          </a:xfrm>
-          <a:prstGeom prst="rect">
-            <a:avLst/>
-          </a:prstGeom>
-          <a:noFill/>
-          <a:ln/>
-        </p:spPr>
-        <p:txBody>
-          <a:bodyPr wrap="square" lIns="0" tIns="0" rIns="0" bIns="0" rtlCol="0" anchor="ctr"/>
-          <a:lstStyle/>
-          <a:p>
-            <a:pPr indent="0" marL="0">
-              <a:buNone/>
-            </a:pPr>
-            <a:r>
-              <a:rPr lang="en-US" sz="2300" b="1" dirty="0">
-                <a:solidFill>
-                  <a:srgbClr val="2E7D46"/>
-                </a:solidFill>
-                <a:latin typeface="Cambria" pitchFamily="34" charset="0"/>
-                <a:ea typeface="Cambria" pitchFamily="34" charset="-122"/>
-                <a:cs typeface="Cambria" pitchFamily="34" charset="-120"/>
-              </a:rPr>
-              <a:t>Solution</a:t>
-            </a:r>
-            <a:endParaRPr lang="en-US" sz="2300" dirty="0"/>
-          </a:p>
-        </p:txBody>
-      </p:sp>
-      <p:sp>
-        <p:nvSpPr>
-          <p:cNvPr id="7" name="Shape 5"/>
-          <p:cNvSpPr/>
-          <p:nvPr/>
-        </p:nvSpPr>
-        <p:spPr>
-          <a:xfrm>
-            <a:off x="3200400" y="4069080"/>
-            <a:ext cx="0" cy="1783080"/>
-          </a:xfrm>
-          <a:prstGeom prst="line">
-            <a:avLst/>
-          </a:prstGeom>
-          <a:noFill/>
-          <a:ln w="31750">
+            <a:endParaRPr lang="en-US" sz="1300" dirty="0"/>
+          </a:p>
+        </p:txBody>
+      </p:sp>
+      <p:sp>
+        <p:nvSpPr>
+          <p:cNvPr id="6" name="Shape 4"/>
+          <p:cNvSpPr/>
+          <p:nvPr/>
+        </p:nvSpPr>
+        <p:spPr>
+          <a:xfrm>
+            <a:off x="731520" y="4041648"/>
+            <a:ext cx="10698480" cy="1965960"/>
+          </a:xfrm>
+          <a:prstGeom prst="roundRect">
+            <a:avLst>
+              <a:gd name="adj" fmla="val 4651"/>
+            </a:avLst>
+          </a:prstGeom>
+          <a:solidFill>
+            <a:srgbClr val="EFF4EC"/>
+          </a:solidFill>
+          <a:ln w="19050">
             <a:solidFill>
               <a:srgbClr val="2E7D46"/>
             </a:solidFill>
@@ -3392,14 +3435,53 @@
       </p:sp>
       <p:sp>
         <p:nvSpPr>
+          <p:cNvPr id="7" name="Text 5"/>
+          <p:cNvSpPr/>
+          <p:nvPr/>
+        </p:nvSpPr>
+        <p:spPr>
+          <a:xfrm>
+            <a:off x="1005840" y="4224528"/>
+            <a:ext cx="3657600" cy="457200"/>
+          </a:xfrm>
+          <a:prstGeom prst="rect">
+            <a:avLst/>
+          </a:prstGeom>
+          <a:noFill/>
+          <a:ln/>
+        </p:spPr>
+        <p:txBody>
+          <a:bodyPr wrap="square" lIns="0" tIns="0" rIns="0" bIns="0" rtlCol="0" anchor="ctr"/>
+          <a:lstStyle/>
+          <a:p>
+            <a:pPr indent="0" marL="0">
+              <a:buNone/>
+            </a:pPr>
+            <a:r>
+              <a:rPr lang="en-US" sz="1900" b="1" dirty="0">
+                <a:solidFill>
+                  <a:srgbClr val="2E7D46"/>
+                </a:solidFill>
+                <a:latin typeface="Cambria" pitchFamily="34" charset="0"/>
+                <a:ea typeface="Cambria" pitchFamily="34" charset="-122"/>
+                <a:cs typeface="Cambria" pitchFamily="34" charset="-120"/>
+              </a:rPr>
+              <a:t>Solution</a:t>
+            </a:r>
+            <a:endParaRPr lang="en-US" sz="1900" dirty="0"/>
+          </a:p>
+        </p:txBody>
+      </p:sp>
+      <p:sp>
+        <p:nvSpPr>
           <p:cNvPr id="8" name="Text 6"/>
           <p:cNvSpPr/>
           <p:nvPr/>
         </p:nvSpPr>
         <p:spPr>
           <a:xfrm>
-            <a:off x="3474720" y="4069080"/>
-            <a:ext cx="7955280" cy="1920240"/>
+            <a:off x="1005840" y="4700016"/>
+            <a:ext cx="9966960" cy="1188720"/>
           </a:xfrm>
           <a:prstGeom prst="rect">
             <a:avLst/>
@@ -3413,12 +3495,12 @@
           <a:p>
             <a:pPr indent="0" marL="0">
               <a:lnSpc>
-                <a:spcPct val="112000"/>
+                <a:spcPct val="105000"/>
               </a:lnSpc>
               <a:buNone/>
             </a:pPr>
             <a:r>
-              <a:rPr lang="en-US" sz="1450" dirty="0">
+              <a:rPr lang="en-US" sz="1300" dirty="0">
                 <a:solidFill>
                   <a:srgbClr val="17231C"/>
                 </a:solidFill>
@@ -3428,7 +3510,7 @@
               </a:rPr>
               <a:t>The count now follows DynamoDB's pagination cursor and sums every page. Locked in by a three-page test (500 + 500 + 214 = 1,214) and re-verified against the live deployed table.</a:t>
             </a:r>
-            <a:endParaRPr lang="en-US" sz="1450" dirty="0"/>
+            <a:endParaRPr lang="en-US" sz="1300" dirty="0"/>
           </a:p>
         </p:txBody>
       </p:sp>

--- a/ppt/KondraguntaLakshmiChaitanya_X25171216_smart-agriculture.pptx
+++ b/ppt/KondraguntaLakshmiChaitanya_X25171216_smart-agriculture.pptx
@@ -2695,12 +2695,12 @@
         </p:nvSpPr>
         <p:spPr>
           <a:xfrm>
-            <a:off x="640080" y="1874520"/>
-            <a:ext cx="3502152" cy="3657600"/>
+            <a:off x="640080" y="1828800"/>
+            <a:ext cx="10881360" cy="1371600"/>
           </a:xfrm>
           <a:prstGeom prst="roundRect">
             <a:avLst>
-              <a:gd name="adj" fmla="val 2611"/>
+              <a:gd name="adj" fmla="val 6667"/>
             </a:avLst>
           </a:prstGeom>
           <a:solidFill>
@@ -2722,8 +2722,8 @@
         </p:nvSpPr>
         <p:spPr>
           <a:xfrm>
-            <a:off x="914400" y="2194560"/>
-            <a:ext cx="640080" cy="640080"/>
+            <a:off x="960120" y="2203704"/>
+            <a:ext cx="621792" cy="621792"/>
           </a:xfrm>
           <a:prstGeom prst="ellipse">
             <a:avLst/>
@@ -2742,8 +2742,8 @@
         </p:nvSpPr>
         <p:spPr>
           <a:xfrm>
-            <a:off x="914400" y="2194560"/>
-            <a:ext cx="640080" cy="640080"/>
+            <a:off x="960120" y="2203704"/>
+            <a:ext cx="621792" cy="621792"/>
           </a:xfrm>
           <a:prstGeom prst="rect">
             <a:avLst/>
@@ -2759,7 +2759,7 @@
               <a:buNone/>
             </a:pPr>
             <a:r>
-              <a:rPr lang="en-US" sz="2400" b="1" dirty="0">
+              <a:rPr lang="en-US" sz="2200" b="1" dirty="0">
                 <a:solidFill>
                   <a:srgbClr val="FFFFFF"/>
                 </a:solidFill>
@@ -2769,7 +2769,7 @@
               </a:rPr>
               <a:t>1</a:t>
             </a:r>
-            <a:endParaRPr lang="en-US" sz="2400" dirty="0"/>
+            <a:endParaRPr lang="en-US" sz="2200" dirty="0"/>
           </a:p>
         </p:txBody>
       </p:sp>
@@ -2781,8 +2781,8 @@
         </p:nvSpPr>
         <p:spPr>
           <a:xfrm>
-            <a:off x="914400" y="3017520"/>
-            <a:ext cx="2953512" cy="822960"/>
+            <a:off x="1828800" y="2029968"/>
+            <a:ext cx="9418320" cy="411480"/>
           </a:xfrm>
           <a:prstGeom prst="rect">
             <a:avLst/>
@@ -2820,8 +2820,8 @@
         </p:nvSpPr>
         <p:spPr>
           <a:xfrm>
-            <a:off x="914400" y="3794760"/>
-            <a:ext cx="2953512" cy="1554480"/>
+            <a:off x="1828800" y="2450592"/>
+            <a:ext cx="9418320" cy="594360"/>
           </a:xfrm>
           <a:prstGeom prst="rect">
             <a:avLst/>
@@ -2862,12 +2862,12 @@
         </p:nvSpPr>
         <p:spPr>
           <a:xfrm>
-            <a:off x="4416552" y="1874520"/>
-            <a:ext cx="3502152" cy="3657600"/>
+            <a:off x="640080" y="3346704"/>
+            <a:ext cx="10881360" cy="1371600"/>
           </a:xfrm>
           <a:prstGeom prst="roundRect">
             <a:avLst>
-              <a:gd name="adj" fmla="val 2611"/>
+              <a:gd name="adj" fmla="val 6667"/>
             </a:avLst>
           </a:prstGeom>
           <a:solidFill>
@@ -2889,8 +2889,8 @@
         </p:nvSpPr>
         <p:spPr>
           <a:xfrm>
-            <a:off x="4690872" y="2194560"/>
-            <a:ext cx="640080" cy="640080"/>
+            <a:off x="960120" y="3721608"/>
+            <a:ext cx="621792" cy="621792"/>
           </a:xfrm>
           <a:prstGeom prst="ellipse">
             <a:avLst/>
@@ -2909,8 +2909,8 @@
         </p:nvSpPr>
         <p:spPr>
           <a:xfrm>
-            <a:off x="4690872" y="2194560"/>
-            <a:ext cx="640080" cy="640080"/>
+            <a:off x="960120" y="3721608"/>
+            <a:ext cx="621792" cy="621792"/>
           </a:xfrm>
           <a:prstGeom prst="rect">
             <a:avLst/>
@@ -2926,7 +2926,7 @@
               <a:buNone/>
             </a:pPr>
             <a:r>
-              <a:rPr lang="en-US" sz="2400" b="1" dirty="0">
+              <a:rPr lang="en-US" sz="2200" b="1" dirty="0">
                 <a:solidFill>
                   <a:srgbClr val="FFFFFF"/>
                 </a:solidFill>
@@ -2936,7 +2936,7 @@
               </a:rPr>
               <a:t>2</a:t>
             </a:r>
-            <a:endParaRPr lang="en-US" sz="2400" dirty="0"/>
+            <a:endParaRPr lang="en-US" sz="2200" dirty="0"/>
           </a:p>
         </p:txBody>
       </p:sp>
@@ -2948,8 +2948,8 @@
         </p:nvSpPr>
         <p:spPr>
           <a:xfrm>
-            <a:off x="4690872" y="3017520"/>
-            <a:ext cx="2953512" cy="822960"/>
+            <a:off x="1828800" y="3547872"/>
+            <a:ext cx="9418320" cy="411480"/>
           </a:xfrm>
           <a:prstGeom prst="rect">
             <a:avLst/>
@@ -2987,8 +2987,8 @@
         </p:nvSpPr>
         <p:spPr>
           <a:xfrm>
-            <a:off x="4690872" y="3794760"/>
-            <a:ext cx="2953512" cy="1554480"/>
+            <a:off x="1828800" y="3968496"/>
+            <a:ext cx="9418320" cy="594360"/>
           </a:xfrm>
           <a:prstGeom prst="rect">
             <a:avLst/>
@@ -3029,12 +3029,12 @@
         </p:nvSpPr>
         <p:spPr>
           <a:xfrm>
-            <a:off x="8193024" y="1874520"/>
-            <a:ext cx="3502152" cy="3657600"/>
+            <a:off x="640080" y="4864608"/>
+            <a:ext cx="10881360" cy="1371600"/>
           </a:xfrm>
           <a:prstGeom prst="roundRect">
             <a:avLst>
-              <a:gd name="adj" fmla="val 2611"/>
+              <a:gd name="adj" fmla="val 6667"/>
             </a:avLst>
           </a:prstGeom>
           <a:solidFill>
@@ -3056,8 +3056,8 @@
         </p:nvSpPr>
         <p:spPr>
           <a:xfrm>
-            <a:off x="8467344" y="2194560"/>
-            <a:ext cx="640080" cy="640080"/>
+            <a:off x="960120" y="5239512"/>
+            <a:ext cx="621792" cy="621792"/>
           </a:xfrm>
           <a:prstGeom prst="ellipse">
             <a:avLst/>
@@ -3076,8 +3076,8 @@
         </p:nvSpPr>
         <p:spPr>
           <a:xfrm>
-            <a:off x="8467344" y="2194560"/>
-            <a:ext cx="640080" cy="640080"/>
+            <a:off x="960120" y="5239512"/>
+            <a:ext cx="621792" cy="621792"/>
           </a:xfrm>
           <a:prstGeom prst="rect">
             <a:avLst/>
@@ -3093,7 +3093,7 @@
               <a:buNone/>
             </a:pPr>
             <a:r>
-              <a:rPr lang="en-US" sz="2400" b="1" dirty="0">
+              <a:rPr lang="en-US" sz="2200" b="1" dirty="0">
                 <a:solidFill>
                   <a:srgbClr val="FFFFFF"/>
                 </a:solidFill>
@@ -3103,7 +3103,7 @@
               </a:rPr>
               <a:t>3</a:t>
             </a:r>
-            <a:endParaRPr lang="en-US" sz="2400" dirty="0"/>
+            <a:endParaRPr lang="en-US" sz="2200" dirty="0"/>
           </a:p>
         </p:txBody>
       </p:sp>
@@ -3115,8 +3115,8 @@
         </p:nvSpPr>
         <p:spPr>
           <a:xfrm>
-            <a:off x="8467344" y="3017520"/>
-            <a:ext cx="2953512" cy="822960"/>
+            <a:off x="1828800" y="5065776"/>
+            <a:ext cx="9418320" cy="411480"/>
           </a:xfrm>
           <a:prstGeom prst="rect">
             <a:avLst/>
@@ -3154,8 +3154,8 @@
         </p:nvSpPr>
         <p:spPr>
           <a:xfrm>
-            <a:off x="8467344" y="3794760"/>
-            <a:ext cx="2953512" cy="1554480"/>
+            <a:off x="1828800" y="5486400"/>
+            <a:ext cx="9418320" cy="594360"/>
           </a:xfrm>
           <a:prstGeom prst="rect">
             <a:avLst/>
@@ -3183,45 +3183,6 @@
                 <a:cs typeface="Calibri" pitchFamily="34" charset="-120"/>
               </a:rPr>
               <a:t>Push a field's soil moisture below 20% and the irrigation-needed banner appears within one ten-second window.</a:t>
-            </a:r>
-            <a:endParaRPr lang="en-US" sz="1300" dirty="0"/>
-          </a:p>
-        </p:txBody>
-      </p:sp>
-      <p:sp>
-        <p:nvSpPr>
-          <p:cNvPr id="19" name="Text 17"/>
-          <p:cNvSpPr/>
-          <p:nvPr/>
-        </p:nvSpPr>
-        <p:spPr>
-          <a:xfrm>
-            <a:off x="640080" y="6263640"/>
-            <a:ext cx="10972800" cy="365760"/>
-          </a:xfrm>
-          <a:prstGeom prst="rect">
-            <a:avLst/>
-          </a:prstGeom>
-          <a:noFill/>
-          <a:ln/>
-        </p:spPr>
-        <p:txBody>
-          <a:bodyPr wrap="square" rtlCol="0" anchor="ctr"/>
-          <a:lstStyle/>
-          <a:p>
-            <a:pPr indent="0" marL="0">
-              <a:buNone/>
-            </a:pPr>
-            <a:r>
-              <a:rPr lang="en-US" sz="1300" i="1" dirty="0">
-                <a:solidFill>
-                  <a:srgbClr val="6A994E"/>
-                </a:solidFill>
-                <a:latin typeface="Calibri" pitchFamily="34" charset="0"/>
-                <a:ea typeface="Calibri" pitchFamily="34" charset="-122"/>
-                <a:cs typeface="Calibri" pitchFamily="34" charset="-120"/>
-              </a:rPr>
-              <a:t>Switch to the live dashboard here — backup video ready.</a:t>
             </a:r>
             <a:endParaRPr lang="en-US" sz="1300" dirty="0"/>
           </a:p>

--- a/ppt/KondraguntaLakshmiChaitanya_X25171216_smart-agriculture.pptx
+++ b/ppt/KondraguntaLakshmiChaitanya_X25171216_smart-agriculture.pptx
@@ -1284,41 +1284,14 @@
       </p:sp>
       <p:sp>
         <p:nvSpPr>
-          <p:cNvPr id="6" name="Shape 4"/>
+          <p:cNvPr id="6" name="Text 4"/>
           <p:cNvSpPr/>
           <p:nvPr/>
         </p:nvSpPr>
         <p:spPr>
           <a:xfrm>
             <a:off x="5120640" y="4023360"/>
-            <a:ext cx="2926080" cy="566928"/>
-          </a:xfrm>
-          <a:prstGeom prst="roundRect">
-            <a:avLst>
-              <a:gd name="adj" fmla="val 50000"/>
-            </a:avLst>
-          </a:prstGeom>
-          <a:solidFill>
-            <a:srgbClr val="20351F"/>
-          </a:solidFill>
-          <a:ln w="12700">
-            <a:solidFill>
-              <a:srgbClr val="E0A83E"/>
-            </a:solidFill>
-            <a:prstDash val="solid"/>
-          </a:ln>
-        </p:spPr>
-      </p:sp>
-      <p:sp>
-        <p:nvSpPr>
-          <p:cNvPr id="7" name="Text 5"/>
-          <p:cNvSpPr/>
-          <p:nvPr/>
-        </p:nvSpPr>
-        <p:spPr>
-          <a:xfrm>
-            <a:off x="5120640" y="4023360"/>
-            <a:ext cx="2926080" cy="566928"/>
+            <a:ext cx="3474720" cy="411480"/>
           </a:xfrm>
           <a:prstGeom prst="rect">
             <a:avLst/>
@@ -1330,11 +1303,11 @@
           <a:bodyPr wrap="square" lIns="0" tIns="0" rIns="0" bIns="0" rtlCol="0" anchor="ctr"/>
           <a:lstStyle/>
           <a:p>
-            <a:pPr algn="ctr" indent="0" marL="0">
-              <a:buNone/>
-            </a:pPr>
-            <a:r>
-              <a:rPr lang="en-US" sz="1350" b="1" dirty="0">
+            <a:pPr indent="0" marL="0">
+              <a:buNone/>
+            </a:pPr>
+            <a:r>
+              <a:rPr lang="en-US" sz="1500" b="1" dirty="0">
                 <a:solidFill>
                   <a:srgbClr val="E0A83E"/>
                 </a:solidFill>
@@ -1344,47 +1317,20 @@
               </a:rPr>
               <a:t>Soil moisture &lt; 20%</a:t>
             </a:r>
-            <a:endParaRPr lang="en-US" sz="1350" dirty="0"/>
-          </a:p>
-        </p:txBody>
-      </p:sp>
-      <p:sp>
-        <p:nvSpPr>
-          <p:cNvPr id="8" name="Shape 6"/>
-          <p:cNvSpPr/>
-          <p:nvPr/>
-        </p:nvSpPr>
-        <p:spPr>
-          <a:xfrm>
-            <a:off x="5120640" y="4709160"/>
-            <a:ext cx="2926080" cy="566928"/>
-          </a:xfrm>
-          <a:prstGeom prst="roundRect">
-            <a:avLst>
-              <a:gd name="adj" fmla="val 50000"/>
-            </a:avLst>
-          </a:prstGeom>
-          <a:solidFill>
-            <a:srgbClr val="20351F"/>
-          </a:solidFill>
-          <a:ln w="12700">
-            <a:solidFill>
-              <a:srgbClr val="E0A83E"/>
-            </a:solidFill>
-            <a:prstDash val="solid"/>
-          </a:ln>
-        </p:spPr>
-      </p:sp>
-      <p:sp>
-        <p:nvSpPr>
-          <p:cNvPr id="9" name="Text 7"/>
-          <p:cNvSpPr/>
-          <p:nvPr/>
-        </p:nvSpPr>
-        <p:spPr>
-          <a:xfrm>
-            <a:off x="5120640" y="4709160"/>
-            <a:ext cx="2926080" cy="566928"/>
+            <a:endParaRPr lang="en-US" sz="1500" dirty="0"/>
+          </a:p>
+        </p:txBody>
+      </p:sp>
+      <p:sp>
+        <p:nvSpPr>
+          <p:cNvPr id="7" name="Text 5"/>
+          <p:cNvSpPr/>
+          <p:nvPr/>
+        </p:nvSpPr>
+        <p:spPr>
+          <a:xfrm>
+            <a:off x="5120640" y="4526280"/>
+            <a:ext cx="3474720" cy="411480"/>
           </a:xfrm>
           <a:prstGeom prst="rect">
             <a:avLst/>
@@ -1396,11 +1342,11 @@
           <a:bodyPr wrap="square" lIns="0" tIns="0" rIns="0" bIns="0" rtlCol="0" anchor="ctr"/>
           <a:lstStyle/>
           <a:p>
-            <a:pPr algn="ctr" indent="0" marL="0">
-              <a:buNone/>
-            </a:pPr>
-            <a:r>
-              <a:rPr lang="en-US" sz="1350" b="1" dirty="0">
+            <a:pPr indent="0" marL="0">
+              <a:buNone/>
+            </a:pPr>
+            <a:r>
+              <a:rPr lang="en-US" sz="1500" b="1" dirty="0">
                 <a:solidFill>
                   <a:srgbClr val="E0A83E"/>
                 </a:solidFill>
@@ -1410,47 +1356,20 @@
               </a:rPr>
               <a:t>Temperature &lt; 3 °C</a:t>
             </a:r>
-            <a:endParaRPr lang="en-US" sz="1350" dirty="0"/>
-          </a:p>
-        </p:txBody>
-      </p:sp>
-      <p:sp>
-        <p:nvSpPr>
-          <p:cNvPr id="10" name="Shape 8"/>
-          <p:cNvSpPr/>
-          <p:nvPr/>
-        </p:nvSpPr>
-        <p:spPr>
-          <a:xfrm>
-            <a:off x="5120640" y="5394960"/>
-            <a:ext cx="2926080" cy="566928"/>
-          </a:xfrm>
-          <a:prstGeom prst="roundRect">
-            <a:avLst>
-              <a:gd name="adj" fmla="val 50000"/>
-            </a:avLst>
-          </a:prstGeom>
-          <a:solidFill>
-            <a:srgbClr val="20351F"/>
-          </a:solidFill>
-          <a:ln w="12700">
-            <a:solidFill>
-              <a:srgbClr val="E0A83E"/>
-            </a:solidFill>
-            <a:prstDash val="solid"/>
-          </a:ln>
-        </p:spPr>
-      </p:sp>
-      <p:sp>
-        <p:nvSpPr>
-          <p:cNvPr id="11" name="Text 9"/>
-          <p:cNvSpPr/>
-          <p:nvPr/>
-        </p:nvSpPr>
-        <p:spPr>
-          <a:xfrm>
-            <a:off x="5120640" y="5394960"/>
-            <a:ext cx="2926080" cy="566928"/>
+            <a:endParaRPr lang="en-US" sz="1500" dirty="0"/>
+          </a:p>
+        </p:txBody>
+      </p:sp>
+      <p:sp>
+        <p:nvSpPr>
+          <p:cNvPr id="8" name="Text 6"/>
+          <p:cNvSpPr/>
+          <p:nvPr/>
+        </p:nvSpPr>
+        <p:spPr>
+          <a:xfrm>
+            <a:off x="5120640" y="5029200"/>
+            <a:ext cx="3474720" cy="411480"/>
           </a:xfrm>
           <a:prstGeom prst="rect">
             <a:avLst/>
@@ -1462,11 +1381,11 @@
           <a:bodyPr wrap="square" lIns="0" tIns="0" rIns="0" bIns="0" rtlCol="0" anchor="ctr"/>
           <a:lstStyle/>
           <a:p>
-            <a:pPr algn="ctr" indent="0" marL="0">
-              <a:buNone/>
-            </a:pPr>
-            <a:r>
-              <a:rPr lang="en-US" sz="1350" b="1" dirty="0">
+            <a:pPr indent="0" marL="0">
+              <a:buNone/>
+            </a:pPr>
+            <a:r>
+              <a:rPr lang="en-US" sz="1500" b="1" dirty="0">
                 <a:solidFill>
                   <a:srgbClr val="E0A83E"/>
                 </a:solidFill>
@@ -1476,13 +1395,13 @@
               </a:rPr>
               <a:t>Humidity &gt; 90%</a:t>
             </a:r>
-            <a:endParaRPr lang="en-US" sz="1350" dirty="0"/>
-          </a:p>
-        </p:txBody>
-      </p:sp>
-      <p:sp>
-        <p:nvSpPr>
-          <p:cNvPr id="12" name="Text 10"/>
+            <a:endParaRPr lang="en-US" sz="1500" dirty="0"/>
+          </a:p>
+        </p:txBody>
+      </p:sp>
+      <p:sp>
+        <p:nvSpPr>
+          <p:cNvPr id="9" name="Text 7"/>
           <p:cNvSpPr/>
           <p:nvPr/>
         </p:nvSpPr>
@@ -1504,17 +1423,6 @@
             <a:pPr indent="0" marL="0">
               <a:buNone/>
             </a:pPr>
-            <a:r>
-              <a:rPr lang="en-US" sz="1250" dirty="0">
-                <a:solidFill>
-                  <a:srgbClr val="5C6B60"/>
-                </a:solidFill>
-                <a:latin typeface="Calibri" pitchFamily="34" charset="0"/>
-                <a:ea typeface="Calibri" pitchFamily="34" charset="-122"/>
-                <a:cs typeface="Calibri" pitchFamily="34" charset="-120"/>
-              </a:rPr>
-              <a:t>Fog &amp; Edge Computing (H9FECC)   ·   deployed live on AWS</a:t>
-            </a:r>
             <a:endParaRPr lang="en-US" sz="1250" dirty="0"/>
           </a:p>
         </p:txBody>

--- a/ppt/KondraguntaLakshmiChaitanya_X25171216_smart-agriculture.pptx
+++ b/ppt/KondraguntaLakshmiChaitanya_X25171216_smart-agriculture.pptx
@@ -1124,7 +1124,7 @@
     <p:bg>
       <p:bgPr>
         <a:solidFill>
-          <a:srgbClr val="16281C"/>
+          <a:srgbClr val="262C38"/>
         </a:solidFill>
       </p:bgPr>
     </p:bg>
@@ -1151,13 +1151,13 @@
         <p:spPr>
           <a:xfrm>
             <a:off x="0" y="0"/>
-            <a:ext cx="4663440" cy="6858000"/>
-          </a:xfrm>
-          <a:prstGeom prst="rect">
-            <a:avLst/>
-          </a:prstGeom>
-          <a:solidFill>
-            <a:srgbClr val="1F5130"/>
+            <a:ext cx="1463040" cy="6858000"/>
+          </a:xfrm>
+          <a:prstGeom prst="rect">
+            <a:avLst/>
+          </a:prstGeom>
+          <a:solidFill>
+            <a:srgbClr val="FF8A6B"/>
           </a:solidFill>
           <a:ln/>
         </p:spPr>
@@ -1170,8 +1170,8 @@
         </p:nvSpPr>
         <p:spPr>
           <a:xfrm>
-            <a:off x="502920" y="1280160"/>
-            <a:ext cx="3749040" cy="2377440"/>
+            <a:off x="1764792" y="1645920"/>
+            <a:ext cx="9677095" cy="1645920"/>
           </a:xfrm>
           <a:prstGeom prst="rect">
             <a:avLst/>
@@ -1184,12 +1184,15 @@
           <a:lstStyle/>
           <a:p>
             <a:pPr indent="0" marL="0">
-              <a:buNone/>
-            </a:pPr>
-            <a:r>
-              <a:rPr lang="en-US" sz="3400" b="1" dirty="0">
-                <a:solidFill>
-                  <a:srgbClr val="FFFFFF"/>
+              <a:lnSpc>
+                <a:spcPct val="98000"/>
+              </a:lnSpc>
+              <a:buNone/>
+            </a:pPr>
+            <a:r>
+              <a:rPr lang="en-US" sz="3800" b="1" dirty="0">
+                <a:solidFill>
+                  <a:srgbClr val="EEF2F6"/>
                 </a:solidFill>
                 <a:latin typeface="Cambria" pitchFamily="34" charset="0"/>
                 <a:ea typeface="Cambria" pitchFamily="34" charset="-122"/>
@@ -1197,7 +1200,7 @@
               </a:rPr>
               <a:t>Smart Agriculture Field Monitoring</a:t>
             </a:r>
-            <a:endParaRPr lang="en-US" sz="3400" dirty="0"/>
+            <a:endParaRPr lang="en-US" sz="3800" dirty="0"/>
           </a:p>
         </p:txBody>
       </p:sp>
@@ -1209,8 +1212,8 @@
         </p:nvSpPr>
         <p:spPr>
           <a:xfrm>
-            <a:off x="521208" y="5394960"/>
-            <a:ext cx="3840480" cy="731520"/>
+            <a:off x="1783080" y="3337560"/>
+            <a:ext cx="9677095" cy="365760"/>
           </a:xfrm>
           <a:prstGeom prst="rect">
             <a:avLst/>
@@ -1226,9 +1229,9 @@
               <a:buNone/>
             </a:pPr>
             <a:r>
-              <a:rPr lang="en-US" sz="1500" dirty="0">
-                <a:solidFill>
-                  <a:srgbClr val="CFE3CE"/>
+              <a:rPr lang="en-US" sz="1450" dirty="0">
+                <a:solidFill>
+                  <a:srgbClr val="8B98A6"/>
                 </a:solidFill>
                 <a:latin typeface="Calibri" pitchFamily="34" charset="0"/>
                 <a:ea typeface="Calibri" pitchFamily="34" charset="-122"/>
@@ -1236,7 +1239,7 @@
               </a:rPr>
               <a:t>Kondragunta Lakshmi Chaitanya   ·   X25171216</a:t>
             </a:r>
-            <a:endParaRPr lang="en-US" sz="1500" dirty="0"/>
+            <a:endParaRPr lang="en-US" sz="1450" dirty="0"/>
           </a:p>
         </p:txBody>
       </p:sp>
@@ -1248,29 +1251,29 @@
         </p:nvSpPr>
         <p:spPr>
           <a:xfrm>
-            <a:off x="5120640" y="1371600"/>
-            <a:ext cx="6492240" cy="2011680"/>
-          </a:xfrm>
-          <a:prstGeom prst="rect">
-            <a:avLst/>
-          </a:prstGeom>
-          <a:noFill/>
-          <a:ln/>
-        </p:spPr>
-        <p:txBody>
-          <a:bodyPr wrap="square" rtlCol="0" anchor="ctr"/>
+            <a:off x="1783080" y="3931920"/>
+            <a:ext cx="8138160" cy="1325880"/>
+          </a:xfrm>
+          <a:prstGeom prst="rect">
+            <a:avLst/>
+          </a:prstGeom>
+          <a:noFill/>
+          <a:ln/>
+        </p:spPr>
+        <p:txBody>
+          <a:bodyPr wrap="square" rtlCol="0" anchor="t"/>
           <a:lstStyle/>
           <a:p>
             <a:pPr indent="0" marL="0">
               <a:lnSpc>
-                <a:spcPct val="112000"/>
+                <a:spcPct val="130000"/>
               </a:lnSpc>
               <a:buNone/>
             </a:pPr>
             <a:r>
-              <a:rPr lang="en-US" sz="2000" dirty="0">
-                <a:solidFill>
-                  <a:srgbClr val="CFE3CE"/>
+              <a:rPr lang="en-US" sz="1400" dirty="0">
+                <a:solidFill>
+                  <a:srgbClr val="EEF2F6"/>
                 </a:solidFill>
                 <a:latin typeface="Calibri" pitchFamily="34" charset="0"/>
                 <a:ea typeface="Calibri" pitchFamily="34" charset="-122"/>
@@ -1278,152 +1281,7 @@
               </a:rPr>
               <a:t>Fixed-schedule field checks reveal a dry root zone, an overnight frost, or a fungal-risk humidity spell only after the damage is done.</a:t>
             </a:r>
-            <a:endParaRPr lang="en-US" sz="2000" dirty="0"/>
-          </a:p>
-        </p:txBody>
-      </p:sp>
-      <p:sp>
-        <p:nvSpPr>
-          <p:cNvPr id="6" name="Text 4"/>
-          <p:cNvSpPr/>
-          <p:nvPr/>
-        </p:nvSpPr>
-        <p:spPr>
-          <a:xfrm>
-            <a:off x="5120640" y="4023360"/>
-            <a:ext cx="3474720" cy="411480"/>
-          </a:xfrm>
-          <a:prstGeom prst="rect">
-            <a:avLst/>
-          </a:prstGeom>
-          <a:noFill/>
-          <a:ln/>
-        </p:spPr>
-        <p:txBody>
-          <a:bodyPr wrap="square" lIns="0" tIns="0" rIns="0" bIns="0" rtlCol="0" anchor="ctr"/>
-          <a:lstStyle/>
-          <a:p>
-            <a:pPr indent="0" marL="0">
-              <a:buNone/>
-            </a:pPr>
-            <a:r>
-              <a:rPr lang="en-US" sz="1500" b="1" dirty="0">
-                <a:solidFill>
-                  <a:srgbClr val="E0A83E"/>
-                </a:solidFill>
-                <a:latin typeface="Calibri" pitchFamily="34" charset="0"/>
-                <a:ea typeface="Calibri" pitchFamily="34" charset="-122"/>
-                <a:cs typeface="Calibri" pitchFamily="34" charset="-120"/>
-              </a:rPr>
-              <a:t>Soil moisture &lt; 20%</a:t>
-            </a:r>
-            <a:endParaRPr lang="en-US" sz="1500" dirty="0"/>
-          </a:p>
-        </p:txBody>
-      </p:sp>
-      <p:sp>
-        <p:nvSpPr>
-          <p:cNvPr id="7" name="Text 5"/>
-          <p:cNvSpPr/>
-          <p:nvPr/>
-        </p:nvSpPr>
-        <p:spPr>
-          <a:xfrm>
-            <a:off x="5120640" y="4526280"/>
-            <a:ext cx="3474720" cy="411480"/>
-          </a:xfrm>
-          <a:prstGeom prst="rect">
-            <a:avLst/>
-          </a:prstGeom>
-          <a:noFill/>
-          <a:ln/>
-        </p:spPr>
-        <p:txBody>
-          <a:bodyPr wrap="square" lIns="0" tIns="0" rIns="0" bIns="0" rtlCol="0" anchor="ctr"/>
-          <a:lstStyle/>
-          <a:p>
-            <a:pPr indent="0" marL="0">
-              <a:buNone/>
-            </a:pPr>
-            <a:r>
-              <a:rPr lang="en-US" sz="1500" b="1" dirty="0">
-                <a:solidFill>
-                  <a:srgbClr val="E0A83E"/>
-                </a:solidFill>
-                <a:latin typeface="Calibri" pitchFamily="34" charset="0"/>
-                <a:ea typeface="Calibri" pitchFamily="34" charset="-122"/>
-                <a:cs typeface="Calibri" pitchFamily="34" charset="-120"/>
-              </a:rPr>
-              <a:t>Temperature &lt; 3 °C</a:t>
-            </a:r>
-            <a:endParaRPr lang="en-US" sz="1500" dirty="0"/>
-          </a:p>
-        </p:txBody>
-      </p:sp>
-      <p:sp>
-        <p:nvSpPr>
-          <p:cNvPr id="8" name="Text 6"/>
-          <p:cNvSpPr/>
-          <p:nvPr/>
-        </p:nvSpPr>
-        <p:spPr>
-          <a:xfrm>
-            <a:off x="5120640" y="5029200"/>
-            <a:ext cx="3474720" cy="411480"/>
-          </a:xfrm>
-          <a:prstGeom prst="rect">
-            <a:avLst/>
-          </a:prstGeom>
-          <a:noFill/>
-          <a:ln/>
-        </p:spPr>
-        <p:txBody>
-          <a:bodyPr wrap="square" lIns="0" tIns="0" rIns="0" bIns="0" rtlCol="0" anchor="ctr"/>
-          <a:lstStyle/>
-          <a:p>
-            <a:pPr indent="0" marL="0">
-              <a:buNone/>
-            </a:pPr>
-            <a:r>
-              <a:rPr lang="en-US" sz="1500" b="1" dirty="0">
-                <a:solidFill>
-                  <a:srgbClr val="E0A83E"/>
-                </a:solidFill>
-                <a:latin typeface="Calibri" pitchFamily="34" charset="0"/>
-                <a:ea typeface="Calibri" pitchFamily="34" charset="-122"/>
-                <a:cs typeface="Calibri" pitchFamily="34" charset="-120"/>
-              </a:rPr>
-              <a:t>Humidity &gt; 90%</a:t>
-            </a:r>
-            <a:endParaRPr lang="en-US" sz="1500" dirty="0"/>
-          </a:p>
-        </p:txBody>
-      </p:sp>
-      <p:sp>
-        <p:nvSpPr>
-          <p:cNvPr id="9" name="Text 7"/>
-          <p:cNvSpPr/>
-          <p:nvPr/>
-        </p:nvSpPr>
-        <p:spPr>
-          <a:xfrm>
-            <a:off x="5120640" y="6172200"/>
-            <a:ext cx="6400800" cy="365760"/>
-          </a:xfrm>
-          <a:prstGeom prst="rect">
-            <a:avLst/>
-          </a:prstGeom>
-          <a:noFill/>
-          <a:ln/>
-        </p:spPr>
-        <p:txBody>
-          <a:bodyPr wrap="square" rtlCol="0" anchor="ctr"/>
-          <a:lstStyle/>
-          <a:p>
-            <a:pPr indent="0" marL="0">
-              <a:buNone/>
-            </a:pPr>
-            <a:endParaRPr lang="en-US" sz="1250" dirty="0"/>
+            <a:endParaRPr lang="en-US" sz="1400" dirty="0"/>
           </a:p>
         </p:txBody>
       </p:sp>
@@ -1441,7 +1299,7 @@
     <p:bg>
       <p:bgPr>
         <a:solidFill>
-          <a:srgbClr val="FFFFFF"/>
+          <a:srgbClr val="262C38"/>
         </a:solidFill>
       </p:bgPr>
     </p:bg>
@@ -1461,23 +1319,43 @@
       </p:grpSpPr>
       <p:sp>
         <p:nvSpPr>
-          <p:cNvPr id="2" name="Text 0"/>
-          <p:cNvSpPr/>
-          <p:nvPr/>
-        </p:nvSpPr>
-        <p:spPr>
-          <a:xfrm>
-            <a:off x="640080" y="457200"/>
-            <a:ext cx="10972800" cy="640080"/>
-          </a:xfrm>
-          <a:prstGeom prst="rect">
-            <a:avLst/>
-          </a:prstGeom>
-          <a:noFill/>
-          <a:ln/>
-        </p:spPr>
-        <p:txBody>
-          <a:bodyPr wrap="square" rtlCol="0" anchor="ctr"/>
+          <p:cNvPr id="2" name="Shape 0"/>
+          <p:cNvSpPr/>
+          <p:nvPr/>
+        </p:nvSpPr>
+        <p:spPr>
+          <a:xfrm>
+            <a:off x="0" y="0"/>
+            <a:ext cx="146304" cy="6858000"/>
+          </a:xfrm>
+          <a:prstGeom prst="rect">
+            <a:avLst/>
+          </a:prstGeom>
+          <a:solidFill>
+            <a:srgbClr val="FF8A6B"/>
+          </a:solidFill>
+          <a:ln/>
+        </p:spPr>
+      </p:sp>
+      <p:sp>
+        <p:nvSpPr>
+          <p:cNvPr id="3" name="Text 1"/>
+          <p:cNvSpPr/>
+          <p:nvPr/>
+        </p:nvSpPr>
+        <p:spPr>
+          <a:xfrm>
+            <a:off x="868680" y="731520"/>
+            <a:ext cx="914400" cy="640080"/>
+          </a:xfrm>
+          <a:prstGeom prst="rect">
+            <a:avLst/>
+          </a:prstGeom>
+          <a:noFill/>
+          <a:ln/>
+        </p:spPr>
+        <p:txBody>
+          <a:bodyPr wrap="square" lIns="0" tIns="0" rIns="0" bIns="0" rtlCol="0" anchor="ctr"/>
           <a:lstStyle/>
           <a:p>
             <a:pPr indent="0" marL="0">
@@ -1486,40 +1364,116 @@
             <a:r>
               <a:rPr lang="en-US" sz="3000" b="1" dirty="0">
                 <a:solidFill>
-                  <a:srgbClr val="17231C"/>
+                  <a:srgbClr val="FF8A6B"/>
                 </a:solidFill>
                 <a:latin typeface="Cambria" pitchFamily="34" charset="0"/>
                 <a:ea typeface="Cambria" pitchFamily="34" charset="-122"/>
                 <a:cs typeface="Cambria" pitchFamily="34" charset="-120"/>
               </a:rPr>
+              <a:t>01</a:t>
+            </a:r>
+            <a:endParaRPr lang="en-US" sz="3000" dirty="0"/>
+          </a:p>
+        </p:txBody>
+      </p:sp>
+      <p:sp>
+        <p:nvSpPr>
+          <p:cNvPr id="4" name="Text 2"/>
+          <p:cNvSpPr/>
+          <p:nvPr/>
+        </p:nvSpPr>
+        <p:spPr>
+          <a:xfrm>
+            <a:off x="1737360" y="905256"/>
+            <a:ext cx="9722815" cy="274320"/>
+          </a:xfrm>
+          <a:prstGeom prst="rect">
+            <a:avLst/>
+          </a:prstGeom>
+          <a:noFill/>
+          <a:ln/>
+        </p:spPr>
+        <p:txBody>
+          <a:bodyPr wrap="square" lIns="0" tIns="0" rIns="0" bIns="0" rtlCol="0" anchor="ctr"/>
+          <a:lstStyle/>
+          <a:p>
+            <a:pPr indent="0" marL="0">
+              <a:buNone/>
+            </a:pPr>
+            <a:r>
+              <a:rPr lang="en-US" sz="1100" b="1" spc="200" kern="0" dirty="0">
+                <a:solidFill>
+                  <a:srgbClr val="8B98A6"/>
+                </a:solidFill>
+                <a:latin typeface="Calibri" pitchFamily="34" charset="0"/>
+                <a:ea typeface="Calibri" pitchFamily="34" charset="-122"/>
+                <a:cs typeface="Calibri" pitchFamily="34" charset="-120"/>
+              </a:rPr>
+              <a:t>ARCHITECTURE</a:t>
+            </a:r>
+            <a:endParaRPr lang="en-US" sz="1100" dirty="0"/>
+          </a:p>
+        </p:txBody>
+      </p:sp>
+      <p:sp>
+        <p:nvSpPr>
+          <p:cNvPr id="5" name="Text 3"/>
+          <p:cNvSpPr/>
+          <p:nvPr/>
+        </p:nvSpPr>
+        <p:spPr>
+          <a:xfrm>
+            <a:off x="868680" y="1380744"/>
+            <a:ext cx="10591495" cy="640080"/>
+          </a:xfrm>
+          <a:prstGeom prst="rect">
+            <a:avLst/>
+          </a:prstGeom>
+          <a:noFill/>
+          <a:ln/>
+        </p:spPr>
+        <p:txBody>
+          <a:bodyPr wrap="square" lIns="0" tIns="0" rIns="0" bIns="0" rtlCol="0" anchor="ctr"/>
+          <a:lstStyle/>
+          <a:p>
+            <a:pPr indent="0" marL="0">
+              <a:buNone/>
+            </a:pPr>
+            <a:r>
+              <a:rPr lang="en-US" sz="2300" b="1" dirty="0">
+                <a:solidFill>
+                  <a:srgbClr val="EEF2F6"/>
+                </a:solidFill>
+                <a:latin typeface="Cambria" pitchFamily="34" charset="0"/>
+                <a:ea typeface="Cambria" pitchFamily="34" charset="-122"/>
+                <a:cs typeface="Cambria" pitchFamily="34" charset="-120"/>
+              </a:rPr>
               <a:t>What I Built — Edge to Cloud</a:t>
             </a:r>
-            <a:endParaRPr lang="en-US" sz="3000" dirty="0"/>
-          </a:p>
-        </p:txBody>
-      </p:sp>
-      <p:sp>
-        <p:nvSpPr>
-          <p:cNvPr id="3" name="Shape 1"/>
-          <p:cNvSpPr/>
-          <p:nvPr/>
-        </p:nvSpPr>
-        <p:spPr>
-          <a:xfrm>
-            <a:off x="3992728" y="1234440"/>
-            <a:ext cx="4206240" cy="658368"/>
+            <a:endParaRPr lang="en-US" sz="2300" dirty="0"/>
+          </a:p>
+        </p:txBody>
+      </p:sp>
+      <p:sp>
+        <p:nvSpPr>
+          <p:cNvPr id="6" name="Shape 4"/>
+          <p:cNvSpPr/>
+          <p:nvPr/>
+        </p:nvSpPr>
+        <p:spPr>
+          <a:xfrm>
+            <a:off x="868680" y="2971800"/>
+            <a:ext cx="1384249" cy="1965960"/>
           </a:xfrm>
           <a:prstGeom prst="roundRect">
-            <a:avLst>
-              <a:gd name="adj" fmla="val 11111"/>
-            </a:avLst>
-          </a:prstGeom>
-          <a:solidFill>
-            <a:srgbClr val="EFF4EC"/>
-          </a:solidFill>
-          <a:ln w="17780">
+            <a:avLst/>
+          </a:prstGeom>
+          <a:solidFill>
+            <a:srgbClr val="FF8A6B"/>
+          </a:solidFill>
+          <a:ln w="12700">
             <a:solidFill>
-              <a:srgbClr val="6A994E"/>
+              <a:srgbClr val="FF8A6B"/>
             </a:solidFill>
             <a:prstDash val="solid"/>
           </a:ln>
@@ -1527,34 +1481,14 @@
       </p:sp>
       <p:sp>
         <p:nvSpPr>
-          <p:cNvPr id="4" name="Shape 2"/>
-          <p:cNvSpPr/>
-          <p:nvPr/>
-        </p:nvSpPr>
-        <p:spPr>
-          <a:xfrm>
-            <a:off x="4193896" y="1481328"/>
-            <a:ext cx="164592" cy="164592"/>
-          </a:xfrm>
-          <a:prstGeom prst="ellipse">
-            <a:avLst/>
-          </a:prstGeom>
-          <a:solidFill>
-            <a:srgbClr val="6A994E"/>
-          </a:solidFill>
-          <a:ln/>
-        </p:spPr>
-      </p:sp>
-      <p:sp>
-        <p:nvSpPr>
-          <p:cNvPr id="5" name="Text 3"/>
-          <p:cNvSpPr/>
-          <p:nvPr/>
-        </p:nvSpPr>
-        <p:spPr>
-          <a:xfrm>
-            <a:off x="4495648" y="1234440"/>
-            <a:ext cx="2194560" cy="658368"/>
+          <p:cNvPr id="7" name="Text 5"/>
+          <p:cNvSpPr/>
+          <p:nvPr/>
+        </p:nvSpPr>
+        <p:spPr>
+          <a:xfrm>
+            <a:off x="1014984" y="3154680"/>
+            <a:ext cx="1091641" cy="320040"/>
           </a:xfrm>
           <a:prstGeom prst="rect">
             <a:avLst/>
@@ -1570,30 +1504,156 @@
               <a:buNone/>
             </a:pPr>
             <a:r>
-              <a:rPr lang="en-US" sz="1350" b="1" dirty="0">
-                <a:solidFill>
-                  <a:srgbClr val="17231C"/>
+              <a:rPr lang="en-US" sz="1100" dirty="0">
+                <a:solidFill>
+                  <a:srgbClr val="111111"/>
+                </a:solidFill>
+                <a:latin typeface="Consolas" pitchFamily="34" charset="0"/>
+                <a:ea typeface="Consolas" pitchFamily="34" charset="-122"/>
+                <a:cs typeface="Consolas" pitchFamily="34" charset="-120"/>
+              </a:rPr>
+              <a:t>01</a:t>
+            </a:r>
+            <a:endParaRPr lang="en-US" sz="1100" dirty="0"/>
+          </a:p>
+        </p:txBody>
+      </p:sp>
+      <p:sp>
+        <p:nvSpPr>
+          <p:cNvPr id="8" name="Text 6"/>
+          <p:cNvSpPr/>
+          <p:nvPr/>
+        </p:nvSpPr>
+        <p:spPr>
+          <a:xfrm>
+            <a:off x="1014984" y="3593592"/>
+            <a:ext cx="1091641" cy="868680"/>
+          </a:xfrm>
+          <a:prstGeom prst="rect">
+            <a:avLst/>
+          </a:prstGeom>
+          <a:noFill/>
+          <a:ln/>
+        </p:spPr>
+        <p:txBody>
+          <a:bodyPr wrap="square" lIns="0" tIns="0" rIns="0" bIns="0" rtlCol="0" anchor="t"/>
+          <a:lstStyle/>
+          <a:p>
+            <a:pPr indent="0" marL="0">
+              <a:lnSpc>
+                <a:spcPct val="96000"/>
+              </a:lnSpc>
+              <a:buNone/>
+            </a:pPr>
+            <a:r>
+              <a:rPr lang="en-US" sz="1300" b="1" dirty="0">
+                <a:solidFill>
+                  <a:srgbClr val="111111"/>
+                </a:solidFill>
+                <a:latin typeface="Cambria" pitchFamily="34" charset="0"/>
+                <a:ea typeface="Cambria" pitchFamily="34" charset="-122"/>
+                <a:cs typeface="Cambria" pitchFamily="34" charset="-120"/>
+              </a:rPr>
+              <a:t>Field sensors</a:t>
+            </a:r>
+            <a:endParaRPr lang="en-US" sz="1300" dirty="0"/>
+          </a:p>
+        </p:txBody>
+      </p:sp>
+      <p:sp>
+        <p:nvSpPr>
+          <p:cNvPr id="9" name="Text 7"/>
+          <p:cNvSpPr/>
+          <p:nvPr/>
+        </p:nvSpPr>
+        <p:spPr>
+          <a:xfrm>
+            <a:off x="1014984" y="4453128"/>
+            <a:ext cx="1091641" cy="365760"/>
+          </a:xfrm>
+          <a:prstGeom prst="rect">
+            <a:avLst/>
+          </a:prstGeom>
+          <a:noFill/>
+          <a:ln/>
+        </p:spPr>
+        <p:txBody>
+          <a:bodyPr wrap="square" lIns="0" tIns="0" rIns="0" bIns="0" rtlCol="0" anchor="ctr"/>
+          <a:lstStyle/>
+          <a:p>
+            <a:pPr indent="0" marL="0">
+              <a:buNone/>
+            </a:pPr>
+            <a:r>
+              <a:rPr lang="en-US" sz="900" dirty="0">
+                <a:solidFill>
+                  <a:srgbClr val="111111"/>
                 </a:solidFill>
                 <a:latin typeface="Calibri" pitchFamily="34" charset="0"/>
                 <a:ea typeface="Calibri" pitchFamily="34" charset="-122"/>
                 <a:cs typeface="Calibri" pitchFamily="34" charset="-120"/>
               </a:rPr>
-              <a:t>Field sensors</a:t>
-            </a:r>
-            <a:endParaRPr lang="en-US" sz="1350" dirty="0"/>
-          </a:p>
-        </p:txBody>
-      </p:sp>
-      <p:sp>
-        <p:nvSpPr>
-          <p:cNvPr id="6" name="Text 4"/>
-          <p:cNvSpPr/>
-          <p:nvPr/>
-        </p:nvSpPr>
-        <p:spPr>
-          <a:xfrm>
-            <a:off x="6644488" y="1234440"/>
-            <a:ext cx="1463040" cy="658368"/>
+              <a:t>5 types · 2–4 s</a:t>
+            </a:r>
+            <a:endParaRPr lang="en-US" sz="900" dirty="0"/>
+          </a:p>
+        </p:txBody>
+      </p:sp>
+      <p:sp>
+        <p:nvSpPr>
+          <p:cNvPr id="10" name="Shape 8"/>
+          <p:cNvSpPr/>
+          <p:nvPr/>
+        </p:nvSpPr>
+        <p:spPr>
+          <a:xfrm>
+            <a:off x="2326081" y="3845052"/>
+            <a:ext cx="310896" cy="219456"/>
+          </a:xfrm>
+          <a:prstGeom prst="rightArrow">
+            <a:avLst/>
+          </a:prstGeom>
+          <a:solidFill>
+            <a:srgbClr val="8B98A6"/>
+          </a:solidFill>
+          <a:ln/>
+        </p:spPr>
+      </p:sp>
+      <p:sp>
+        <p:nvSpPr>
+          <p:cNvPr id="11" name="Shape 9"/>
+          <p:cNvSpPr/>
+          <p:nvPr/>
+        </p:nvSpPr>
+        <p:spPr>
+          <a:xfrm>
+            <a:off x="2710129" y="2971800"/>
+            <a:ext cx="1384249" cy="1965960"/>
+          </a:xfrm>
+          <a:prstGeom prst="roundRect">
+            <a:avLst/>
+          </a:prstGeom>
+          <a:solidFill>
+            <a:srgbClr val="FF8A6B"/>
+          </a:solidFill>
+          <a:ln w="12700">
+            <a:solidFill>
+              <a:srgbClr val="FF8A6B"/>
+            </a:solidFill>
+            <a:prstDash val="solid"/>
+          </a:ln>
+        </p:spPr>
+      </p:sp>
+      <p:sp>
+        <p:nvSpPr>
+          <p:cNvPr id="12" name="Text 10"/>
+          <p:cNvSpPr/>
+          <p:nvPr/>
+        </p:nvSpPr>
+        <p:spPr>
+          <a:xfrm>
+            <a:off x="2856433" y="3154680"/>
+            <a:ext cx="1091641" cy="320040"/>
           </a:xfrm>
           <a:prstGeom prst="rect">
             <a:avLst/>
@@ -1605,70 +1665,145 @@
           <a:bodyPr wrap="square" lIns="0" tIns="0" rIns="0" bIns="0" rtlCol="0" anchor="ctr"/>
           <a:lstStyle/>
           <a:p>
-            <a:pPr algn="r" indent="0" marL="0">
-              <a:buNone/>
-            </a:pPr>
-            <a:r>
-              <a:rPr lang="en-US" sz="950" dirty="0">
-                <a:solidFill>
-                  <a:srgbClr val="5C6B60"/>
+            <a:pPr indent="0" marL="0">
+              <a:buNone/>
+            </a:pPr>
+            <a:r>
+              <a:rPr lang="en-US" sz="1100" dirty="0">
+                <a:solidFill>
+                  <a:srgbClr val="111111"/>
+                </a:solidFill>
+                <a:latin typeface="Consolas" pitchFamily="34" charset="0"/>
+                <a:ea typeface="Consolas" pitchFamily="34" charset="-122"/>
+                <a:cs typeface="Consolas" pitchFamily="34" charset="-120"/>
+              </a:rPr>
+              <a:t>02</a:t>
+            </a:r>
+            <a:endParaRPr lang="en-US" sz="1100" dirty="0"/>
+          </a:p>
+        </p:txBody>
+      </p:sp>
+      <p:sp>
+        <p:nvSpPr>
+          <p:cNvPr id="13" name="Text 11"/>
+          <p:cNvSpPr/>
+          <p:nvPr/>
+        </p:nvSpPr>
+        <p:spPr>
+          <a:xfrm>
+            <a:off x="2856433" y="3593592"/>
+            <a:ext cx="1091641" cy="868680"/>
+          </a:xfrm>
+          <a:prstGeom prst="rect">
+            <a:avLst/>
+          </a:prstGeom>
+          <a:noFill/>
+          <a:ln/>
+        </p:spPr>
+        <p:txBody>
+          <a:bodyPr wrap="square" lIns="0" tIns="0" rIns="0" bIns="0" rtlCol="0" anchor="t"/>
+          <a:lstStyle/>
+          <a:p>
+            <a:pPr indent="0" marL="0">
+              <a:lnSpc>
+                <a:spcPct val="96000"/>
+              </a:lnSpc>
+              <a:buNone/>
+            </a:pPr>
+            <a:r>
+              <a:rPr lang="en-US" sz="1300" b="1" dirty="0">
+                <a:solidFill>
+                  <a:srgbClr val="111111"/>
+                </a:solidFill>
+                <a:latin typeface="Cambria" pitchFamily="34" charset="0"/>
+                <a:ea typeface="Cambria" pitchFamily="34" charset="-122"/>
+                <a:cs typeface="Cambria" pitchFamily="34" charset="-120"/>
+              </a:rPr>
+              <a:t>Fog node</a:t>
+            </a:r>
+            <a:endParaRPr lang="en-US" sz="1300" dirty="0"/>
+          </a:p>
+        </p:txBody>
+      </p:sp>
+      <p:sp>
+        <p:nvSpPr>
+          <p:cNvPr id="14" name="Text 12"/>
+          <p:cNvSpPr/>
+          <p:nvPr/>
+        </p:nvSpPr>
+        <p:spPr>
+          <a:xfrm>
+            <a:off x="2856433" y="4453128"/>
+            <a:ext cx="1091641" cy="365760"/>
+          </a:xfrm>
+          <a:prstGeom prst="rect">
+            <a:avLst/>
+          </a:prstGeom>
+          <a:noFill/>
+          <a:ln/>
+        </p:spPr>
+        <p:txBody>
+          <a:bodyPr wrap="square" lIns="0" tIns="0" rIns="0" bIns="0" rtlCol="0" anchor="ctr"/>
+          <a:lstStyle/>
+          <a:p>
+            <a:pPr indent="0" marL="0">
+              <a:buNone/>
+            </a:pPr>
+            <a:r>
+              <a:rPr lang="en-US" sz="900" dirty="0">
+                <a:solidFill>
+                  <a:srgbClr val="111111"/>
                 </a:solidFill>
                 <a:latin typeface="Calibri" pitchFamily="34" charset="0"/>
                 <a:ea typeface="Calibri" pitchFamily="34" charset="-122"/>
                 <a:cs typeface="Calibri" pitchFamily="34" charset="-120"/>
               </a:rPr>
-              <a:t>5 types · 2–4 s</a:t>
-            </a:r>
-            <a:endParaRPr lang="en-US" sz="950" dirty="0"/>
-          </a:p>
-        </p:txBody>
-      </p:sp>
-      <p:sp>
-        <p:nvSpPr>
-          <p:cNvPr id="7" name="Shape 5"/>
-          <p:cNvSpPr/>
-          <p:nvPr/>
-        </p:nvSpPr>
-        <p:spPr>
-          <a:xfrm>
-            <a:off x="6095848" y="1892808"/>
-            <a:ext cx="0" cy="219456"/>
-          </a:xfrm>
-          <a:prstGeom prst="line">
-            <a:avLst/>
-          </a:prstGeom>
-          <a:noFill/>
-          <a:ln w="25400">
+              <a:t>10 s windows · edge alerts</a:t>
+            </a:r>
+            <a:endParaRPr lang="en-US" sz="900" dirty="0"/>
+          </a:p>
+        </p:txBody>
+      </p:sp>
+      <p:sp>
+        <p:nvSpPr>
+          <p:cNvPr id="15" name="Shape 13"/>
+          <p:cNvSpPr/>
+          <p:nvPr/>
+        </p:nvSpPr>
+        <p:spPr>
+          <a:xfrm>
+            <a:off x="4167530" y="3845052"/>
+            <a:ext cx="310896" cy="219456"/>
+          </a:xfrm>
+          <a:prstGeom prst="rightArrow">
+            <a:avLst/>
+          </a:prstGeom>
+          <a:solidFill>
+            <a:srgbClr val="8B98A6"/>
+          </a:solidFill>
+          <a:ln/>
+        </p:spPr>
+      </p:sp>
+      <p:sp>
+        <p:nvSpPr>
+          <p:cNvPr id="16" name="Shape 14"/>
+          <p:cNvSpPr/>
+          <p:nvPr/>
+        </p:nvSpPr>
+        <p:spPr>
+          <a:xfrm>
+            <a:off x="4551578" y="2971800"/>
+            <a:ext cx="1384249" cy="1965960"/>
+          </a:xfrm>
+          <a:prstGeom prst="roundRect">
+            <a:avLst/>
+          </a:prstGeom>
+          <a:solidFill>
+            <a:srgbClr val="222733"/>
+          </a:solidFill>
+          <a:ln w="12700">
             <a:solidFill>
-              <a:srgbClr val="6A994E"/>
-            </a:solidFill>
-            <a:prstDash val="solid"/>
-            <a:tailEnd type="triangle"/>
-          </a:ln>
-        </p:spPr>
-      </p:sp>
-      <p:sp>
-        <p:nvSpPr>
-          <p:cNvPr id="8" name="Shape 6"/>
-          <p:cNvSpPr/>
-          <p:nvPr/>
-        </p:nvSpPr>
-        <p:spPr>
-          <a:xfrm>
-            <a:off x="3992728" y="2112264"/>
-            <a:ext cx="4206240" cy="658368"/>
-          </a:xfrm>
-          <a:prstGeom prst="roundRect">
-            <a:avLst>
-              <a:gd name="adj" fmla="val 11111"/>
-            </a:avLst>
-          </a:prstGeom>
-          <a:solidFill>
-            <a:srgbClr val="EFF4EC"/>
-          </a:solidFill>
-          <a:ln w="17780">
-            <a:solidFill>
-              <a:srgbClr val="6A994E"/>
+              <a:srgbClr val="363B47"/>
             </a:solidFill>
             <a:prstDash val="solid"/>
           </a:ln>
@@ -1676,34 +1811,14 @@
       </p:sp>
       <p:sp>
         <p:nvSpPr>
-          <p:cNvPr id="9" name="Shape 7"/>
-          <p:cNvSpPr/>
-          <p:nvPr/>
-        </p:nvSpPr>
-        <p:spPr>
-          <a:xfrm>
-            <a:off x="4193896" y="2359152"/>
-            <a:ext cx="164592" cy="164592"/>
-          </a:xfrm>
-          <a:prstGeom prst="ellipse">
-            <a:avLst/>
-          </a:prstGeom>
-          <a:solidFill>
-            <a:srgbClr val="6A994E"/>
-          </a:solidFill>
-          <a:ln/>
-        </p:spPr>
-      </p:sp>
-      <p:sp>
-        <p:nvSpPr>
-          <p:cNvPr id="10" name="Text 8"/>
-          <p:cNvSpPr/>
-          <p:nvPr/>
-        </p:nvSpPr>
-        <p:spPr>
-          <a:xfrm>
-            <a:off x="4495648" y="2112264"/>
-            <a:ext cx="2194560" cy="658368"/>
+          <p:cNvPr id="17" name="Text 15"/>
+          <p:cNvSpPr/>
+          <p:nvPr/>
+        </p:nvSpPr>
+        <p:spPr>
+          <a:xfrm>
+            <a:off x="4697882" y="3154680"/>
+            <a:ext cx="1091641" cy="320040"/>
           </a:xfrm>
           <a:prstGeom prst="rect">
             <a:avLst/>
@@ -1719,30 +1834,156 @@
               <a:buNone/>
             </a:pPr>
             <a:r>
-              <a:rPr lang="en-US" sz="1350" b="1" dirty="0">
-                <a:solidFill>
-                  <a:srgbClr val="17231C"/>
+              <a:rPr lang="en-US" sz="1100" dirty="0">
+                <a:solidFill>
+                  <a:srgbClr val="FF8A6B"/>
+                </a:solidFill>
+                <a:latin typeface="Consolas" pitchFamily="34" charset="0"/>
+                <a:ea typeface="Consolas" pitchFamily="34" charset="-122"/>
+                <a:cs typeface="Consolas" pitchFamily="34" charset="-120"/>
+              </a:rPr>
+              <a:t>03</a:t>
+            </a:r>
+            <a:endParaRPr lang="en-US" sz="1100" dirty="0"/>
+          </a:p>
+        </p:txBody>
+      </p:sp>
+      <p:sp>
+        <p:nvSpPr>
+          <p:cNvPr id="18" name="Text 16"/>
+          <p:cNvSpPr/>
+          <p:nvPr/>
+        </p:nvSpPr>
+        <p:spPr>
+          <a:xfrm>
+            <a:off x="4697882" y="3593592"/>
+            <a:ext cx="1091641" cy="868680"/>
+          </a:xfrm>
+          <a:prstGeom prst="rect">
+            <a:avLst/>
+          </a:prstGeom>
+          <a:noFill/>
+          <a:ln/>
+        </p:spPr>
+        <p:txBody>
+          <a:bodyPr wrap="square" lIns="0" tIns="0" rIns="0" bIns="0" rtlCol="0" anchor="t"/>
+          <a:lstStyle/>
+          <a:p>
+            <a:pPr indent="0" marL="0">
+              <a:lnSpc>
+                <a:spcPct val="96000"/>
+              </a:lnSpc>
+              <a:buNone/>
+            </a:pPr>
+            <a:r>
+              <a:rPr lang="en-US" sz="1300" b="1" dirty="0">
+                <a:solidFill>
+                  <a:srgbClr val="EEF2F6"/>
+                </a:solidFill>
+                <a:latin typeface="Cambria" pitchFamily="34" charset="0"/>
+                <a:ea typeface="Cambria" pitchFamily="34" charset="-122"/>
+                <a:cs typeface="Cambria" pitchFamily="34" charset="-120"/>
+              </a:rPr>
+              <a:t>Amazon SQS</a:t>
+            </a:r>
+            <a:endParaRPr lang="en-US" sz="1300" dirty="0"/>
+          </a:p>
+        </p:txBody>
+      </p:sp>
+      <p:sp>
+        <p:nvSpPr>
+          <p:cNvPr id="19" name="Text 17"/>
+          <p:cNvSpPr/>
+          <p:nvPr/>
+        </p:nvSpPr>
+        <p:spPr>
+          <a:xfrm>
+            <a:off x="4697882" y="4453128"/>
+            <a:ext cx="1091641" cy="365760"/>
+          </a:xfrm>
+          <a:prstGeom prst="rect">
+            <a:avLst/>
+          </a:prstGeom>
+          <a:noFill/>
+          <a:ln/>
+        </p:spPr>
+        <p:txBody>
+          <a:bodyPr wrap="square" lIns="0" tIns="0" rIns="0" bIns="0" rtlCol="0" anchor="ctr"/>
+          <a:lstStyle/>
+          <a:p>
+            <a:pPr indent="0" marL="0">
+              <a:buNone/>
+            </a:pPr>
+            <a:r>
+              <a:rPr lang="en-US" sz="900" dirty="0">
+                <a:solidFill>
+                  <a:srgbClr val="8B98A6"/>
                 </a:solidFill>
                 <a:latin typeface="Calibri" pitchFamily="34" charset="0"/>
                 <a:ea typeface="Calibri" pitchFamily="34" charset="-122"/>
                 <a:cs typeface="Calibri" pitchFamily="34" charset="-120"/>
               </a:rPr>
-              <a:t>Fog node</a:t>
-            </a:r>
-            <a:endParaRPr lang="en-US" sz="1350" dirty="0"/>
-          </a:p>
-        </p:txBody>
-      </p:sp>
-      <p:sp>
-        <p:nvSpPr>
-          <p:cNvPr id="11" name="Text 9"/>
-          <p:cNvSpPr/>
-          <p:nvPr/>
-        </p:nvSpPr>
-        <p:spPr>
-          <a:xfrm>
-            <a:off x="6644488" y="2112264"/>
-            <a:ext cx="1463040" cy="658368"/>
+              <a:t>managed queue</a:t>
+            </a:r>
+            <a:endParaRPr lang="en-US" sz="900" dirty="0"/>
+          </a:p>
+        </p:txBody>
+      </p:sp>
+      <p:sp>
+        <p:nvSpPr>
+          <p:cNvPr id="20" name="Shape 18"/>
+          <p:cNvSpPr/>
+          <p:nvPr/>
+        </p:nvSpPr>
+        <p:spPr>
+          <a:xfrm>
+            <a:off x="6008980" y="3845052"/>
+            <a:ext cx="310896" cy="219456"/>
+          </a:xfrm>
+          <a:prstGeom prst="rightArrow">
+            <a:avLst/>
+          </a:prstGeom>
+          <a:solidFill>
+            <a:srgbClr val="8B98A6"/>
+          </a:solidFill>
+          <a:ln/>
+        </p:spPr>
+      </p:sp>
+      <p:sp>
+        <p:nvSpPr>
+          <p:cNvPr id="21" name="Shape 19"/>
+          <p:cNvSpPr/>
+          <p:nvPr/>
+        </p:nvSpPr>
+        <p:spPr>
+          <a:xfrm>
+            <a:off x="6393028" y="2971800"/>
+            <a:ext cx="1384249" cy="1965960"/>
+          </a:xfrm>
+          <a:prstGeom prst="roundRect">
+            <a:avLst/>
+          </a:prstGeom>
+          <a:solidFill>
+            <a:srgbClr val="222733"/>
+          </a:solidFill>
+          <a:ln w="12700">
+            <a:solidFill>
+              <a:srgbClr val="363B47"/>
+            </a:solidFill>
+            <a:prstDash val="solid"/>
+          </a:ln>
+        </p:spPr>
+      </p:sp>
+      <p:sp>
+        <p:nvSpPr>
+          <p:cNvPr id="22" name="Text 20"/>
+          <p:cNvSpPr/>
+          <p:nvPr/>
+        </p:nvSpPr>
+        <p:spPr>
+          <a:xfrm>
+            <a:off x="6539332" y="3154680"/>
+            <a:ext cx="1091641" cy="320040"/>
           </a:xfrm>
           <a:prstGeom prst="rect">
             <a:avLst/>
@@ -1754,70 +1995,145 @@
           <a:bodyPr wrap="square" lIns="0" tIns="0" rIns="0" bIns="0" rtlCol="0" anchor="ctr"/>
           <a:lstStyle/>
           <a:p>
-            <a:pPr algn="r" indent="0" marL="0">
-              <a:buNone/>
-            </a:pPr>
-            <a:r>
-              <a:rPr lang="en-US" sz="950" dirty="0">
-                <a:solidFill>
-                  <a:srgbClr val="5C6B60"/>
+            <a:pPr indent="0" marL="0">
+              <a:buNone/>
+            </a:pPr>
+            <a:r>
+              <a:rPr lang="en-US" sz="1100" dirty="0">
+                <a:solidFill>
+                  <a:srgbClr val="FF8A6B"/>
+                </a:solidFill>
+                <a:latin typeface="Consolas" pitchFamily="34" charset="0"/>
+                <a:ea typeface="Consolas" pitchFamily="34" charset="-122"/>
+                <a:cs typeface="Consolas" pitchFamily="34" charset="-120"/>
+              </a:rPr>
+              <a:t>04</a:t>
+            </a:r>
+            <a:endParaRPr lang="en-US" sz="1100" dirty="0"/>
+          </a:p>
+        </p:txBody>
+      </p:sp>
+      <p:sp>
+        <p:nvSpPr>
+          <p:cNvPr id="23" name="Text 21"/>
+          <p:cNvSpPr/>
+          <p:nvPr/>
+        </p:nvSpPr>
+        <p:spPr>
+          <a:xfrm>
+            <a:off x="6539332" y="3593592"/>
+            <a:ext cx="1091641" cy="868680"/>
+          </a:xfrm>
+          <a:prstGeom prst="rect">
+            <a:avLst/>
+          </a:prstGeom>
+          <a:noFill/>
+          <a:ln/>
+        </p:spPr>
+        <p:txBody>
+          <a:bodyPr wrap="square" lIns="0" tIns="0" rIns="0" bIns="0" rtlCol="0" anchor="t"/>
+          <a:lstStyle/>
+          <a:p>
+            <a:pPr indent="0" marL="0">
+              <a:lnSpc>
+                <a:spcPct val="96000"/>
+              </a:lnSpc>
+              <a:buNone/>
+            </a:pPr>
+            <a:r>
+              <a:rPr lang="en-US" sz="1300" b="1" dirty="0">
+                <a:solidFill>
+                  <a:srgbClr val="EEF2F6"/>
+                </a:solidFill>
+                <a:latin typeface="Cambria" pitchFamily="34" charset="0"/>
+                <a:ea typeface="Cambria" pitchFamily="34" charset="-122"/>
+                <a:cs typeface="Cambria" pitchFamily="34" charset="-120"/>
+              </a:rPr>
+              <a:t>AWS Lambda</a:t>
+            </a:r>
+            <a:endParaRPr lang="en-US" sz="1300" dirty="0"/>
+          </a:p>
+        </p:txBody>
+      </p:sp>
+      <p:sp>
+        <p:nvSpPr>
+          <p:cNvPr id="24" name="Text 22"/>
+          <p:cNvSpPr/>
+          <p:nvPr/>
+        </p:nvSpPr>
+        <p:spPr>
+          <a:xfrm>
+            <a:off x="6539332" y="4453128"/>
+            <a:ext cx="1091641" cy="365760"/>
+          </a:xfrm>
+          <a:prstGeom prst="rect">
+            <a:avLst/>
+          </a:prstGeom>
+          <a:noFill/>
+          <a:ln/>
+        </p:spPr>
+        <p:txBody>
+          <a:bodyPr wrap="square" lIns="0" tIns="0" rIns="0" bIns="0" rtlCol="0" anchor="ctr"/>
+          <a:lstStyle/>
+          <a:p>
+            <a:pPr indent="0" marL="0">
+              <a:buNone/>
+            </a:pPr>
+            <a:r>
+              <a:rPr lang="en-US" sz="900" dirty="0">
+                <a:solidFill>
+                  <a:srgbClr val="8B98A6"/>
                 </a:solidFill>
                 <a:latin typeface="Calibri" pitchFamily="34" charset="0"/>
                 <a:ea typeface="Calibri" pitchFamily="34" charset="-122"/>
                 <a:cs typeface="Calibri" pitchFamily="34" charset="-120"/>
               </a:rPr>
-              <a:t>10 s windows · edge alerts</a:t>
-            </a:r>
-            <a:endParaRPr lang="en-US" sz="950" dirty="0"/>
-          </a:p>
-        </p:txBody>
-      </p:sp>
-      <p:sp>
-        <p:nvSpPr>
-          <p:cNvPr id="12" name="Shape 10"/>
-          <p:cNvSpPr/>
-          <p:nvPr/>
-        </p:nvSpPr>
-        <p:spPr>
-          <a:xfrm>
-            <a:off x="6095848" y="2770632"/>
-            <a:ext cx="0" cy="219456"/>
-          </a:xfrm>
-          <a:prstGeom prst="line">
-            <a:avLst/>
-          </a:prstGeom>
-          <a:noFill/>
-          <a:ln w="25400">
+              <a:t>python3.12 ingest</a:t>
+            </a:r>
+            <a:endParaRPr lang="en-US" sz="900" dirty="0"/>
+          </a:p>
+        </p:txBody>
+      </p:sp>
+      <p:sp>
+        <p:nvSpPr>
+          <p:cNvPr id="25" name="Shape 23"/>
+          <p:cNvSpPr/>
+          <p:nvPr/>
+        </p:nvSpPr>
+        <p:spPr>
+          <a:xfrm>
+            <a:off x="7850429" y="3845052"/>
+            <a:ext cx="310896" cy="219456"/>
+          </a:xfrm>
+          <a:prstGeom prst="rightArrow">
+            <a:avLst/>
+          </a:prstGeom>
+          <a:solidFill>
+            <a:srgbClr val="8B98A6"/>
+          </a:solidFill>
+          <a:ln/>
+        </p:spPr>
+      </p:sp>
+      <p:sp>
+        <p:nvSpPr>
+          <p:cNvPr id="26" name="Shape 24"/>
+          <p:cNvSpPr/>
+          <p:nvPr/>
+        </p:nvSpPr>
+        <p:spPr>
+          <a:xfrm>
+            <a:off x="8234477" y="2971800"/>
+            <a:ext cx="1384249" cy="1965960"/>
+          </a:xfrm>
+          <a:prstGeom prst="roundRect">
+            <a:avLst/>
+          </a:prstGeom>
+          <a:solidFill>
+            <a:srgbClr val="222733"/>
+          </a:solidFill>
+          <a:ln w="12700">
             <a:solidFill>
-              <a:srgbClr val="6A994E"/>
-            </a:solidFill>
-            <a:prstDash val="solid"/>
-            <a:tailEnd type="triangle"/>
-          </a:ln>
-        </p:spPr>
-      </p:sp>
-      <p:sp>
-        <p:nvSpPr>
-          <p:cNvPr id="13" name="Shape 11"/>
-          <p:cNvSpPr/>
-          <p:nvPr/>
-        </p:nvSpPr>
-        <p:spPr>
-          <a:xfrm>
-            <a:off x="3992728" y="2990088"/>
-            <a:ext cx="4206240" cy="658368"/>
-          </a:xfrm>
-          <a:prstGeom prst="roundRect">
-            <a:avLst>
-              <a:gd name="adj" fmla="val 11111"/>
-            </a:avLst>
-          </a:prstGeom>
-          <a:solidFill>
-            <a:srgbClr val="EFF4EC"/>
-          </a:solidFill>
-          <a:ln w="17780">
-            <a:solidFill>
-              <a:srgbClr val="1F5130"/>
+              <a:srgbClr val="363B47"/>
             </a:solidFill>
             <a:prstDash val="solid"/>
           </a:ln>
@@ -1825,34 +2141,14 @@
       </p:sp>
       <p:sp>
         <p:nvSpPr>
-          <p:cNvPr id="14" name="Shape 12"/>
-          <p:cNvSpPr/>
-          <p:nvPr/>
-        </p:nvSpPr>
-        <p:spPr>
-          <a:xfrm>
-            <a:off x="4193896" y="3236976"/>
-            <a:ext cx="164592" cy="164592"/>
-          </a:xfrm>
-          <a:prstGeom prst="ellipse">
-            <a:avLst/>
-          </a:prstGeom>
-          <a:solidFill>
-            <a:srgbClr val="1F5130"/>
-          </a:solidFill>
-          <a:ln/>
-        </p:spPr>
-      </p:sp>
-      <p:sp>
-        <p:nvSpPr>
-          <p:cNvPr id="15" name="Text 13"/>
-          <p:cNvSpPr/>
-          <p:nvPr/>
-        </p:nvSpPr>
-        <p:spPr>
-          <a:xfrm>
-            <a:off x="4495648" y="2990088"/>
-            <a:ext cx="2194560" cy="658368"/>
+          <p:cNvPr id="27" name="Text 25"/>
+          <p:cNvSpPr/>
+          <p:nvPr/>
+        </p:nvSpPr>
+        <p:spPr>
+          <a:xfrm>
+            <a:off x="8380781" y="3154680"/>
+            <a:ext cx="1091641" cy="320040"/>
           </a:xfrm>
           <a:prstGeom prst="rect">
             <a:avLst/>
@@ -1868,30 +2164,156 @@
               <a:buNone/>
             </a:pPr>
             <a:r>
-              <a:rPr lang="en-US" sz="1350" b="1" dirty="0">
-                <a:solidFill>
-                  <a:srgbClr val="17231C"/>
+              <a:rPr lang="en-US" sz="1100" dirty="0">
+                <a:solidFill>
+                  <a:srgbClr val="FF8A6B"/>
+                </a:solidFill>
+                <a:latin typeface="Consolas" pitchFamily="34" charset="0"/>
+                <a:ea typeface="Consolas" pitchFamily="34" charset="-122"/>
+                <a:cs typeface="Consolas" pitchFamily="34" charset="-120"/>
+              </a:rPr>
+              <a:t>05</a:t>
+            </a:r>
+            <a:endParaRPr lang="en-US" sz="1100" dirty="0"/>
+          </a:p>
+        </p:txBody>
+      </p:sp>
+      <p:sp>
+        <p:nvSpPr>
+          <p:cNvPr id="28" name="Text 26"/>
+          <p:cNvSpPr/>
+          <p:nvPr/>
+        </p:nvSpPr>
+        <p:spPr>
+          <a:xfrm>
+            <a:off x="8380781" y="3593592"/>
+            <a:ext cx="1091641" cy="868680"/>
+          </a:xfrm>
+          <a:prstGeom prst="rect">
+            <a:avLst/>
+          </a:prstGeom>
+          <a:noFill/>
+          <a:ln/>
+        </p:spPr>
+        <p:txBody>
+          <a:bodyPr wrap="square" lIns="0" tIns="0" rIns="0" bIns="0" rtlCol="0" anchor="t"/>
+          <a:lstStyle/>
+          <a:p>
+            <a:pPr indent="0" marL="0">
+              <a:lnSpc>
+                <a:spcPct val="96000"/>
+              </a:lnSpc>
+              <a:buNone/>
+            </a:pPr>
+            <a:r>
+              <a:rPr lang="en-US" sz="1300" b="1" dirty="0">
+                <a:solidFill>
+                  <a:srgbClr val="EEF2F6"/>
+                </a:solidFill>
+                <a:latin typeface="Cambria" pitchFamily="34" charset="0"/>
+                <a:ea typeface="Cambria" pitchFamily="34" charset="-122"/>
+                <a:cs typeface="Cambria" pitchFamily="34" charset="-120"/>
+              </a:rPr>
+              <a:t>DynamoDB</a:t>
+            </a:r>
+            <a:endParaRPr lang="en-US" sz="1300" dirty="0"/>
+          </a:p>
+        </p:txBody>
+      </p:sp>
+      <p:sp>
+        <p:nvSpPr>
+          <p:cNvPr id="29" name="Text 27"/>
+          <p:cNvSpPr/>
+          <p:nvPr/>
+        </p:nvSpPr>
+        <p:spPr>
+          <a:xfrm>
+            <a:off x="8380781" y="4453128"/>
+            <a:ext cx="1091641" cy="365760"/>
+          </a:xfrm>
+          <a:prstGeom prst="rect">
+            <a:avLst/>
+          </a:prstGeom>
+          <a:noFill/>
+          <a:ln/>
+        </p:spPr>
+        <p:txBody>
+          <a:bodyPr wrap="square" lIns="0" tIns="0" rIns="0" bIns="0" rtlCol="0" anchor="ctr"/>
+          <a:lstStyle/>
+          <a:p>
+            <a:pPr indent="0" marL="0">
+              <a:buNone/>
+            </a:pPr>
+            <a:r>
+              <a:rPr lang="en-US" sz="900" dirty="0">
+                <a:solidFill>
+                  <a:srgbClr val="8B98A6"/>
                 </a:solidFill>
                 <a:latin typeface="Calibri" pitchFamily="34" charset="0"/>
                 <a:ea typeface="Calibri" pitchFamily="34" charset="-122"/>
                 <a:cs typeface="Calibri" pitchFamily="34" charset="-120"/>
               </a:rPr>
-              <a:t>Amazon SQS</a:t>
-            </a:r>
-            <a:endParaRPr lang="en-US" sz="1350" dirty="0"/>
-          </a:p>
-        </p:txBody>
-      </p:sp>
-      <p:sp>
-        <p:nvSpPr>
-          <p:cNvPr id="16" name="Text 14"/>
-          <p:cNvSpPr/>
-          <p:nvPr/>
-        </p:nvSpPr>
-        <p:spPr>
-          <a:xfrm>
-            <a:off x="6644488" y="2990088"/>
-            <a:ext cx="1463040" cy="658368"/>
+              <a:t>one record / window</a:t>
+            </a:r>
+            <a:endParaRPr lang="en-US" sz="900" dirty="0"/>
+          </a:p>
+        </p:txBody>
+      </p:sp>
+      <p:sp>
+        <p:nvSpPr>
+          <p:cNvPr id="30" name="Shape 28"/>
+          <p:cNvSpPr/>
+          <p:nvPr/>
+        </p:nvSpPr>
+        <p:spPr>
+          <a:xfrm>
+            <a:off x="9691878" y="3845052"/>
+            <a:ext cx="310896" cy="219456"/>
+          </a:xfrm>
+          <a:prstGeom prst="rightArrow">
+            <a:avLst/>
+          </a:prstGeom>
+          <a:solidFill>
+            <a:srgbClr val="8B98A6"/>
+          </a:solidFill>
+          <a:ln/>
+        </p:spPr>
+      </p:sp>
+      <p:sp>
+        <p:nvSpPr>
+          <p:cNvPr id="31" name="Shape 29"/>
+          <p:cNvSpPr/>
+          <p:nvPr/>
+        </p:nvSpPr>
+        <p:spPr>
+          <a:xfrm>
+            <a:off x="10075926" y="2971800"/>
+            <a:ext cx="1384249" cy="1965960"/>
+          </a:xfrm>
+          <a:prstGeom prst="roundRect">
+            <a:avLst/>
+          </a:prstGeom>
+          <a:solidFill>
+            <a:srgbClr val="222733"/>
+          </a:solidFill>
+          <a:ln w="12700">
+            <a:solidFill>
+              <a:srgbClr val="363B47"/>
+            </a:solidFill>
+            <a:prstDash val="solid"/>
+          </a:ln>
+        </p:spPr>
+      </p:sp>
+      <p:sp>
+        <p:nvSpPr>
+          <p:cNvPr id="32" name="Text 30"/>
+          <p:cNvSpPr/>
+          <p:nvPr/>
+        </p:nvSpPr>
+        <p:spPr>
+          <a:xfrm>
+            <a:off x="10222230" y="3154680"/>
+            <a:ext cx="1091641" cy="320040"/>
           </a:xfrm>
           <a:prstGeom prst="rect">
             <a:avLst/>
@@ -1903,585 +2325,102 @@
           <a:bodyPr wrap="square" lIns="0" tIns="0" rIns="0" bIns="0" rtlCol="0" anchor="ctr"/>
           <a:lstStyle/>
           <a:p>
-            <a:pPr algn="r" indent="0" marL="0">
-              <a:buNone/>
-            </a:pPr>
-            <a:r>
-              <a:rPr lang="en-US" sz="950" dirty="0">
-                <a:solidFill>
-                  <a:srgbClr val="5C6B60"/>
+            <a:pPr indent="0" marL="0">
+              <a:buNone/>
+            </a:pPr>
+            <a:r>
+              <a:rPr lang="en-US" sz="1100" dirty="0">
+                <a:solidFill>
+                  <a:srgbClr val="FF8A6B"/>
+                </a:solidFill>
+                <a:latin typeface="Consolas" pitchFamily="34" charset="0"/>
+                <a:ea typeface="Consolas" pitchFamily="34" charset="-122"/>
+                <a:cs typeface="Consolas" pitchFamily="34" charset="-120"/>
+              </a:rPr>
+              <a:t>06</a:t>
+            </a:r>
+            <a:endParaRPr lang="en-US" sz="1100" dirty="0"/>
+          </a:p>
+        </p:txBody>
+      </p:sp>
+      <p:sp>
+        <p:nvSpPr>
+          <p:cNvPr id="33" name="Text 31"/>
+          <p:cNvSpPr/>
+          <p:nvPr/>
+        </p:nvSpPr>
+        <p:spPr>
+          <a:xfrm>
+            <a:off x="10222230" y="3593592"/>
+            <a:ext cx="1091641" cy="868680"/>
+          </a:xfrm>
+          <a:prstGeom prst="rect">
+            <a:avLst/>
+          </a:prstGeom>
+          <a:noFill/>
+          <a:ln/>
+        </p:spPr>
+        <p:txBody>
+          <a:bodyPr wrap="square" lIns="0" tIns="0" rIns="0" bIns="0" rtlCol="0" anchor="t"/>
+          <a:lstStyle/>
+          <a:p>
+            <a:pPr indent="0" marL="0">
+              <a:lnSpc>
+                <a:spcPct val="96000"/>
+              </a:lnSpc>
+              <a:buNone/>
+            </a:pPr>
+            <a:r>
+              <a:rPr lang="en-US" sz="1300" b="1" dirty="0">
+                <a:solidFill>
+                  <a:srgbClr val="EEF2F6"/>
+                </a:solidFill>
+                <a:latin typeface="Cambria" pitchFamily="34" charset="0"/>
+                <a:ea typeface="Cambria" pitchFamily="34" charset="-122"/>
+                <a:cs typeface="Cambria" pitchFamily="34" charset="-120"/>
+              </a:rPr>
+              <a:t>API GW + S3</a:t>
+            </a:r>
+            <a:endParaRPr lang="en-US" sz="1300" dirty="0"/>
+          </a:p>
+        </p:txBody>
+      </p:sp>
+      <p:sp>
+        <p:nvSpPr>
+          <p:cNvPr id="34" name="Text 32"/>
+          <p:cNvSpPr/>
+          <p:nvPr/>
+        </p:nvSpPr>
+        <p:spPr>
+          <a:xfrm>
+            <a:off x="10222230" y="4453128"/>
+            <a:ext cx="1091641" cy="365760"/>
+          </a:xfrm>
+          <a:prstGeom prst="rect">
+            <a:avLst/>
+          </a:prstGeom>
+          <a:noFill/>
+          <a:ln/>
+        </p:spPr>
+        <p:txBody>
+          <a:bodyPr wrap="square" lIns="0" tIns="0" rIns="0" bIns="0" rtlCol="0" anchor="ctr"/>
+          <a:lstStyle/>
+          <a:p>
+            <a:pPr indent="0" marL="0">
+              <a:buNone/>
+            </a:pPr>
+            <a:r>
+              <a:rPr lang="en-US" sz="900" dirty="0">
+                <a:solidFill>
+                  <a:srgbClr val="8B98A6"/>
                 </a:solidFill>
                 <a:latin typeface="Calibri" pitchFamily="34" charset="0"/>
                 <a:ea typeface="Calibri" pitchFamily="34" charset="-122"/>
                 <a:cs typeface="Calibri" pitchFamily="34" charset="-120"/>
               </a:rPr>
-              <a:t>managed queue</a:t>
-            </a:r>
-            <a:endParaRPr lang="en-US" sz="950" dirty="0"/>
-          </a:p>
-        </p:txBody>
-      </p:sp>
-      <p:sp>
-        <p:nvSpPr>
-          <p:cNvPr id="17" name="Shape 15"/>
-          <p:cNvSpPr/>
-          <p:nvPr/>
-        </p:nvSpPr>
-        <p:spPr>
-          <a:xfrm>
-            <a:off x="6095848" y="3648456"/>
-            <a:ext cx="0" cy="219456"/>
-          </a:xfrm>
-          <a:prstGeom prst="line">
-            <a:avLst/>
-          </a:prstGeom>
-          <a:noFill/>
-          <a:ln w="25400">
-            <a:solidFill>
-              <a:srgbClr val="6A994E"/>
-            </a:solidFill>
-            <a:prstDash val="solid"/>
-            <a:tailEnd type="triangle"/>
-          </a:ln>
-        </p:spPr>
-      </p:sp>
-      <p:sp>
-        <p:nvSpPr>
-          <p:cNvPr id="18" name="Shape 16"/>
-          <p:cNvSpPr/>
-          <p:nvPr/>
-        </p:nvSpPr>
-        <p:spPr>
-          <a:xfrm>
-            <a:off x="3992728" y="3867912"/>
-            <a:ext cx="4206240" cy="658368"/>
-          </a:xfrm>
-          <a:prstGeom prst="roundRect">
-            <a:avLst>
-              <a:gd name="adj" fmla="val 11111"/>
-            </a:avLst>
-          </a:prstGeom>
-          <a:solidFill>
-            <a:srgbClr val="EFF4EC"/>
-          </a:solidFill>
-          <a:ln w="17780">
-            <a:solidFill>
-              <a:srgbClr val="1F5130"/>
-            </a:solidFill>
-            <a:prstDash val="solid"/>
-          </a:ln>
-        </p:spPr>
-      </p:sp>
-      <p:sp>
-        <p:nvSpPr>
-          <p:cNvPr id="19" name="Shape 17"/>
-          <p:cNvSpPr/>
-          <p:nvPr/>
-        </p:nvSpPr>
-        <p:spPr>
-          <a:xfrm>
-            <a:off x="4193896" y="4114800"/>
-            <a:ext cx="164592" cy="164592"/>
-          </a:xfrm>
-          <a:prstGeom prst="ellipse">
-            <a:avLst/>
-          </a:prstGeom>
-          <a:solidFill>
-            <a:srgbClr val="1F5130"/>
-          </a:solidFill>
-          <a:ln/>
-        </p:spPr>
-      </p:sp>
-      <p:sp>
-        <p:nvSpPr>
-          <p:cNvPr id="20" name="Text 18"/>
-          <p:cNvSpPr/>
-          <p:nvPr/>
-        </p:nvSpPr>
-        <p:spPr>
-          <a:xfrm>
-            <a:off x="4495648" y="3867912"/>
-            <a:ext cx="2194560" cy="658368"/>
-          </a:xfrm>
-          <a:prstGeom prst="rect">
-            <a:avLst/>
-          </a:prstGeom>
-          <a:noFill/>
-          <a:ln/>
-        </p:spPr>
-        <p:txBody>
-          <a:bodyPr wrap="square" lIns="0" tIns="0" rIns="0" bIns="0" rtlCol="0" anchor="ctr"/>
-          <a:lstStyle/>
-          <a:p>
-            <a:pPr indent="0" marL="0">
-              <a:buNone/>
-            </a:pPr>
-            <a:r>
-              <a:rPr lang="en-US" sz="1350" b="1" dirty="0">
-                <a:solidFill>
-                  <a:srgbClr val="17231C"/>
-                </a:solidFill>
-                <a:latin typeface="Calibri" pitchFamily="34" charset="0"/>
-                <a:ea typeface="Calibri" pitchFamily="34" charset="-122"/>
-                <a:cs typeface="Calibri" pitchFamily="34" charset="-120"/>
-              </a:rPr>
-              <a:t>AWS Lambda</a:t>
-            </a:r>
-            <a:endParaRPr lang="en-US" sz="1350" dirty="0"/>
-          </a:p>
-        </p:txBody>
-      </p:sp>
-      <p:sp>
-        <p:nvSpPr>
-          <p:cNvPr id="21" name="Text 19"/>
-          <p:cNvSpPr/>
-          <p:nvPr/>
-        </p:nvSpPr>
-        <p:spPr>
-          <a:xfrm>
-            <a:off x="6644488" y="3867912"/>
-            <a:ext cx="1463040" cy="658368"/>
-          </a:xfrm>
-          <a:prstGeom prst="rect">
-            <a:avLst/>
-          </a:prstGeom>
-          <a:noFill/>
-          <a:ln/>
-        </p:spPr>
-        <p:txBody>
-          <a:bodyPr wrap="square" lIns="0" tIns="0" rIns="0" bIns="0" rtlCol="0" anchor="ctr"/>
-          <a:lstStyle/>
-          <a:p>
-            <a:pPr algn="r" indent="0" marL="0">
-              <a:buNone/>
-            </a:pPr>
-            <a:r>
-              <a:rPr lang="en-US" sz="950" dirty="0">
-                <a:solidFill>
-                  <a:srgbClr val="5C6B60"/>
-                </a:solidFill>
-                <a:latin typeface="Calibri" pitchFamily="34" charset="0"/>
-                <a:ea typeface="Calibri" pitchFamily="34" charset="-122"/>
-                <a:cs typeface="Calibri" pitchFamily="34" charset="-120"/>
-              </a:rPr>
-              <a:t>python3.12 ingest</a:t>
-            </a:r>
-            <a:endParaRPr lang="en-US" sz="950" dirty="0"/>
-          </a:p>
-        </p:txBody>
-      </p:sp>
-      <p:sp>
-        <p:nvSpPr>
-          <p:cNvPr id="22" name="Shape 20"/>
-          <p:cNvSpPr/>
-          <p:nvPr/>
-        </p:nvSpPr>
-        <p:spPr>
-          <a:xfrm>
-            <a:off x="6095848" y="4526280"/>
-            <a:ext cx="0" cy="219456"/>
-          </a:xfrm>
-          <a:prstGeom prst="line">
-            <a:avLst/>
-          </a:prstGeom>
-          <a:noFill/>
-          <a:ln w="25400">
-            <a:solidFill>
-              <a:srgbClr val="6A994E"/>
-            </a:solidFill>
-            <a:prstDash val="solid"/>
-            <a:tailEnd type="triangle"/>
-          </a:ln>
-        </p:spPr>
-      </p:sp>
-      <p:sp>
-        <p:nvSpPr>
-          <p:cNvPr id="23" name="Shape 21"/>
-          <p:cNvSpPr/>
-          <p:nvPr/>
-        </p:nvSpPr>
-        <p:spPr>
-          <a:xfrm>
-            <a:off x="3992728" y="4745736"/>
-            <a:ext cx="4206240" cy="658368"/>
-          </a:xfrm>
-          <a:prstGeom prst="roundRect">
-            <a:avLst>
-              <a:gd name="adj" fmla="val 11111"/>
-            </a:avLst>
-          </a:prstGeom>
-          <a:solidFill>
-            <a:srgbClr val="EFF4EC"/>
-          </a:solidFill>
-          <a:ln w="17780">
-            <a:solidFill>
-              <a:srgbClr val="1F5130"/>
-            </a:solidFill>
-            <a:prstDash val="solid"/>
-          </a:ln>
-        </p:spPr>
-      </p:sp>
-      <p:sp>
-        <p:nvSpPr>
-          <p:cNvPr id="24" name="Shape 22"/>
-          <p:cNvSpPr/>
-          <p:nvPr/>
-        </p:nvSpPr>
-        <p:spPr>
-          <a:xfrm>
-            <a:off x="4193896" y="4992624"/>
-            <a:ext cx="164592" cy="164592"/>
-          </a:xfrm>
-          <a:prstGeom prst="ellipse">
-            <a:avLst/>
-          </a:prstGeom>
-          <a:solidFill>
-            <a:srgbClr val="1F5130"/>
-          </a:solidFill>
-          <a:ln/>
-        </p:spPr>
-      </p:sp>
-      <p:sp>
-        <p:nvSpPr>
-          <p:cNvPr id="25" name="Text 23"/>
-          <p:cNvSpPr/>
-          <p:nvPr/>
-        </p:nvSpPr>
-        <p:spPr>
-          <a:xfrm>
-            <a:off x="4495648" y="4745736"/>
-            <a:ext cx="2194560" cy="658368"/>
-          </a:xfrm>
-          <a:prstGeom prst="rect">
-            <a:avLst/>
-          </a:prstGeom>
-          <a:noFill/>
-          <a:ln/>
-        </p:spPr>
-        <p:txBody>
-          <a:bodyPr wrap="square" lIns="0" tIns="0" rIns="0" bIns="0" rtlCol="0" anchor="ctr"/>
-          <a:lstStyle/>
-          <a:p>
-            <a:pPr indent="0" marL="0">
-              <a:buNone/>
-            </a:pPr>
-            <a:r>
-              <a:rPr lang="en-US" sz="1350" b="1" dirty="0">
-                <a:solidFill>
-                  <a:srgbClr val="17231C"/>
-                </a:solidFill>
-                <a:latin typeface="Calibri" pitchFamily="34" charset="0"/>
-                <a:ea typeface="Calibri" pitchFamily="34" charset="-122"/>
-                <a:cs typeface="Calibri" pitchFamily="34" charset="-120"/>
-              </a:rPr>
-              <a:t>DynamoDB</a:t>
-            </a:r>
-            <a:endParaRPr lang="en-US" sz="1350" dirty="0"/>
-          </a:p>
-        </p:txBody>
-      </p:sp>
-      <p:sp>
-        <p:nvSpPr>
-          <p:cNvPr id="26" name="Text 24"/>
-          <p:cNvSpPr/>
-          <p:nvPr/>
-        </p:nvSpPr>
-        <p:spPr>
-          <a:xfrm>
-            <a:off x="6644488" y="4745736"/>
-            <a:ext cx="1463040" cy="658368"/>
-          </a:xfrm>
-          <a:prstGeom prst="rect">
-            <a:avLst/>
-          </a:prstGeom>
-          <a:noFill/>
-          <a:ln/>
-        </p:spPr>
-        <p:txBody>
-          <a:bodyPr wrap="square" lIns="0" tIns="0" rIns="0" bIns="0" rtlCol="0" anchor="ctr"/>
-          <a:lstStyle/>
-          <a:p>
-            <a:pPr algn="r" indent="0" marL="0">
-              <a:buNone/>
-            </a:pPr>
-            <a:r>
-              <a:rPr lang="en-US" sz="950" dirty="0">
-                <a:solidFill>
-                  <a:srgbClr val="5C6B60"/>
-                </a:solidFill>
-                <a:latin typeface="Calibri" pitchFamily="34" charset="0"/>
-                <a:ea typeface="Calibri" pitchFamily="34" charset="-122"/>
-                <a:cs typeface="Calibri" pitchFamily="34" charset="-120"/>
-              </a:rPr>
-              <a:t>one record / window</a:t>
-            </a:r>
-            <a:endParaRPr lang="en-US" sz="950" dirty="0"/>
-          </a:p>
-        </p:txBody>
-      </p:sp>
-      <p:sp>
-        <p:nvSpPr>
-          <p:cNvPr id="27" name="Shape 25"/>
-          <p:cNvSpPr/>
-          <p:nvPr/>
-        </p:nvSpPr>
-        <p:spPr>
-          <a:xfrm>
-            <a:off x="6095848" y="5404104"/>
-            <a:ext cx="0" cy="219456"/>
-          </a:xfrm>
-          <a:prstGeom prst="line">
-            <a:avLst/>
-          </a:prstGeom>
-          <a:noFill/>
-          <a:ln w="25400">
-            <a:solidFill>
-              <a:srgbClr val="6A994E"/>
-            </a:solidFill>
-            <a:prstDash val="solid"/>
-            <a:tailEnd type="triangle"/>
-          </a:ln>
-        </p:spPr>
-      </p:sp>
-      <p:sp>
-        <p:nvSpPr>
-          <p:cNvPr id="28" name="Shape 26"/>
-          <p:cNvSpPr/>
-          <p:nvPr/>
-        </p:nvSpPr>
-        <p:spPr>
-          <a:xfrm>
-            <a:off x="3992728" y="5623560"/>
-            <a:ext cx="4206240" cy="658368"/>
-          </a:xfrm>
-          <a:prstGeom prst="roundRect">
-            <a:avLst>
-              <a:gd name="adj" fmla="val 11111"/>
-            </a:avLst>
-          </a:prstGeom>
-          <a:solidFill>
-            <a:srgbClr val="EFF4EC"/>
-          </a:solidFill>
-          <a:ln w="17780">
-            <a:solidFill>
-              <a:srgbClr val="2E7D46"/>
-            </a:solidFill>
-            <a:prstDash val="solid"/>
-          </a:ln>
-        </p:spPr>
-      </p:sp>
-      <p:sp>
-        <p:nvSpPr>
-          <p:cNvPr id="29" name="Shape 27"/>
-          <p:cNvSpPr/>
-          <p:nvPr/>
-        </p:nvSpPr>
-        <p:spPr>
-          <a:xfrm>
-            <a:off x="4193896" y="5870448"/>
-            <a:ext cx="164592" cy="164592"/>
-          </a:xfrm>
-          <a:prstGeom prst="ellipse">
-            <a:avLst/>
-          </a:prstGeom>
-          <a:solidFill>
-            <a:srgbClr val="2E7D46"/>
-          </a:solidFill>
-          <a:ln/>
-        </p:spPr>
-      </p:sp>
-      <p:sp>
-        <p:nvSpPr>
-          <p:cNvPr id="30" name="Text 28"/>
-          <p:cNvSpPr/>
-          <p:nvPr/>
-        </p:nvSpPr>
-        <p:spPr>
-          <a:xfrm>
-            <a:off x="4495648" y="5623560"/>
-            <a:ext cx="2194560" cy="658368"/>
-          </a:xfrm>
-          <a:prstGeom prst="rect">
-            <a:avLst/>
-          </a:prstGeom>
-          <a:noFill/>
-          <a:ln/>
-        </p:spPr>
-        <p:txBody>
-          <a:bodyPr wrap="square" lIns="0" tIns="0" rIns="0" bIns="0" rtlCol="0" anchor="ctr"/>
-          <a:lstStyle/>
-          <a:p>
-            <a:pPr indent="0" marL="0">
-              <a:buNone/>
-            </a:pPr>
-            <a:r>
-              <a:rPr lang="en-US" sz="1350" b="1" dirty="0">
-                <a:solidFill>
-                  <a:srgbClr val="17231C"/>
-                </a:solidFill>
-                <a:latin typeface="Calibri" pitchFamily="34" charset="0"/>
-                <a:ea typeface="Calibri" pitchFamily="34" charset="-122"/>
-                <a:cs typeface="Calibri" pitchFamily="34" charset="-120"/>
-              </a:rPr>
-              <a:t>API GW + S3</a:t>
-            </a:r>
-            <a:endParaRPr lang="en-US" sz="1350" dirty="0"/>
-          </a:p>
-        </p:txBody>
-      </p:sp>
-      <p:sp>
-        <p:nvSpPr>
-          <p:cNvPr id="31" name="Text 29"/>
-          <p:cNvSpPr/>
-          <p:nvPr/>
-        </p:nvSpPr>
-        <p:spPr>
-          <a:xfrm>
-            <a:off x="6644488" y="5623560"/>
-            <a:ext cx="1463040" cy="658368"/>
-          </a:xfrm>
-          <a:prstGeom prst="rect">
-            <a:avLst/>
-          </a:prstGeom>
-          <a:noFill/>
-          <a:ln/>
-        </p:spPr>
-        <p:txBody>
-          <a:bodyPr wrap="square" lIns="0" tIns="0" rIns="0" bIns="0" rtlCol="0" anchor="ctr"/>
-          <a:lstStyle/>
-          <a:p>
-            <a:pPr algn="r" indent="0" marL="0">
-              <a:buNone/>
-            </a:pPr>
-            <a:r>
-              <a:rPr lang="en-US" sz="950" dirty="0">
-                <a:solidFill>
-                  <a:srgbClr val="5C6B60"/>
-                </a:solidFill>
-                <a:latin typeface="Calibri" pitchFamily="34" charset="0"/>
-                <a:ea typeface="Calibri" pitchFamily="34" charset="-122"/>
-                <a:cs typeface="Calibri" pitchFamily="34" charset="-120"/>
-              </a:rPr>
               <a:t>live dashboard</a:t>
             </a:r>
-            <a:endParaRPr lang="en-US" sz="950" dirty="0"/>
-          </a:p>
-        </p:txBody>
-      </p:sp>
-      <p:sp>
-        <p:nvSpPr>
-          <p:cNvPr id="32" name="Text 30"/>
-          <p:cNvSpPr/>
-          <p:nvPr/>
-        </p:nvSpPr>
-        <p:spPr>
-          <a:xfrm>
-            <a:off x="2438248" y="1234440"/>
-            <a:ext cx="1371600" cy="365760"/>
-          </a:xfrm>
-          <a:prstGeom prst="rect">
-            <a:avLst/>
-          </a:prstGeom>
-          <a:noFill/>
-          <a:ln/>
-        </p:spPr>
-        <p:txBody>
-          <a:bodyPr wrap="square" rtlCol="0" anchor="ctr"/>
-          <a:lstStyle/>
-          <a:p>
-            <a:pPr algn="r" indent="0" marL="0">
-              <a:buNone/>
-            </a:pPr>
-            <a:r>
-              <a:rPr lang="en-US" sz="1100" b="1" spc="200" kern="0" dirty="0">
-                <a:solidFill>
-                  <a:srgbClr val="6A994E"/>
-                </a:solidFill>
-                <a:latin typeface="Calibri" pitchFamily="34" charset="0"/>
-                <a:ea typeface="Calibri" pitchFamily="34" charset="-122"/>
-                <a:cs typeface="Calibri" pitchFamily="34" charset="-120"/>
-              </a:rPr>
-              <a:t>EDGE</a:t>
-            </a:r>
-            <a:endParaRPr lang="en-US" sz="1100" dirty="0"/>
-          </a:p>
-        </p:txBody>
-      </p:sp>
-      <p:sp>
-        <p:nvSpPr>
-          <p:cNvPr id="33" name="Text 31"/>
-          <p:cNvSpPr/>
-          <p:nvPr/>
-        </p:nvSpPr>
-        <p:spPr>
-          <a:xfrm>
-            <a:off x="2438248" y="2990088"/>
-            <a:ext cx="1371600" cy="365760"/>
-          </a:xfrm>
-          <a:prstGeom prst="rect">
-            <a:avLst/>
-          </a:prstGeom>
-          <a:noFill/>
-          <a:ln/>
-        </p:spPr>
-        <p:txBody>
-          <a:bodyPr wrap="square" rtlCol="0" anchor="ctr"/>
-          <a:lstStyle/>
-          <a:p>
-            <a:pPr algn="r" indent="0" marL="0">
-              <a:buNone/>
-            </a:pPr>
-            <a:r>
-              <a:rPr lang="en-US" sz="1100" b="1" spc="200" kern="0" dirty="0">
-                <a:solidFill>
-                  <a:srgbClr val="1F5130"/>
-                </a:solidFill>
-                <a:latin typeface="Calibri" pitchFamily="34" charset="0"/>
-                <a:ea typeface="Calibri" pitchFamily="34" charset="-122"/>
-                <a:cs typeface="Calibri" pitchFamily="34" charset="-120"/>
-              </a:rPr>
-              <a:t>CLOUD</a:t>
-            </a:r>
-            <a:endParaRPr lang="en-US" sz="1100" dirty="0"/>
-          </a:p>
-        </p:txBody>
-      </p:sp>
-      <p:sp>
-        <p:nvSpPr>
-          <p:cNvPr id="34" name="Text 32"/>
-          <p:cNvSpPr/>
-          <p:nvPr/>
-        </p:nvSpPr>
-        <p:spPr>
-          <a:xfrm>
-            <a:off x="8656168" y="2743200"/>
-            <a:ext cx="3291840" cy="2194560"/>
-          </a:xfrm>
-          <a:prstGeom prst="rect">
-            <a:avLst/>
-          </a:prstGeom>
-          <a:noFill/>
-          <a:ln/>
-        </p:spPr>
-        <p:txBody>
-          <a:bodyPr wrap="square" rtlCol="0" anchor="ctr"/>
-          <a:lstStyle/>
-          <a:p>
-            <a:pPr indent="0" marL="0">
-              <a:buNone/>
-            </a:pPr>
-            <a:r>
-              <a:rPr lang="en-US" sz="1500" i="1" dirty="0">
-                <a:solidFill>
-                  <a:srgbClr val="1F5130"/>
-                </a:solidFill>
-                <a:latin typeface="Calibri" pitchFamily="34" charset="0"/>
-                <a:ea typeface="Calibri" pitchFamily="34" charset="-122"/>
-                <a:cs typeface="Calibri" pitchFamily="34" charset="-120"/>
-              </a:rPr>
-              <a:t>Raw readings never leave the edge — only compact 10-second window summaries cross into the cloud.</a:t>
-            </a:r>
-            <a:endParaRPr lang="en-US" sz="1500" dirty="0"/>
+            <a:endParaRPr lang="en-US" sz="900" dirty="0"/>
           </a:p>
         </p:txBody>
       </p:sp>
@@ -2499,7 +2438,7 @@
     <p:bg>
       <p:bgPr>
         <a:solidFill>
-          <a:srgbClr val="FFFFFF"/>
+          <a:srgbClr val="262C38"/>
         </a:solidFill>
       </p:bgPr>
     </p:bg>
@@ -2519,23 +2458,43 @@
       </p:grpSpPr>
       <p:sp>
         <p:nvSpPr>
-          <p:cNvPr id="2" name="Text 0"/>
-          <p:cNvSpPr/>
-          <p:nvPr/>
-        </p:nvSpPr>
-        <p:spPr>
-          <a:xfrm>
-            <a:off x="640080" y="457200"/>
-            <a:ext cx="7315200" cy="640080"/>
-          </a:xfrm>
-          <a:prstGeom prst="rect">
-            <a:avLst/>
-          </a:prstGeom>
-          <a:noFill/>
-          <a:ln/>
-        </p:spPr>
-        <p:txBody>
-          <a:bodyPr wrap="square" rtlCol="0" anchor="ctr"/>
+          <p:cNvPr id="2" name="Shape 0"/>
+          <p:cNvSpPr/>
+          <p:nvPr/>
+        </p:nvSpPr>
+        <p:spPr>
+          <a:xfrm>
+            <a:off x="0" y="0"/>
+            <a:ext cx="146304" cy="6858000"/>
+          </a:xfrm>
+          <a:prstGeom prst="rect">
+            <a:avLst/>
+          </a:prstGeom>
+          <a:solidFill>
+            <a:srgbClr val="FF8A6B"/>
+          </a:solidFill>
+          <a:ln/>
+        </p:spPr>
+      </p:sp>
+      <p:sp>
+        <p:nvSpPr>
+          <p:cNvPr id="3" name="Text 1"/>
+          <p:cNvSpPr/>
+          <p:nvPr/>
+        </p:nvSpPr>
+        <p:spPr>
+          <a:xfrm>
+            <a:off x="868680" y="731520"/>
+            <a:ext cx="914400" cy="640080"/>
+          </a:xfrm>
+          <a:prstGeom prst="rect">
+            <a:avLst/>
+          </a:prstGeom>
+          <a:noFill/>
+          <a:ln/>
+        </p:spPr>
+        <p:txBody>
+          <a:bodyPr wrap="square" lIns="0" tIns="0" rIns="0" bIns="0" rtlCol="0" anchor="ctr"/>
           <a:lstStyle/>
           <a:p>
             <a:pPr indent="0" marL="0">
@@ -2544,13 +2503,13 @@
             <a:r>
               <a:rPr lang="en-US" sz="3000" b="1" dirty="0">
                 <a:solidFill>
-                  <a:srgbClr val="17231C"/>
+                  <a:srgbClr val="FF8A6B"/>
                 </a:solidFill>
                 <a:latin typeface="Cambria" pitchFamily="34" charset="0"/>
                 <a:ea typeface="Cambria" pitchFamily="34" charset="-122"/>
                 <a:cs typeface="Cambria" pitchFamily="34" charset="-120"/>
               </a:rPr>
-              <a:t>Live Demo</a:t>
+              <a:t>02</a:t>
             </a:r>
             <a:endParaRPr lang="en-US" sz="3000" dirty="0"/>
           </a:p>
@@ -2558,14 +2517,92 @@
       </p:sp>
       <p:sp>
         <p:nvSpPr>
-          <p:cNvPr id="3" name="Text 1"/>
-          <p:cNvSpPr/>
-          <p:nvPr/>
-        </p:nvSpPr>
-        <p:spPr>
-          <a:xfrm>
-            <a:off x="658368" y="1143000"/>
-            <a:ext cx="10972800" cy="365760"/>
+          <p:cNvPr id="4" name="Text 2"/>
+          <p:cNvSpPr/>
+          <p:nvPr/>
+        </p:nvSpPr>
+        <p:spPr>
+          <a:xfrm>
+            <a:off x="1737360" y="905256"/>
+            <a:ext cx="9722815" cy="274320"/>
+          </a:xfrm>
+          <a:prstGeom prst="rect">
+            <a:avLst/>
+          </a:prstGeom>
+          <a:noFill/>
+          <a:ln/>
+        </p:spPr>
+        <p:txBody>
+          <a:bodyPr wrap="square" lIns="0" tIns="0" rIns="0" bIns="0" rtlCol="0" anchor="ctr"/>
+          <a:lstStyle/>
+          <a:p>
+            <a:pPr indent="0" marL="0">
+              <a:buNone/>
+            </a:pPr>
+            <a:r>
+              <a:rPr lang="en-US" sz="1100" b="1" spc="200" kern="0" dirty="0">
+                <a:solidFill>
+                  <a:srgbClr val="8B98A6"/>
+                </a:solidFill>
+                <a:latin typeface="Calibri" pitchFamily="34" charset="0"/>
+                <a:ea typeface="Calibri" pitchFamily="34" charset="-122"/>
+                <a:cs typeface="Calibri" pitchFamily="34" charset="-120"/>
+              </a:rPr>
+              <a:t>LIVE DEMO</a:t>
+            </a:r>
+            <a:endParaRPr lang="en-US" sz="1100" dirty="0"/>
+          </a:p>
+        </p:txBody>
+      </p:sp>
+      <p:sp>
+        <p:nvSpPr>
+          <p:cNvPr id="5" name="Text 3"/>
+          <p:cNvSpPr/>
+          <p:nvPr/>
+        </p:nvSpPr>
+        <p:spPr>
+          <a:xfrm>
+            <a:off x="868680" y="1380744"/>
+            <a:ext cx="10591495" cy="640080"/>
+          </a:xfrm>
+          <a:prstGeom prst="rect">
+            <a:avLst/>
+          </a:prstGeom>
+          <a:noFill/>
+          <a:ln/>
+        </p:spPr>
+        <p:txBody>
+          <a:bodyPr wrap="square" lIns="0" tIns="0" rIns="0" bIns="0" rtlCol="0" anchor="ctr"/>
+          <a:lstStyle/>
+          <a:p>
+            <a:pPr indent="0" marL="0">
+              <a:buNone/>
+            </a:pPr>
+            <a:r>
+              <a:rPr lang="en-US" sz="2300" b="1" dirty="0">
+                <a:solidFill>
+                  <a:srgbClr val="EEF2F6"/>
+                </a:solidFill>
+                <a:latin typeface="Cambria" pitchFamily="34" charset="0"/>
+                <a:ea typeface="Cambria" pitchFamily="34" charset="-122"/>
+                <a:cs typeface="Cambria" pitchFamily="34" charset="-120"/>
+              </a:rPr>
+              <a:t>See it running on AWS</a:t>
+            </a:r>
+            <a:endParaRPr lang="en-US" sz="2300" dirty="0"/>
+          </a:p>
+        </p:txBody>
+      </p:sp>
+      <p:sp>
+        <p:nvSpPr>
+          <p:cNvPr id="6" name="Text 4"/>
+          <p:cNvSpPr/>
+          <p:nvPr/>
+        </p:nvSpPr>
+        <p:spPr>
+          <a:xfrm>
+            <a:off x="868680" y="1901952"/>
+            <a:ext cx="10591495" cy="274320"/>
           </a:xfrm>
           <a:prstGeom prst="rect">
             <a:avLst/>
@@ -2581,9 +2618,9 @@
               <a:buNone/>
             </a:pPr>
             <a:r>
-              <a:rPr lang="en-US" sz="1400" dirty="0">
-                <a:solidFill>
-                  <a:srgbClr val="2E7D46"/>
+              <a:rPr lang="en-US" sz="1100" dirty="0">
+                <a:solidFill>
+                  <a:srgbClr val="FF8A6B"/>
                 </a:solidFill>
                 <a:latin typeface="Consolas" pitchFamily="34" charset="0"/>
                 <a:ea typeface="Consolas" pitchFamily="34" charset="-122"/>
@@ -2591,32 +2628,30 @@
               </a:rPr>
               <a:t>smart-agriculture-field-monitor.s3.us-east-1.amazonaws.com</a:t>
             </a:r>
-            <a:endParaRPr lang="en-US" sz="1400" dirty="0"/>
-          </a:p>
-        </p:txBody>
-      </p:sp>
-      <p:sp>
-        <p:nvSpPr>
-          <p:cNvPr id="4" name="Shape 2"/>
-          <p:cNvSpPr/>
-          <p:nvPr/>
-        </p:nvSpPr>
-        <p:spPr>
-          <a:xfrm>
-            <a:off x="640080" y="1828800"/>
-            <a:ext cx="10881360" cy="1371600"/>
+            <a:endParaRPr lang="en-US" sz="1100" dirty="0"/>
+          </a:p>
+        </p:txBody>
+      </p:sp>
+      <p:sp>
+        <p:nvSpPr>
+          <p:cNvPr id="7" name="Shape 5"/>
+          <p:cNvSpPr/>
+          <p:nvPr/>
+        </p:nvSpPr>
+        <p:spPr>
+          <a:xfrm>
+            <a:off x="868680" y="2514600"/>
+            <a:ext cx="3286658" cy="3566160"/>
           </a:xfrm>
           <a:prstGeom prst="roundRect">
-            <a:avLst>
-              <a:gd name="adj" fmla="val 6667"/>
-            </a:avLst>
-          </a:prstGeom>
-          <a:solidFill>
-            <a:srgbClr val="EFF4EC"/>
-          </a:solidFill>
-          <a:ln w="15240">
+            <a:avLst/>
+          </a:prstGeom>
+          <a:solidFill>
+            <a:srgbClr val="222733"/>
+          </a:solidFill>
+          <a:ln w="12700">
             <a:solidFill>
-              <a:srgbClr val="2E7D46"/>
+              <a:srgbClr val="363B47"/>
             </a:solidFill>
             <a:prstDash val="solid"/>
           </a:ln>
@@ -2624,34 +2659,14 @@
       </p:sp>
       <p:sp>
         <p:nvSpPr>
-          <p:cNvPr id="5" name="Shape 3"/>
-          <p:cNvSpPr/>
-          <p:nvPr/>
-        </p:nvSpPr>
-        <p:spPr>
-          <a:xfrm>
-            <a:off x="960120" y="2203704"/>
-            <a:ext cx="621792" cy="621792"/>
-          </a:xfrm>
-          <a:prstGeom prst="ellipse">
-            <a:avLst/>
-          </a:prstGeom>
-          <a:solidFill>
-            <a:srgbClr val="1F5130"/>
-          </a:solidFill>
-          <a:ln/>
-        </p:spPr>
-      </p:sp>
-      <p:sp>
-        <p:nvSpPr>
-          <p:cNvPr id="6" name="Text 4"/>
-          <p:cNvSpPr/>
-          <p:nvPr/>
-        </p:nvSpPr>
-        <p:spPr>
-          <a:xfrm>
-            <a:off x="960120" y="2203704"/>
-            <a:ext cx="621792" cy="621792"/>
+          <p:cNvPr id="8" name="Text 6"/>
+          <p:cNvSpPr/>
+          <p:nvPr/>
+        </p:nvSpPr>
+        <p:spPr>
+          <a:xfrm>
+            <a:off x="1143000" y="2752344"/>
+            <a:ext cx="1828800" cy="777240"/>
           </a:xfrm>
           <a:prstGeom prst="rect">
             <a:avLst/>
@@ -2663,34 +2678,76 @@
           <a:bodyPr wrap="square" lIns="0" tIns="0" rIns="0" bIns="0" rtlCol="0" anchor="ctr"/>
           <a:lstStyle/>
           <a:p>
-            <a:pPr algn="ctr" indent="0" marL="0">
-              <a:buNone/>
-            </a:pPr>
-            <a:r>
-              <a:rPr lang="en-US" sz="2200" b="1" dirty="0">
-                <a:solidFill>
-                  <a:srgbClr val="FFFFFF"/>
+            <a:pPr indent="0" marL="0">
+              <a:buNone/>
+            </a:pPr>
+            <a:r>
+              <a:rPr lang="en-US" sz="3800" b="1" dirty="0">
+                <a:solidFill>
+                  <a:srgbClr val="FF8A6B"/>
                 </a:solidFill>
                 <a:latin typeface="Cambria" pitchFamily="34" charset="0"/>
                 <a:ea typeface="Cambria" pitchFamily="34" charset="-122"/>
                 <a:cs typeface="Cambria" pitchFamily="34" charset="-120"/>
               </a:rPr>
-              <a:t>1</a:t>
-            </a:r>
-            <a:endParaRPr lang="en-US" sz="2200" dirty="0"/>
-          </a:p>
-        </p:txBody>
-      </p:sp>
-      <p:sp>
-        <p:nvSpPr>
-          <p:cNvPr id="7" name="Text 5"/>
-          <p:cNvSpPr/>
-          <p:nvPr/>
-        </p:nvSpPr>
-        <p:spPr>
-          <a:xfrm>
-            <a:off x="1828800" y="2029968"/>
-            <a:ext cx="9418320" cy="411480"/>
+              <a:t>01</a:t>
+            </a:r>
+            <a:endParaRPr lang="en-US" sz="3800" dirty="0"/>
+          </a:p>
+        </p:txBody>
+      </p:sp>
+      <p:sp>
+        <p:nvSpPr>
+          <p:cNvPr id="9" name="Text 7"/>
+          <p:cNvSpPr/>
+          <p:nvPr/>
+        </p:nvSpPr>
+        <p:spPr>
+          <a:xfrm>
+            <a:off x="1161288" y="3566160"/>
+            <a:ext cx="2738018" cy="868680"/>
+          </a:xfrm>
+          <a:prstGeom prst="rect">
+            <a:avLst/>
+          </a:prstGeom>
+          <a:noFill/>
+          <a:ln/>
+        </p:spPr>
+        <p:txBody>
+          <a:bodyPr wrap="square" lIns="0" tIns="0" rIns="0" bIns="0" rtlCol="0" anchor="t"/>
+          <a:lstStyle/>
+          <a:p>
+            <a:pPr indent="0" marL="0">
+              <a:lnSpc>
+                <a:spcPct val="100000"/>
+              </a:lnSpc>
+              <a:buNone/>
+            </a:pPr>
+            <a:r>
+              <a:rPr lang="en-US" sz="1550" b="1" dirty="0">
+                <a:solidFill>
+                  <a:srgbClr val="EEF2F6"/>
+                </a:solidFill>
+                <a:latin typeface="Cambria" pitchFamily="34" charset="0"/>
+                <a:ea typeface="Cambria" pitchFamily="34" charset="-122"/>
+                <a:cs typeface="Cambria" pitchFamily="34" charset="-120"/>
+              </a:rPr>
+              <a:t>Two fields streaming five signals</a:t>
+            </a:r>
+            <a:endParaRPr lang="en-US" sz="1550" dirty="0"/>
+          </a:p>
+        </p:txBody>
+      </p:sp>
+      <p:sp>
+        <p:nvSpPr>
+          <p:cNvPr id="10" name="Text 8"/>
+          <p:cNvSpPr/>
+          <p:nvPr/>
+        </p:nvSpPr>
+        <p:spPr>
+          <a:xfrm>
+            <a:off x="1161288" y="4434840"/>
+            <a:ext cx="2738018" cy="1463040"/>
           </a:xfrm>
           <a:prstGeom prst="rect">
             <a:avLst/>
@@ -2703,33 +2760,61 @@
           <a:lstStyle/>
           <a:p>
             <a:pPr indent="0" marL="0">
-              <a:buNone/>
-            </a:pPr>
-            <a:r>
-              <a:rPr lang="en-US" sz="1700" b="1" dirty="0">
-                <a:solidFill>
-                  <a:srgbClr val="17231C"/>
+              <a:lnSpc>
+                <a:spcPct val="120000"/>
+              </a:lnSpc>
+              <a:buNone/>
+            </a:pPr>
+            <a:r>
+              <a:rPr lang="en-US" sz="1200" dirty="0">
+                <a:solidFill>
+                  <a:srgbClr val="8B98A6"/>
                 </a:solidFill>
                 <a:latin typeface="Calibri" pitchFamily="34" charset="0"/>
                 <a:ea typeface="Calibri" pitchFamily="34" charset="-122"/>
                 <a:cs typeface="Calibri" pitchFamily="34" charset="-120"/>
               </a:rPr>
-              <a:t>Two fields streaming five signals</a:t>
-            </a:r>
-            <a:endParaRPr lang="en-US" sz="1700" dirty="0"/>
-          </a:p>
-        </p:txBody>
-      </p:sp>
-      <p:sp>
-        <p:nvSpPr>
-          <p:cNvPr id="8" name="Text 6"/>
-          <p:cNvSpPr/>
-          <p:nvPr/>
-        </p:nvSpPr>
-        <p:spPr>
-          <a:xfrm>
-            <a:off x="1828800" y="2450592"/>
-            <a:ext cx="9418320" cy="594360"/>
+              <a:t>Soil moisture, temperature, humidity, light and rainfall live on Field-1 and Field-2, freshest reading about two seconds old.</a:t>
+            </a:r>
+            <a:endParaRPr lang="en-US" sz="1200" dirty="0"/>
+          </a:p>
+        </p:txBody>
+      </p:sp>
+      <p:sp>
+        <p:nvSpPr>
+          <p:cNvPr id="11" name="Shape 9"/>
+          <p:cNvSpPr/>
+          <p:nvPr/>
+        </p:nvSpPr>
+        <p:spPr>
+          <a:xfrm>
+            <a:off x="4521098" y="2514600"/>
+            <a:ext cx="3286658" cy="3566160"/>
+          </a:xfrm>
+          <a:prstGeom prst="roundRect">
+            <a:avLst/>
+          </a:prstGeom>
+          <a:solidFill>
+            <a:srgbClr val="222733"/>
+          </a:solidFill>
+          <a:ln w="12700">
+            <a:solidFill>
+              <a:srgbClr val="363B47"/>
+            </a:solidFill>
+            <a:prstDash val="solid"/>
+          </a:ln>
+        </p:spPr>
+      </p:sp>
+      <p:sp>
+        <p:nvSpPr>
+          <p:cNvPr id="12" name="Text 10"/>
+          <p:cNvSpPr/>
+          <p:nvPr/>
+        </p:nvSpPr>
+        <p:spPr>
+          <a:xfrm>
+            <a:off x="4795418" y="2752344"/>
+            <a:ext cx="1828800" cy="777240"/>
           </a:xfrm>
           <a:prstGeom prst="rect">
             <a:avLst/>
@@ -2742,48 +2827,127 @@
           <a:lstStyle/>
           <a:p>
             <a:pPr indent="0" marL="0">
+              <a:buNone/>
+            </a:pPr>
+            <a:r>
+              <a:rPr lang="en-US" sz="3800" b="1" dirty="0">
+                <a:solidFill>
+                  <a:srgbClr val="FF8A6B"/>
+                </a:solidFill>
+                <a:latin typeface="Cambria" pitchFamily="34" charset="0"/>
+                <a:ea typeface="Cambria" pitchFamily="34" charset="-122"/>
+                <a:cs typeface="Cambria" pitchFamily="34" charset="-120"/>
+              </a:rPr>
+              <a:t>02</a:t>
+            </a:r>
+            <a:endParaRPr lang="en-US" sz="3800" dirty="0"/>
+          </a:p>
+        </p:txBody>
+      </p:sp>
+      <p:sp>
+        <p:nvSpPr>
+          <p:cNvPr id="13" name="Text 11"/>
+          <p:cNvSpPr/>
+          <p:nvPr/>
+        </p:nvSpPr>
+        <p:spPr>
+          <a:xfrm>
+            <a:off x="4813706" y="3566160"/>
+            <a:ext cx="2738018" cy="868680"/>
+          </a:xfrm>
+          <a:prstGeom prst="rect">
+            <a:avLst/>
+          </a:prstGeom>
+          <a:noFill/>
+          <a:ln/>
+        </p:spPr>
+        <p:txBody>
+          <a:bodyPr wrap="square" lIns="0" tIns="0" rIns="0" bIns="0" rtlCol="0" anchor="t"/>
+          <a:lstStyle/>
+          <a:p>
+            <a:pPr indent="0" marL="0">
               <a:lnSpc>
-                <a:spcPct val="105000"/>
+                <a:spcPct val="100000"/>
               </a:lnSpc>
               <a:buNone/>
             </a:pPr>
             <a:r>
-              <a:rPr lang="en-US" sz="1300" dirty="0">
-                <a:solidFill>
-                  <a:srgbClr val="5C6B60"/>
+              <a:rPr lang="en-US" sz="1550" b="1" dirty="0">
+                <a:solidFill>
+                  <a:srgbClr val="EEF2F6"/>
+                </a:solidFill>
+                <a:latin typeface="Cambria" pitchFamily="34" charset="0"/>
+                <a:ea typeface="Cambria" pitchFamily="34" charset="-122"/>
+                <a:cs typeface="Cambria" pitchFamily="34" charset="-120"/>
+              </a:rPr>
+              <a:t>Trend charts with the alert band drawn in</a:t>
+            </a:r>
+            <a:endParaRPr lang="en-US" sz="1550" dirty="0"/>
+          </a:p>
+        </p:txBody>
+      </p:sp>
+      <p:sp>
+        <p:nvSpPr>
+          <p:cNvPr id="14" name="Text 12"/>
+          <p:cNvSpPr/>
+          <p:nvPr/>
+        </p:nvSpPr>
+        <p:spPr>
+          <a:xfrm>
+            <a:off x="4813706" y="4434840"/>
+            <a:ext cx="2738018" cy="1463040"/>
+          </a:xfrm>
+          <a:prstGeom prst="rect">
+            <a:avLst/>
+          </a:prstGeom>
+          <a:noFill/>
+          <a:ln/>
+        </p:spPr>
+        <p:txBody>
+          <a:bodyPr wrap="square" lIns="0" tIns="0" rIns="0" bIns="0" rtlCol="0" anchor="ctr"/>
+          <a:lstStyle/>
+          <a:p>
+            <a:pPr indent="0" marL="0">
+              <a:lnSpc>
+                <a:spcPct val="120000"/>
+              </a:lnSpc>
+              <a:buNone/>
+            </a:pPr>
+            <a:r>
+              <a:rPr lang="en-US" sz="1200" dirty="0">
+                <a:solidFill>
+                  <a:srgbClr val="8B98A6"/>
                 </a:solidFill>
                 <a:latin typeface="Calibri" pitchFamily="34" charset="0"/>
                 <a:ea typeface="Calibri" pitchFamily="34" charset="-122"/>
                 <a:cs typeface="Calibri" pitchFamily="34" charset="-120"/>
               </a:rPr>
-              <a:t>Soil moisture, temperature, humidity, light and rainfall live on Field-1 and Field-2, freshest reading about two seconds old.</a:t>
-            </a:r>
-            <a:endParaRPr lang="en-US" sz="1300" dirty="0"/>
-          </a:p>
-        </p:txBody>
-      </p:sp>
-      <p:sp>
-        <p:nvSpPr>
-          <p:cNvPr id="9" name="Shape 7"/>
-          <p:cNvSpPr/>
-          <p:nvPr/>
-        </p:nvSpPr>
-        <p:spPr>
-          <a:xfrm>
-            <a:off x="640080" y="3346704"/>
-            <a:ext cx="10881360" cy="1371600"/>
+              <a:t>Soil-moisture, temperature and humidity charts show each field's live series against its threshold band, so you can see how close it is to an alert.</a:t>
+            </a:r>
+            <a:endParaRPr lang="en-US" sz="1200" dirty="0"/>
+          </a:p>
+        </p:txBody>
+      </p:sp>
+      <p:sp>
+        <p:nvSpPr>
+          <p:cNvPr id="15" name="Shape 13"/>
+          <p:cNvSpPr/>
+          <p:nvPr/>
+        </p:nvSpPr>
+        <p:spPr>
+          <a:xfrm>
+            <a:off x="8173517" y="2514600"/>
+            <a:ext cx="3286658" cy="3566160"/>
           </a:xfrm>
           <a:prstGeom prst="roundRect">
-            <a:avLst>
-              <a:gd name="adj" fmla="val 6667"/>
-            </a:avLst>
-          </a:prstGeom>
-          <a:solidFill>
-            <a:srgbClr val="EFF4EC"/>
-          </a:solidFill>
-          <a:ln w="15240">
+            <a:avLst/>
+          </a:prstGeom>
+          <a:solidFill>
+            <a:srgbClr val="222733"/>
+          </a:solidFill>
+          <a:ln w="12700">
             <a:solidFill>
-              <a:srgbClr val="2E7D46"/>
+              <a:srgbClr val="363B47"/>
             </a:solidFill>
             <a:prstDash val="solid"/>
           </a:ln>
@@ -2791,34 +2955,14 @@
       </p:sp>
       <p:sp>
         <p:nvSpPr>
-          <p:cNvPr id="10" name="Shape 8"/>
-          <p:cNvSpPr/>
-          <p:nvPr/>
-        </p:nvSpPr>
-        <p:spPr>
-          <a:xfrm>
-            <a:off x="960120" y="3721608"/>
-            <a:ext cx="621792" cy="621792"/>
-          </a:xfrm>
-          <a:prstGeom prst="ellipse">
-            <a:avLst/>
-          </a:prstGeom>
-          <a:solidFill>
-            <a:srgbClr val="1F5130"/>
-          </a:solidFill>
-          <a:ln/>
-        </p:spPr>
-      </p:sp>
-      <p:sp>
-        <p:nvSpPr>
-          <p:cNvPr id="11" name="Text 9"/>
-          <p:cNvSpPr/>
-          <p:nvPr/>
-        </p:nvSpPr>
-        <p:spPr>
-          <a:xfrm>
-            <a:off x="960120" y="3721608"/>
-            <a:ext cx="621792" cy="621792"/>
+          <p:cNvPr id="16" name="Text 14"/>
+          <p:cNvSpPr/>
+          <p:nvPr/>
+        </p:nvSpPr>
+        <p:spPr>
+          <a:xfrm>
+            <a:off x="8447837" y="2752344"/>
+            <a:ext cx="1828800" cy="777240"/>
           </a:xfrm>
           <a:prstGeom prst="rect">
             <a:avLst/>
@@ -2830,34 +2974,76 @@
           <a:bodyPr wrap="square" lIns="0" tIns="0" rIns="0" bIns="0" rtlCol="0" anchor="ctr"/>
           <a:lstStyle/>
           <a:p>
-            <a:pPr algn="ctr" indent="0" marL="0">
-              <a:buNone/>
-            </a:pPr>
-            <a:r>
-              <a:rPr lang="en-US" sz="2200" b="1" dirty="0">
-                <a:solidFill>
-                  <a:srgbClr val="FFFFFF"/>
+            <a:pPr indent="0" marL="0">
+              <a:buNone/>
+            </a:pPr>
+            <a:r>
+              <a:rPr lang="en-US" sz="3800" b="1" dirty="0">
+                <a:solidFill>
+                  <a:srgbClr val="FF8A6B"/>
                 </a:solidFill>
                 <a:latin typeface="Cambria" pitchFamily="34" charset="0"/>
                 <a:ea typeface="Cambria" pitchFamily="34" charset="-122"/>
                 <a:cs typeface="Cambria" pitchFamily="34" charset="-120"/>
               </a:rPr>
-              <a:t>2</a:t>
-            </a:r>
-            <a:endParaRPr lang="en-US" sz="2200" dirty="0"/>
-          </a:p>
-        </p:txBody>
-      </p:sp>
-      <p:sp>
-        <p:nvSpPr>
-          <p:cNvPr id="12" name="Text 10"/>
-          <p:cNvSpPr/>
-          <p:nvPr/>
-        </p:nvSpPr>
-        <p:spPr>
-          <a:xfrm>
-            <a:off x="1828800" y="3547872"/>
-            <a:ext cx="9418320" cy="411480"/>
+              <a:t>03</a:t>
+            </a:r>
+            <a:endParaRPr lang="en-US" sz="3800" dirty="0"/>
+          </a:p>
+        </p:txBody>
+      </p:sp>
+      <p:sp>
+        <p:nvSpPr>
+          <p:cNvPr id="17" name="Text 15"/>
+          <p:cNvSpPr/>
+          <p:nvPr/>
+        </p:nvSpPr>
+        <p:spPr>
+          <a:xfrm>
+            <a:off x="8466125" y="3566160"/>
+            <a:ext cx="2738018" cy="868680"/>
+          </a:xfrm>
+          <a:prstGeom prst="rect">
+            <a:avLst/>
+          </a:prstGeom>
+          <a:noFill/>
+          <a:ln/>
+        </p:spPr>
+        <p:txBody>
+          <a:bodyPr wrap="square" lIns="0" tIns="0" rIns="0" bIns="0" rtlCol="0" anchor="t"/>
+          <a:lstStyle/>
+          <a:p>
+            <a:pPr indent="0" marL="0">
+              <a:lnSpc>
+                <a:spcPct val="100000"/>
+              </a:lnSpc>
+              <a:buNone/>
+            </a:pPr>
+            <a:r>
+              <a:rPr lang="en-US" sz="1550" b="1" dirty="0">
+                <a:solidFill>
+                  <a:srgbClr val="EEF2F6"/>
+                </a:solidFill>
+                <a:latin typeface="Cambria" pitchFamily="34" charset="0"/>
+                <a:ea typeface="Cambria" pitchFamily="34" charset="-122"/>
+                <a:cs typeface="Cambria" pitchFamily="34" charset="-120"/>
+              </a:rPr>
+              <a:t>An alert fires the moment a rule trips</a:t>
+            </a:r>
+            <a:endParaRPr lang="en-US" sz="1550" dirty="0"/>
+          </a:p>
+        </p:txBody>
+      </p:sp>
+      <p:sp>
+        <p:nvSpPr>
+          <p:cNvPr id="18" name="Text 16"/>
+          <p:cNvSpPr/>
+          <p:nvPr/>
+        </p:nvSpPr>
+        <p:spPr>
+          <a:xfrm>
+            <a:off x="8466125" y="4434840"/>
+            <a:ext cx="2738018" cy="1463040"/>
           </a:xfrm>
           <a:prstGeom prst="rect">
             <a:avLst/>
@@ -2870,229 +3056,23 @@
           <a:lstStyle/>
           <a:p>
             <a:pPr indent="0" marL="0">
-              <a:buNone/>
-            </a:pPr>
-            <a:r>
-              <a:rPr lang="en-US" sz="1700" b="1" dirty="0">
-                <a:solidFill>
-                  <a:srgbClr val="17231C"/>
+              <a:lnSpc>
+                <a:spcPct val="120000"/>
+              </a:lnSpc>
+              <a:buNone/>
+            </a:pPr>
+            <a:r>
+              <a:rPr lang="en-US" sz="1200" dirty="0">
+                <a:solidFill>
+                  <a:srgbClr val="8B98A6"/>
                 </a:solidFill>
                 <a:latin typeface="Calibri" pitchFamily="34" charset="0"/>
                 <a:ea typeface="Calibri" pitchFamily="34" charset="-122"/>
                 <a:cs typeface="Calibri" pitchFamily="34" charset="-120"/>
               </a:rPr>
-              <a:t>Trend charts with the alert band drawn in</a:t>
-            </a:r>
-            <a:endParaRPr lang="en-US" sz="1700" dirty="0"/>
-          </a:p>
-        </p:txBody>
-      </p:sp>
-      <p:sp>
-        <p:nvSpPr>
-          <p:cNvPr id="13" name="Text 11"/>
-          <p:cNvSpPr/>
-          <p:nvPr/>
-        </p:nvSpPr>
-        <p:spPr>
-          <a:xfrm>
-            <a:off x="1828800" y="3968496"/>
-            <a:ext cx="9418320" cy="594360"/>
-          </a:xfrm>
-          <a:prstGeom prst="rect">
-            <a:avLst/>
-          </a:prstGeom>
-          <a:noFill/>
-          <a:ln/>
-        </p:spPr>
-        <p:txBody>
-          <a:bodyPr wrap="square" lIns="0" tIns="0" rIns="0" bIns="0" rtlCol="0" anchor="ctr"/>
-          <a:lstStyle/>
-          <a:p>
-            <a:pPr indent="0" marL="0">
-              <a:lnSpc>
-                <a:spcPct val="105000"/>
-              </a:lnSpc>
-              <a:buNone/>
-            </a:pPr>
-            <a:r>
-              <a:rPr lang="en-US" sz="1300" dirty="0">
-                <a:solidFill>
-                  <a:srgbClr val="5C6B60"/>
-                </a:solidFill>
-                <a:latin typeface="Calibri" pitchFamily="34" charset="0"/>
-                <a:ea typeface="Calibri" pitchFamily="34" charset="-122"/>
-                <a:cs typeface="Calibri" pitchFamily="34" charset="-120"/>
-              </a:rPr>
-              <a:t>Soil-moisture, temperature and humidity charts show each field's live series against its threshold band, so you can see how close it is to an alert.</a:t>
-            </a:r>
-            <a:endParaRPr lang="en-US" sz="1300" dirty="0"/>
-          </a:p>
-        </p:txBody>
-      </p:sp>
-      <p:sp>
-        <p:nvSpPr>
-          <p:cNvPr id="14" name="Shape 12"/>
-          <p:cNvSpPr/>
-          <p:nvPr/>
-        </p:nvSpPr>
-        <p:spPr>
-          <a:xfrm>
-            <a:off x="640080" y="4864608"/>
-            <a:ext cx="10881360" cy="1371600"/>
-          </a:xfrm>
-          <a:prstGeom prst="roundRect">
-            <a:avLst>
-              <a:gd name="adj" fmla="val 6667"/>
-            </a:avLst>
-          </a:prstGeom>
-          <a:solidFill>
-            <a:srgbClr val="EFF4EC"/>
-          </a:solidFill>
-          <a:ln w="15240">
-            <a:solidFill>
-              <a:srgbClr val="2E7D46"/>
-            </a:solidFill>
-            <a:prstDash val="solid"/>
-          </a:ln>
-        </p:spPr>
-      </p:sp>
-      <p:sp>
-        <p:nvSpPr>
-          <p:cNvPr id="15" name="Shape 13"/>
-          <p:cNvSpPr/>
-          <p:nvPr/>
-        </p:nvSpPr>
-        <p:spPr>
-          <a:xfrm>
-            <a:off x="960120" y="5239512"/>
-            <a:ext cx="621792" cy="621792"/>
-          </a:xfrm>
-          <a:prstGeom prst="ellipse">
-            <a:avLst/>
-          </a:prstGeom>
-          <a:solidFill>
-            <a:srgbClr val="1F5130"/>
-          </a:solidFill>
-          <a:ln/>
-        </p:spPr>
-      </p:sp>
-      <p:sp>
-        <p:nvSpPr>
-          <p:cNvPr id="16" name="Text 14"/>
-          <p:cNvSpPr/>
-          <p:nvPr/>
-        </p:nvSpPr>
-        <p:spPr>
-          <a:xfrm>
-            <a:off x="960120" y="5239512"/>
-            <a:ext cx="621792" cy="621792"/>
-          </a:xfrm>
-          <a:prstGeom prst="rect">
-            <a:avLst/>
-          </a:prstGeom>
-          <a:noFill/>
-          <a:ln/>
-        </p:spPr>
-        <p:txBody>
-          <a:bodyPr wrap="square" lIns="0" tIns="0" rIns="0" bIns="0" rtlCol="0" anchor="ctr"/>
-          <a:lstStyle/>
-          <a:p>
-            <a:pPr algn="ctr" indent="0" marL="0">
-              <a:buNone/>
-            </a:pPr>
-            <a:r>
-              <a:rPr lang="en-US" sz="2200" b="1" dirty="0">
-                <a:solidFill>
-                  <a:srgbClr val="FFFFFF"/>
-                </a:solidFill>
-                <a:latin typeface="Cambria" pitchFamily="34" charset="0"/>
-                <a:ea typeface="Cambria" pitchFamily="34" charset="-122"/>
-                <a:cs typeface="Cambria" pitchFamily="34" charset="-120"/>
-              </a:rPr>
-              <a:t>3</a:t>
-            </a:r>
-            <a:endParaRPr lang="en-US" sz="2200" dirty="0"/>
-          </a:p>
-        </p:txBody>
-      </p:sp>
-      <p:sp>
-        <p:nvSpPr>
-          <p:cNvPr id="17" name="Text 15"/>
-          <p:cNvSpPr/>
-          <p:nvPr/>
-        </p:nvSpPr>
-        <p:spPr>
-          <a:xfrm>
-            <a:off x="1828800" y="5065776"/>
-            <a:ext cx="9418320" cy="411480"/>
-          </a:xfrm>
-          <a:prstGeom prst="rect">
-            <a:avLst/>
-          </a:prstGeom>
-          <a:noFill/>
-          <a:ln/>
-        </p:spPr>
-        <p:txBody>
-          <a:bodyPr wrap="square" lIns="0" tIns="0" rIns="0" bIns="0" rtlCol="0" anchor="ctr"/>
-          <a:lstStyle/>
-          <a:p>
-            <a:pPr indent="0" marL="0">
-              <a:buNone/>
-            </a:pPr>
-            <a:r>
-              <a:rPr lang="en-US" sz="1700" b="1" dirty="0">
-                <a:solidFill>
-                  <a:srgbClr val="17231C"/>
-                </a:solidFill>
-                <a:latin typeface="Calibri" pitchFamily="34" charset="0"/>
-                <a:ea typeface="Calibri" pitchFamily="34" charset="-122"/>
-                <a:cs typeface="Calibri" pitchFamily="34" charset="-120"/>
-              </a:rPr>
-              <a:t>An alert fires the moment a rule trips</a:t>
-            </a:r>
-            <a:endParaRPr lang="en-US" sz="1700" dirty="0"/>
-          </a:p>
-        </p:txBody>
-      </p:sp>
-      <p:sp>
-        <p:nvSpPr>
-          <p:cNvPr id="18" name="Text 16"/>
-          <p:cNvSpPr/>
-          <p:nvPr/>
-        </p:nvSpPr>
-        <p:spPr>
-          <a:xfrm>
-            <a:off x="1828800" y="5486400"/>
-            <a:ext cx="9418320" cy="594360"/>
-          </a:xfrm>
-          <a:prstGeom prst="rect">
-            <a:avLst/>
-          </a:prstGeom>
-          <a:noFill/>
-          <a:ln/>
-        </p:spPr>
-        <p:txBody>
-          <a:bodyPr wrap="square" lIns="0" tIns="0" rIns="0" bIns="0" rtlCol="0" anchor="ctr"/>
-          <a:lstStyle/>
-          <a:p>
-            <a:pPr indent="0" marL="0">
-              <a:lnSpc>
-                <a:spcPct val="105000"/>
-              </a:lnSpc>
-              <a:buNone/>
-            </a:pPr>
-            <a:r>
-              <a:rPr lang="en-US" sz="1300" dirty="0">
-                <a:solidFill>
-                  <a:srgbClr val="5C6B60"/>
-                </a:solidFill>
-                <a:latin typeface="Calibri" pitchFamily="34" charset="0"/>
-                <a:ea typeface="Calibri" pitchFamily="34" charset="-122"/>
-                <a:cs typeface="Calibri" pitchFamily="34" charset="-120"/>
-              </a:rPr>
               <a:t>Push a field's soil moisture below 20% and the irrigation-needed banner appears within one ten-second window.</a:t>
             </a:r>
-            <a:endParaRPr lang="en-US" sz="1300" dirty="0"/>
+            <a:endParaRPr lang="en-US" sz="1200" dirty="0"/>
           </a:p>
         </p:txBody>
       </p:sp>
@@ -3110,7 +3090,7 @@
     <p:bg>
       <p:bgPr>
         <a:solidFill>
-          <a:srgbClr val="FFFFFF"/>
+          <a:srgbClr val="262C38"/>
         </a:solidFill>
       </p:bgPr>
     </p:bg>
@@ -3130,65 +3110,161 @@
       </p:grpSpPr>
       <p:sp>
         <p:nvSpPr>
-          <p:cNvPr id="2" name="Text 0"/>
-          <p:cNvSpPr/>
-          <p:nvPr/>
-        </p:nvSpPr>
-        <p:spPr>
-          <a:xfrm>
-            <a:off x="640080" y="502920"/>
-            <a:ext cx="10972800" cy="822960"/>
-          </a:xfrm>
-          <a:prstGeom prst="rect">
-            <a:avLst/>
-          </a:prstGeom>
-          <a:noFill/>
-          <a:ln/>
-        </p:spPr>
-        <p:txBody>
-          <a:bodyPr wrap="square" rtlCol="0" anchor="t"/>
-          <a:lstStyle/>
-          <a:p>
-            <a:pPr indent="0" marL="0">
-              <a:buNone/>
-            </a:pPr>
-            <a:r>
-              <a:rPr lang="en-US" sz="2800" b="1" dirty="0">
-                <a:solidFill>
-                  <a:srgbClr val="17231C"/>
+          <p:cNvPr id="2" name="Shape 0"/>
+          <p:cNvSpPr/>
+          <p:nvPr/>
+        </p:nvSpPr>
+        <p:spPr>
+          <a:xfrm>
+            <a:off x="0" y="0"/>
+            <a:ext cx="146304" cy="6858000"/>
+          </a:xfrm>
+          <a:prstGeom prst="rect">
+            <a:avLst/>
+          </a:prstGeom>
+          <a:solidFill>
+            <a:srgbClr val="FF8A6B"/>
+          </a:solidFill>
+          <a:ln/>
+        </p:spPr>
+      </p:sp>
+      <p:sp>
+        <p:nvSpPr>
+          <p:cNvPr id="3" name="Text 1"/>
+          <p:cNvSpPr/>
+          <p:nvPr/>
+        </p:nvSpPr>
+        <p:spPr>
+          <a:xfrm>
+            <a:off x="868680" y="731520"/>
+            <a:ext cx="914400" cy="640080"/>
+          </a:xfrm>
+          <a:prstGeom prst="rect">
+            <a:avLst/>
+          </a:prstGeom>
+          <a:noFill/>
+          <a:ln/>
+        </p:spPr>
+        <p:txBody>
+          <a:bodyPr wrap="square" lIns="0" tIns="0" rIns="0" bIns="0" rtlCol="0" anchor="ctr"/>
+          <a:lstStyle/>
+          <a:p>
+            <a:pPr indent="0" marL="0">
+              <a:buNone/>
+            </a:pPr>
+            <a:r>
+              <a:rPr lang="en-US" sz="3000" b="1" dirty="0">
+                <a:solidFill>
+                  <a:srgbClr val="FF8A6B"/>
                 </a:solidFill>
                 <a:latin typeface="Cambria" pitchFamily="34" charset="0"/>
                 <a:ea typeface="Cambria" pitchFamily="34" charset="-122"/>
                 <a:cs typeface="Cambria" pitchFamily="34" charset="-120"/>
               </a:rPr>
-              <a:t>Hardest Part — a defect the emulator hid</a:t>
-            </a:r>
-            <a:endParaRPr lang="en-US" sz="2800" dirty="0"/>
-          </a:p>
-        </p:txBody>
-      </p:sp>
-      <p:sp>
-        <p:nvSpPr>
-          <p:cNvPr id="3" name="Shape 1"/>
-          <p:cNvSpPr/>
-          <p:nvPr/>
-        </p:nvSpPr>
-        <p:spPr>
-          <a:xfrm>
-            <a:off x="731520" y="1920240"/>
-            <a:ext cx="10698480" cy="1965960"/>
+              <a:t>03</a:t>
+            </a:r>
+            <a:endParaRPr lang="en-US" sz="3000" dirty="0"/>
+          </a:p>
+        </p:txBody>
+      </p:sp>
+      <p:sp>
+        <p:nvSpPr>
+          <p:cNvPr id="4" name="Text 2"/>
+          <p:cNvSpPr/>
+          <p:nvPr/>
+        </p:nvSpPr>
+        <p:spPr>
+          <a:xfrm>
+            <a:off x="1737360" y="905256"/>
+            <a:ext cx="9722815" cy="274320"/>
+          </a:xfrm>
+          <a:prstGeom prst="rect">
+            <a:avLst/>
+          </a:prstGeom>
+          <a:noFill/>
+          <a:ln/>
+        </p:spPr>
+        <p:txBody>
+          <a:bodyPr wrap="square" lIns="0" tIns="0" rIns="0" bIns="0" rtlCol="0" anchor="ctr"/>
+          <a:lstStyle/>
+          <a:p>
+            <a:pPr indent="0" marL="0">
+              <a:buNone/>
+            </a:pPr>
+            <a:r>
+              <a:rPr lang="en-US" sz="1100" b="1" spc="200" kern="0" dirty="0">
+                <a:solidFill>
+                  <a:srgbClr val="8B98A6"/>
+                </a:solidFill>
+                <a:latin typeface="Calibri" pitchFamily="34" charset="0"/>
+                <a:ea typeface="Calibri" pitchFamily="34" charset="-122"/>
+                <a:cs typeface="Calibri" pitchFamily="34" charset="-120"/>
+              </a:rPr>
+              <a:t>CHALLENGE</a:t>
+            </a:r>
+            <a:endParaRPr lang="en-US" sz="1100" dirty="0"/>
+          </a:p>
+        </p:txBody>
+      </p:sp>
+      <p:sp>
+        <p:nvSpPr>
+          <p:cNvPr id="5" name="Text 3"/>
+          <p:cNvSpPr/>
+          <p:nvPr/>
+        </p:nvSpPr>
+        <p:spPr>
+          <a:xfrm>
+            <a:off x="868680" y="1380744"/>
+            <a:ext cx="10591495" cy="640080"/>
+          </a:xfrm>
+          <a:prstGeom prst="rect">
+            <a:avLst/>
+          </a:prstGeom>
+          <a:noFill/>
+          <a:ln/>
+        </p:spPr>
+        <p:txBody>
+          <a:bodyPr wrap="square" lIns="0" tIns="0" rIns="0" bIns="0" rtlCol="0" anchor="ctr"/>
+          <a:lstStyle/>
+          <a:p>
+            <a:pPr indent="0" marL="0">
+              <a:buNone/>
+            </a:pPr>
+            <a:r>
+              <a:rPr lang="en-US" sz="2300" b="1" dirty="0">
+                <a:solidFill>
+                  <a:srgbClr val="EEF2F6"/>
+                </a:solidFill>
+                <a:latin typeface="Cambria" pitchFamily="34" charset="0"/>
+                <a:ea typeface="Cambria" pitchFamily="34" charset="-122"/>
+                <a:cs typeface="Cambria" pitchFamily="34" charset="-120"/>
+              </a:rPr>
+              <a:t>a web framework inside a function</a:t>
+            </a:r>
+            <a:endParaRPr lang="en-US" sz="2300" dirty="0"/>
+          </a:p>
+        </p:txBody>
+      </p:sp>
+      <p:sp>
+        <p:nvSpPr>
+          <p:cNvPr id="6" name="Shape 4"/>
+          <p:cNvSpPr/>
+          <p:nvPr/>
+        </p:nvSpPr>
+        <p:spPr>
+          <a:xfrm>
+            <a:off x="868680" y="2423160"/>
+            <a:ext cx="5067148" cy="3657600"/>
           </a:xfrm>
           <a:prstGeom prst="roundRect">
-            <a:avLst>
-              <a:gd name="adj" fmla="val 4651"/>
-            </a:avLst>
-          </a:prstGeom>
-          <a:solidFill>
-            <a:srgbClr val="EFF4EC"/>
-          </a:solidFill>
-          <a:ln w="19050">
+            <a:avLst/>
+          </a:prstGeom>
+          <a:solidFill>
+            <a:srgbClr val="222733"/>
+          </a:solidFill>
+          <a:ln w="12700">
             <a:solidFill>
-              <a:srgbClr val="E0A83E"/>
+              <a:srgbClr val="363B47"/>
             </a:solidFill>
             <a:prstDash val="solid"/>
           </a:ln>
@@ -3196,14 +3272,14 @@
       </p:sp>
       <p:sp>
         <p:nvSpPr>
-          <p:cNvPr id="4" name="Text 2"/>
-          <p:cNvSpPr/>
-          <p:nvPr/>
-        </p:nvSpPr>
-        <p:spPr>
-          <a:xfrm>
-            <a:off x="1005840" y="2103120"/>
-            <a:ext cx="3657600" cy="457200"/>
+          <p:cNvPr id="7" name="Text 5"/>
+          <p:cNvSpPr/>
+          <p:nvPr/>
+        </p:nvSpPr>
+        <p:spPr>
+          <a:xfrm>
+            <a:off x="1188720" y="2697480"/>
+            <a:ext cx="4427068" cy="320040"/>
           </a:xfrm>
           <a:prstGeom prst="rect">
             <a:avLst/>
@@ -3219,84 +3295,38 @@
               <a:buNone/>
             </a:pPr>
             <a:r>
-              <a:rPr lang="en-US" sz="1900" b="1" dirty="0">
-                <a:solidFill>
-                  <a:srgbClr val="E0A83E"/>
-                </a:solidFill>
-                <a:latin typeface="Cambria" pitchFamily="34" charset="0"/>
-                <a:ea typeface="Cambria" pitchFamily="34" charset="-122"/>
-                <a:cs typeface="Cambria" pitchFamily="34" charset="-120"/>
-              </a:rPr>
-              <a:t>Problem</a:t>
-            </a:r>
-            <a:endParaRPr lang="en-US" sz="1900" dirty="0"/>
-          </a:p>
-        </p:txBody>
-      </p:sp>
-      <p:sp>
-        <p:nvSpPr>
-          <p:cNvPr id="5" name="Text 3"/>
-          <p:cNvSpPr/>
-          <p:nvPr/>
-        </p:nvSpPr>
-        <p:spPr>
-          <a:xfrm>
-            <a:off x="1005840" y="2578608"/>
-            <a:ext cx="9966960" cy="1188720"/>
-          </a:xfrm>
-          <a:prstGeom prst="rect">
-            <a:avLst/>
-          </a:prstGeom>
-          <a:noFill/>
-          <a:ln/>
-        </p:spPr>
-        <p:txBody>
-          <a:bodyPr wrap="square" lIns="0" tIns="0" rIns="0" bIns="0" rtlCol="0" anchor="ctr"/>
-          <a:lstStyle/>
-          <a:p>
-            <a:pPr indent="0" marL="0">
-              <a:lnSpc>
-                <a:spcPct val="105000"/>
-              </a:lnSpc>
-              <a:buNone/>
-            </a:pPr>
-            <a:r>
-              <a:rPr lang="en-US" sz="1300" dirty="0">
-                <a:solidFill>
-                  <a:srgbClr val="17231C"/>
+              <a:rPr lang="en-US" sz="1200" b="1" spc="200" kern="0" dirty="0">
+                <a:solidFill>
+                  <a:srgbClr val="D1584E"/>
                 </a:solidFill>
                 <a:latin typeface="Calibri" pitchFamily="34" charset="0"/>
                 <a:ea typeface="Calibri" pitchFamily="34" charset="-122"/>
                 <a:cs typeface="Calibri" pitchFamily="34" charset="-120"/>
               </a:rPr>
-              <a:t>The dashboard totalled its stored records with a single DynamoDB scan, which silently caps at ~1 MB. All 39 tests and the full emulator run passed, so the undercount only surfaced on the real AWS account — no error, just a smaller number.</a:t>
-            </a:r>
-            <a:endParaRPr lang="en-US" sz="1300" dirty="0"/>
-          </a:p>
-        </p:txBody>
-      </p:sp>
-      <p:sp>
-        <p:nvSpPr>
-          <p:cNvPr id="6" name="Shape 4"/>
-          <p:cNvSpPr/>
-          <p:nvPr/>
-        </p:nvSpPr>
-        <p:spPr>
-          <a:xfrm>
-            <a:off x="731520" y="4041648"/>
-            <a:ext cx="10698480" cy="1965960"/>
-          </a:xfrm>
-          <a:prstGeom prst="roundRect">
-            <a:avLst>
-              <a:gd name="adj" fmla="val 4651"/>
-            </a:avLst>
-          </a:prstGeom>
-          <a:solidFill>
-            <a:srgbClr val="EFF4EC"/>
-          </a:solidFill>
+              <a:t>PROBLEM</a:t>
+            </a:r>
+            <a:endParaRPr lang="en-US" sz="1200" dirty="0"/>
+          </a:p>
+        </p:txBody>
+      </p:sp>
+      <p:sp>
+        <p:nvSpPr>
+          <p:cNvPr id="8" name="Shape 6"/>
+          <p:cNvSpPr/>
+          <p:nvPr/>
+        </p:nvSpPr>
+        <p:spPr>
+          <a:xfrm>
+            <a:off x="1188720" y="3081528"/>
+            <a:ext cx="4427068" cy="0"/>
+          </a:xfrm>
+          <a:prstGeom prst="line">
+            <a:avLst/>
+          </a:prstGeom>
+          <a:noFill/>
           <a:ln w="19050">
             <a:solidFill>
-              <a:srgbClr val="2E7D46"/>
+              <a:srgbClr val="D1584E"/>
             </a:solidFill>
             <a:prstDash val="solid"/>
           </a:ln>
@@ -3304,82 +3334,172 @@
       </p:sp>
       <p:sp>
         <p:nvSpPr>
-          <p:cNvPr id="7" name="Text 5"/>
-          <p:cNvSpPr/>
-          <p:nvPr/>
-        </p:nvSpPr>
-        <p:spPr>
-          <a:xfrm>
-            <a:off x="1005840" y="4224528"/>
-            <a:ext cx="3657600" cy="457200"/>
-          </a:xfrm>
-          <a:prstGeom prst="rect">
-            <a:avLst/>
-          </a:prstGeom>
-          <a:noFill/>
-          <a:ln/>
-        </p:spPr>
-        <p:txBody>
-          <a:bodyPr wrap="square" lIns="0" tIns="0" rIns="0" bIns="0" rtlCol="0" anchor="ctr"/>
-          <a:lstStyle/>
-          <a:p>
-            <a:pPr indent="0" marL="0">
-              <a:buNone/>
-            </a:pPr>
-            <a:r>
-              <a:rPr lang="en-US" sz="1900" b="1" dirty="0">
-                <a:solidFill>
-                  <a:srgbClr val="2E7D46"/>
-                </a:solidFill>
-                <a:latin typeface="Cambria" pitchFamily="34" charset="0"/>
-                <a:ea typeface="Cambria" pitchFamily="34" charset="-122"/>
-                <a:cs typeface="Cambria" pitchFamily="34" charset="-120"/>
-              </a:rPr>
-              <a:t>Solution</a:t>
-            </a:r>
-            <a:endParaRPr lang="en-US" sz="1900" dirty="0"/>
-          </a:p>
-        </p:txBody>
-      </p:sp>
-      <p:sp>
-        <p:nvSpPr>
-          <p:cNvPr id="8" name="Text 6"/>
-          <p:cNvSpPr/>
-          <p:nvPr/>
-        </p:nvSpPr>
-        <p:spPr>
-          <a:xfrm>
-            <a:off x="1005840" y="4700016"/>
-            <a:ext cx="9966960" cy="1188720"/>
-          </a:xfrm>
-          <a:prstGeom prst="rect">
-            <a:avLst/>
-          </a:prstGeom>
-          <a:noFill/>
-          <a:ln/>
-        </p:spPr>
-        <p:txBody>
-          <a:bodyPr wrap="square" lIns="0" tIns="0" rIns="0" bIns="0" rtlCol="0" anchor="ctr"/>
+          <p:cNvPr id="9" name="Text 7"/>
+          <p:cNvSpPr/>
+          <p:nvPr/>
+        </p:nvSpPr>
+        <p:spPr>
+          <a:xfrm>
+            <a:off x="1188720" y="3246120"/>
+            <a:ext cx="4427068" cy="2651760"/>
+          </a:xfrm>
+          <a:prstGeom prst="rect">
+            <a:avLst/>
+          </a:prstGeom>
+          <a:noFill/>
+          <a:ln/>
+        </p:spPr>
+        <p:txBody>
+          <a:bodyPr wrap="square" lIns="0" tIns="0" rIns="0" bIns="0" rtlCol="0" anchor="t"/>
           <a:lstStyle/>
           <a:p>
             <a:pPr indent="0" marL="0">
               <a:lnSpc>
-                <a:spcPct val="105000"/>
+                <a:spcPct val="128000"/>
               </a:lnSpc>
               <a:buNone/>
             </a:pPr>
             <a:r>
-              <a:rPr lang="en-US" sz="1300" dirty="0">
-                <a:solidFill>
-                  <a:srgbClr val="17231C"/>
+              <a:rPr lang="en-US" sz="1350" dirty="0">
+                <a:solidFill>
+                  <a:srgbClr val="EEF2F6"/>
                 </a:solidFill>
                 <a:latin typeface="Calibri" pitchFamily="34" charset="0"/>
                 <a:ea typeface="Calibri" pitchFamily="34" charset="-122"/>
                 <a:cs typeface="Calibri" pitchFamily="34" charset="-120"/>
               </a:rPr>
-              <a:t>The count now follows DynamoDB's pagination cursor and sums every page. Locked in by a three-page test (500 + 500 + 214 = 1,214) and re-verified against the live deployed table.</a:t>
-            </a:r>
-            <a:endParaRPr lang="en-US" sz="1300" dirty="0"/>
+              <a:t>The dashboard is a FastAPI application written for a long-running server, but on AWS it had to answer through a single stateless function per request. FastAPI speaks the ASGI protocol; API Gateway speaks events and JSON. The two do not fit together on their own, and the app also mounts a static directory at import time that is not part of the deployed package.</a:t>
+            </a:r>
+            <a:endParaRPr lang="en-US" sz="1350" dirty="0"/>
+          </a:p>
+        </p:txBody>
+      </p:sp>
+      <p:sp>
+        <p:nvSpPr>
+          <p:cNvPr id="10" name="Shape 8"/>
+          <p:cNvSpPr/>
+          <p:nvPr/>
+        </p:nvSpPr>
+        <p:spPr>
+          <a:xfrm>
+            <a:off x="6393028" y="2423160"/>
+            <a:ext cx="5067148" cy="3657600"/>
+          </a:xfrm>
+          <a:prstGeom prst="roundRect">
+            <a:avLst/>
+          </a:prstGeom>
+          <a:solidFill>
+            <a:srgbClr val="222733"/>
+          </a:solidFill>
+          <a:ln w="12700">
+            <a:solidFill>
+              <a:srgbClr val="363B47"/>
+            </a:solidFill>
+            <a:prstDash val="solid"/>
+          </a:ln>
+        </p:spPr>
+      </p:sp>
+      <p:sp>
+        <p:nvSpPr>
+          <p:cNvPr id="11" name="Text 9"/>
+          <p:cNvSpPr/>
+          <p:nvPr/>
+        </p:nvSpPr>
+        <p:spPr>
+          <a:xfrm>
+            <a:off x="6713068" y="2697480"/>
+            <a:ext cx="4427068" cy="320040"/>
+          </a:xfrm>
+          <a:prstGeom prst="rect">
+            <a:avLst/>
+          </a:prstGeom>
+          <a:noFill/>
+          <a:ln/>
+        </p:spPr>
+        <p:txBody>
+          <a:bodyPr wrap="square" lIns="0" tIns="0" rIns="0" bIns="0" rtlCol="0" anchor="ctr"/>
+          <a:lstStyle/>
+          <a:p>
+            <a:pPr indent="0" marL="0">
+              <a:buNone/>
+            </a:pPr>
+            <a:r>
+              <a:rPr lang="en-US" sz="1200" b="1" spc="200" kern="0" dirty="0">
+                <a:solidFill>
+                  <a:srgbClr val="3FAE82"/>
+                </a:solidFill>
+                <a:latin typeface="Calibri" pitchFamily="34" charset="0"/>
+                <a:ea typeface="Calibri" pitchFamily="34" charset="-122"/>
+                <a:cs typeface="Calibri" pitchFamily="34" charset="-120"/>
+              </a:rPr>
+              <a:t>SOLUTION</a:t>
+            </a:r>
+            <a:endParaRPr lang="en-US" sz="1200" dirty="0"/>
+          </a:p>
+        </p:txBody>
+      </p:sp>
+      <p:sp>
+        <p:nvSpPr>
+          <p:cNvPr id="12" name="Shape 10"/>
+          <p:cNvSpPr/>
+          <p:nvPr/>
+        </p:nvSpPr>
+        <p:spPr>
+          <a:xfrm>
+            <a:off x="6713068" y="3081528"/>
+            <a:ext cx="4427068" cy="0"/>
+          </a:xfrm>
+          <a:prstGeom prst="line">
+            <a:avLst/>
+          </a:prstGeom>
+          <a:noFill/>
+          <a:ln w="19050">
+            <a:solidFill>
+              <a:srgbClr val="3FAE82"/>
+            </a:solidFill>
+            <a:prstDash val="solid"/>
+          </a:ln>
+        </p:spPr>
+      </p:sp>
+      <p:sp>
+        <p:nvSpPr>
+          <p:cNvPr id="13" name="Text 11"/>
+          <p:cNvSpPr/>
+          <p:nvPr/>
+        </p:nvSpPr>
+        <p:spPr>
+          <a:xfrm>
+            <a:off x="6713068" y="3246120"/>
+            <a:ext cx="4427068" cy="2651760"/>
+          </a:xfrm>
+          <a:prstGeom prst="rect">
+            <a:avLst/>
+          </a:prstGeom>
+          <a:noFill/>
+          <a:ln/>
+        </p:spPr>
+        <p:txBody>
+          <a:bodyPr wrap="square" lIns="0" tIns="0" rIns="0" bIns="0" rtlCol="0" anchor="t"/>
+          <a:lstStyle/>
+          <a:p>
+            <a:pPr indent="0" marL="0">
+              <a:lnSpc>
+                <a:spcPct val="128000"/>
+              </a:lnSpc>
+              <a:buNone/>
+            </a:pPr>
+            <a:r>
+              <a:rPr lang="en-US" sz="1350" dirty="0">
+                <a:solidFill>
+                  <a:srgbClr val="EEF2F6"/>
+                </a:solidFill>
+                <a:latin typeface="Calibri" pitchFamily="34" charset="0"/>
+                <a:ea typeface="Calibri" pitchFamily="34" charset="-122"/>
+                <a:cs typeface="Calibri" pitchFamily="34" charset="-120"/>
+              </a:rPr>
+              <a:t>A Mangum adapter wraps the FastAPI app and translates each API Gateway event into the ASGI scope the framework expects, then translates the response back, so the identical routes and validation run locally and in the cloud with no parallel handler to maintain. The static mount was made tolerant of the directory being absent, since the browser is served from S3, not the function.</a:t>
+            </a:r>
+            <a:endParaRPr lang="en-US" sz="1350" dirty="0"/>
           </a:p>
         </p:txBody>
       </p:sp>
